--- a/Bizzing-Bee-Strategy.pptx
+++ b/Bizzing-Bee-Strategy.pptx
@@ -20,9 +20,11 @@
     <p:sldId id="268" r:id="rId14"/>
     <p:sldId id="269" r:id="rId15"/>
     <p:sldId id="270" r:id="rId16"/>
+    <p:sldId id="271" r:id="rId17"/>
+    <p:sldId id="272" r:id="rId18"/>
   </p:sldIdLst>
   <p:notesMasterIdLst>
-    <p:notesMasterId r:id="rId17"/>
+    <p:notesMasterId r:id="rId19"/>
   </p:notesMasterIdLst>
   <p:sldSz cx="12191695" cy="6858000"/>
   <p:notesSz cx="6858000" cy="12191695"/>
@@ -1633,7 +1635,7 @@
           <a:p>
             <a:r>
               <a:rPr lang="en-US" dirty="0"/>
-              <a:t>High margin, CAC-dominated cost structure, credible growth path. Be honest that venture scale needs more than the niche.</a:t>
+              <a:t>The full commercial channel matrix: what each channel does, where it plays, its cost per acquired family, and its role. Low-CAC channels dominate by design; paid is last.</a:t>
             </a:r>
             <a:endParaRPr lang="en-US" dirty="0"/>
           </a:p>
@@ -1721,7 +1723,7 @@
           <a:p>
             <a:r>
               <a:rPr lang="en-US" dirty="0"/>
-              <a:t>Phases 0-4 from COMMERCIALIZATION.md plus the CRM loop, then an invite-only alpha sourced from coaches.</a:t>
+              <a:t>The sequence: coaches and community first (Q1), referral and content switched on (Q2), scale plus India (Q3), paid retargeting and SE Asia last (Q4). CAC declines as compounding channels take over.</a:t>
             </a:r>
             <a:endParaRPr lang="en-US" dirty="0"/>
           </a:p>
@@ -1809,7 +1811,7 @@
           <a:p>
             <a:r>
               <a:rPr lang="en-US" dirty="0"/>
-              <a:t>Risks are dominated by distribution; the ask is a concrete set of go/no-go decisions to green-light the alpha.</a:t>
+              <a:t>High margin, CAC-dominated cost structure, credible growth path. Be honest that venture scale needs more than the niche.</a:t>
             </a:r>
             <a:endParaRPr lang="en-US" dirty="0"/>
           </a:p>
@@ -1833,6 +1835,182 @@
             <a:fld id="{F7021451-1387-4CA6-816F-3879F97B5CBC}" type="slidenum">
               <a:rPr lang="en-US"/>
               <a:t>15</a:t>
+            </a:fld>
+            <a:endParaRPr lang="en-US"/>
+          </a:p>
+        </p:txBody>
+      </p:sp>
+    </p:spTree>
+    <p:extLst>
+      <p:ext uri="{BB962C8B-B14F-4D97-AF65-F5344CB8AC3E}">
+        <p14:creationId xmlns:p14="http://schemas.microsoft.com/office/powerpoint/2010/main" val="1024086991"/>
+      </p:ext>
+    </p:extLst>
+  </p:cSld>
+  <p:clrMapOvr>
+    <a:masterClrMapping/>
+  </p:clrMapOvr>
+</p:notes>
+</file>
+
+<file path=ppt/notesSlides/notesSlide16.xml><?xml version="1.0" encoding="utf-8"?>
+<p:notes xmlns:a="http://schemas.openxmlformats.org/drawingml/2006/main" xmlns:r="http://schemas.openxmlformats.org/officeDocument/2006/relationships" xmlns:p="http://schemas.openxmlformats.org/presentationml/2006/main">
+  <p:cSld>
+    <p:spTree>
+      <p:nvGrpSpPr>
+        <p:cNvPr id="1" name=""/>
+        <p:cNvGrpSpPr/>
+        <p:nvPr/>
+      </p:nvGrpSpPr>
+      <p:grpSpPr>
+        <a:xfrm>
+          <a:off x="0" y="0"/>
+          <a:ext cx="0" cy="0"/>
+          <a:chOff x="0" y="0"/>
+          <a:chExt cx="0" cy="0"/>
+        </a:xfrm>
+      </p:grpSpPr>
+      <p:sp>
+        <p:nvSpPr>
+          <p:cNvPr id="2" name="Slide Image Placeholder 1"/>
+          <p:cNvSpPr>
+            <a:spLocks noGrp="1" noRot="1" noChangeAspect="1"/>
+          </p:cNvSpPr>
+          <p:nvPr>
+            <p:ph type="sldImg"/>
+          </p:nvPr>
+        </p:nvSpPr>
+        <p:spPr/>
+      </p:sp>
+      <p:sp>
+        <p:nvSpPr>
+          <p:cNvPr id="3" name="Notes Placeholder 2"/>
+          <p:cNvSpPr>
+            <a:spLocks noGrp="1"/>
+          </p:cNvSpPr>
+          <p:nvPr>
+            <p:ph type="body" idx="1"/>
+          </p:nvPr>
+        </p:nvSpPr>
+        <p:spPr/>
+        <p:txBody>
+          <a:bodyPr/>
+          <a:lstStyle/>
+          <a:p>
+            <a:r>
+              <a:rPr lang="en-US" dirty="0"/>
+              <a:t>Phases 0-4 from COMMERCIALIZATION.md plus the CRM loop, then an invite-only alpha sourced from coaches.</a:t>
+            </a:r>
+            <a:endParaRPr lang="en-US" dirty="0"/>
+          </a:p>
+        </p:txBody>
+      </p:sp>
+      <p:sp>
+        <p:nvSpPr>
+          <p:cNvPr id="4" name="Slide Number Placeholder 3"/>
+          <p:cNvSpPr>
+            <a:spLocks noGrp="1"/>
+          </p:cNvSpPr>
+          <p:nvPr>
+            <p:ph type="sldNum" sz="quarter" idx="10"/>
+          </p:nvPr>
+        </p:nvSpPr>
+        <p:spPr/>
+        <p:txBody>
+          <a:bodyPr/>
+          <a:lstStyle/>
+          <a:p>
+            <a:fld id="{F7021451-1387-4CA6-816F-3879F97B5CBC}" type="slidenum">
+              <a:rPr lang="en-US"/>
+              <a:t>16</a:t>
+            </a:fld>
+            <a:endParaRPr lang="en-US"/>
+          </a:p>
+        </p:txBody>
+      </p:sp>
+    </p:spTree>
+    <p:extLst>
+      <p:ext uri="{BB962C8B-B14F-4D97-AF65-F5344CB8AC3E}">
+        <p14:creationId xmlns:p14="http://schemas.microsoft.com/office/powerpoint/2010/main" val="1024086991"/>
+      </p:ext>
+    </p:extLst>
+  </p:cSld>
+  <p:clrMapOvr>
+    <a:masterClrMapping/>
+  </p:clrMapOvr>
+</p:notes>
+</file>
+
+<file path=ppt/notesSlides/notesSlide17.xml><?xml version="1.0" encoding="utf-8"?>
+<p:notes xmlns:a="http://schemas.openxmlformats.org/drawingml/2006/main" xmlns:r="http://schemas.openxmlformats.org/officeDocument/2006/relationships" xmlns:p="http://schemas.openxmlformats.org/presentationml/2006/main">
+  <p:cSld>
+    <p:spTree>
+      <p:nvGrpSpPr>
+        <p:cNvPr id="1" name=""/>
+        <p:cNvGrpSpPr/>
+        <p:nvPr/>
+      </p:nvGrpSpPr>
+      <p:grpSpPr>
+        <a:xfrm>
+          <a:off x="0" y="0"/>
+          <a:ext cx="0" cy="0"/>
+          <a:chOff x="0" y="0"/>
+          <a:chExt cx="0" cy="0"/>
+        </a:xfrm>
+      </p:grpSpPr>
+      <p:sp>
+        <p:nvSpPr>
+          <p:cNvPr id="2" name="Slide Image Placeholder 1"/>
+          <p:cNvSpPr>
+            <a:spLocks noGrp="1" noRot="1" noChangeAspect="1"/>
+          </p:cNvSpPr>
+          <p:nvPr>
+            <p:ph type="sldImg"/>
+          </p:nvPr>
+        </p:nvSpPr>
+        <p:spPr/>
+      </p:sp>
+      <p:sp>
+        <p:nvSpPr>
+          <p:cNvPr id="3" name="Notes Placeholder 2"/>
+          <p:cNvSpPr>
+            <a:spLocks noGrp="1"/>
+          </p:cNvSpPr>
+          <p:nvPr>
+            <p:ph type="body" idx="1"/>
+          </p:nvPr>
+        </p:nvSpPr>
+        <p:spPr/>
+        <p:txBody>
+          <a:bodyPr/>
+          <a:lstStyle/>
+          <a:p>
+            <a:r>
+              <a:rPr lang="en-US" dirty="0"/>
+              <a:t>Risks are dominated by distribution; the ask is a concrete set of go/no-go decisions to green-light the alpha.</a:t>
+            </a:r>
+            <a:endParaRPr lang="en-US" dirty="0"/>
+          </a:p>
+        </p:txBody>
+      </p:sp>
+      <p:sp>
+        <p:nvSpPr>
+          <p:cNvPr id="4" name="Slide Number Placeholder 3"/>
+          <p:cNvSpPr>
+            <a:spLocks noGrp="1"/>
+          </p:cNvSpPr>
+          <p:nvPr>
+            <p:ph type="sldNum" sz="quarter" idx="10"/>
+          </p:nvPr>
+        </p:nvSpPr>
+        <p:spPr/>
+        <p:txBody>
+          <a:bodyPr/>
+          <a:lstStyle/>
+          <a:p>
+            <a:fld id="{F7021451-1387-4CA6-816F-3879F97B5CBC}" type="slidenum">
+              <a:rPr lang="en-US"/>
+              <a:t>17</a:t>
             </a:fld>
             <a:endParaRPr lang="en-US"/>
           </a:p>
@@ -5220,7 +5398,7 @@
                 <a:ea typeface="Calibri" pitchFamily="34" charset="-122"/>
                 <a:cs typeface="Calibri" pitchFamily="34" charset="-120"/>
               </a:rPr>
-              <a:t>THE NUMBERS</a:t>
+              <a:t>GO-TO-MARKET PLAYBOOK</a:t>
             </a:r>
             <a:endParaRPr lang="en-US" sz="1200" dirty="0"/>
           </a:p>
@@ -5259,7 +5437,7 @@
                 <a:ea typeface="Cambria" pitchFamily="34" charset="-122"/>
                 <a:cs typeface="Cambria" pitchFamily="34" charset="-120"/>
               </a:rPr>
-              <a:t>Validated Year-1 P&amp;L and a 3-year sketch</a:t>
+              <a:t>Every channel, its tactic, its market — and its cost per family</a:t>
             </a:r>
             <a:endParaRPr lang="en-US" sz="3000" dirty="0"/>
           </a:p>
@@ -5273,8 +5451,8 @@
         </p:nvSpPr>
         <p:spPr>
           <a:xfrm>
-            <a:off x="640080" y="1691640"/>
-            <a:ext cx="5029200" cy="365760"/>
+            <a:off x="640080" y="1627632"/>
+            <a:ext cx="2331720" cy="274320"/>
           </a:xfrm>
           <a:prstGeom prst="rect">
             <a:avLst/>
@@ -5290,34 +5468,190 @@
               <a:buNone/>
             </a:pPr>
             <a:r>
-              <a:rPr lang="en-US" sz="1500" b="1" dirty="0">
-                <a:solidFill>
-                  <a:srgbClr val="211D17"/>
-                </a:solidFill>
-                <a:latin typeface="Cambria" pitchFamily="34" charset="0"/>
-                <a:ea typeface="Cambria" pitchFamily="34" charset="-122"/>
-                <a:cs typeface="Cambria" pitchFamily="34" charset="-120"/>
-              </a:rPr>
-              <a:t>Year-1 P&amp;L @ 1,000 kids</a:t>
-            </a:r>
-            <a:endParaRPr lang="en-US" sz="1500" dirty="0"/>
-          </a:p>
-        </p:txBody>
-      </p:sp>
-      <p:sp>
-        <p:nvSpPr>
-          <p:cNvPr id="5" name="Shape 3"/>
-          <p:cNvSpPr/>
-          <p:nvPr/>
-        </p:nvSpPr>
-        <p:spPr>
-          <a:xfrm>
-            <a:off x="640080" y="2148840"/>
-            <a:ext cx="5120640" cy="475488"/>
+              <a:rPr lang="en-US" sz="1150" b="1" spc="100" kern="0" dirty="0">
+                <a:solidFill>
+                  <a:srgbClr val="B67B00"/>
+                </a:solidFill>
+                <a:latin typeface="Calibri" pitchFamily="34" charset="0"/>
+                <a:ea typeface="Calibri" pitchFamily="34" charset="-122"/>
+                <a:cs typeface="Calibri" pitchFamily="34" charset="-120"/>
+              </a:rPr>
+              <a:t>Channel</a:t>
+            </a:r>
+            <a:endParaRPr lang="en-US" sz="1150" dirty="0"/>
+          </a:p>
+        </p:txBody>
+      </p:sp>
+      <p:sp>
+        <p:nvSpPr>
+          <p:cNvPr id="5" name="Text 3"/>
+          <p:cNvSpPr/>
+          <p:nvPr/>
+        </p:nvSpPr>
+        <p:spPr>
+          <a:xfrm>
+            <a:off x="2971800" y="1627632"/>
+            <a:ext cx="4343400" cy="274320"/>
+          </a:xfrm>
+          <a:prstGeom prst="rect">
+            <a:avLst/>
+          </a:prstGeom>
+          <a:noFill/>
+          <a:ln/>
+        </p:spPr>
+        <p:txBody>
+          <a:bodyPr wrap="square" rtlCol="0" anchor="ctr"/>
+          <a:lstStyle/>
+          <a:p>
+            <a:pPr indent="0" marL="0">
+              <a:buNone/>
+            </a:pPr>
+            <a:r>
+              <a:rPr lang="en-US" sz="1150" b="1" spc="100" kern="0" dirty="0">
+                <a:solidFill>
+                  <a:srgbClr val="B67B00"/>
+                </a:solidFill>
+                <a:latin typeface="Calibri" pitchFamily="34" charset="0"/>
+                <a:ea typeface="Calibri" pitchFamily="34" charset="-122"/>
+                <a:cs typeface="Calibri" pitchFamily="34" charset="-120"/>
+              </a:rPr>
+              <a:t>Motion / tactic</a:t>
+            </a:r>
+            <a:endParaRPr lang="en-US" sz="1150" dirty="0"/>
+          </a:p>
+        </p:txBody>
+      </p:sp>
+      <p:sp>
+        <p:nvSpPr>
+          <p:cNvPr id="6" name="Text 4"/>
+          <p:cNvSpPr/>
+          <p:nvPr/>
+        </p:nvSpPr>
+        <p:spPr>
+          <a:xfrm>
+            <a:off x="7315200" y="1627632"/>
+            <a:ext cx="1417320" cy="274320"/>
+          </a:xfrm>
+          <a:prstGeom prst="rect">
+            <a:avLst/>
+          </a:prstGeom>
+          <a:noFill/>
+          <a:ln/>
+        </p:spPr>
+        <p:txBody>
+          <a:bodyPr wrap="square" rtlCol="0" anchor="ctr"/>
+          <a:lstStyle/>
+          <a:p>
+            <a:pPr indent="0" marL="0">
+              <a:buNone/>
+            </a:pPr>
+            <a:r>
+              <a:rPr lang="en-US" sz="1150" b="1" spc="100" kern="0" dirty="0">
+                <a:solidFill>
+                  <a:srgbClr val="B67B00"/>
+                </a:solidFill>
+                <a:latin typeface="Calibri" pitchFamily="34" charset="0"/>
+                <a:ea typeface="Calibri" pitchFamily="34" charset="-122"/>
+                <a:cs typeface="Calibri" pitchFamily="34" charset="-120"/>
+              </a:rPr>
+              <a:t>Market</a:t>
+            </a:r>
+            <a:endParaRPr lang="en-US" sz="1150" dirty="0"/>
+          </a:p>
+        </p:txBody>
+      </p:sp>
+      <p:sp>
+        <p:nvSpPr>
+          <p:cNvPr id="7" name="Text 5"/>
+          <p:cNvSpPr/>
+          <p:nvPr/>
+        </p:nvSpPr>
+        <p:spPr>
+          <a:xfrm>
+            <a:off x="8732520" y="1627632"/>
+            <a:ext cx="1143000" cy="274320"/>
+          </a:xfrm>
+          <a:prstGeom prst="rect">
+            <a:avLst/>
+          </a:prstGeom>
+          <a:noFill/>
+          <a:ln/>
+        </p:spPr>
+        <p:txBody>
+          <a:bodyPr wrap="square" rtlCol="0" anchor="ctr"/>
+          <a:lstStyle/>
+          <a:p>
+            <a:pPr indent="0" marL="0">
+              <a:buNone/>
+            </a:pPr>
+            <a:r>
+              <a:rPr lang="en-US" sz="1150" b="1" spc="100" kern="0" dirty="0">
+                <a:solidFill>
+                  <a:srgbClr val="B67B00"/>
+                </a:solidFill>
+                <a:latin typeface="Calibri" pitchFamily="34" charset="0"/>
+                <a:ea typeface="Calibri" pitchFamily="34" charset="-122"/>
+                <a:cs typeface="Calibri" pitchFamily="34" charset="-120"/>
+              </a:rPr>
+              <a:t>CAC</a:t>
+            </a:r>
+            <a:endParaRPr lang="en-US" sz="1150" dirty="0"/>
+          </a:p>
+        </p:txBody>
+      </p:sp>
+      <p:sp>
+        <p:nvSpPr>
+          <p:cNvPr id="8" name="Text 6"/>
+          <p:cNvSpPr/>
+          <p:nvPr/>
+        </p:nvSpPr>
+        <p:spPr>
+          <a:xfrm>
+            <a:off x="9875520" y="1627632"/>
+            <a:ext cx="1645920" cy="274320"/>
+          </a:xfrm>
+          <a:prstGeom prst="rect">
+            <a:avLst/>
+          </a:prstGeom>
+          <a:noFill/>
+          <a:ln/>
+        </p:spPr>
+        <p:txBody>
+          <a:bodyPr wrap="square" rtlCol="0" anchor="ctr"/>
+          <a:lstStyle/>
+          <a:p>
+            <a:pPr indent="0" marL="0">
+              <a:buNone/>
+            </a:pPr>
+            <a:r>
+              <a:rPr lang="en-US" sz="1150" b="1" spc="100" kern="0" dirty="0">
+                <a:solidFill>
+                  <a:srgbClr val="B67B00"/>
+                </a:solidFill>
+                <a:latin typeface="Calibri" pitchFamily="34" charset="0"/>
+                <a:ea typeface="Calibri" pitchFamily="34" charset="-122"/>
+                <a:cs typeface="Calibri" pitchFamily="34" charset="-120"/>
+              </a:rPr>
+              <a:t>Role</a:t>
+            </a:r>
+            <a:endParaRPr lang="en-US" sz="1150" dirty="0"/>
+          </a:p>
+        </p:txBody>
+      </p:sp>
+      <p:sp>
+        <p:nvSpPr>
+          <p:cNvPr id="9" name="Shape 7"/>
+          <p:cNvSpPr/>
+          <p:nvPr/>
+        </p:nvSpPr>
+        <p:spPr>
+          <a:xfrm>
+            <a:off x="594360" y="1892808"/>
+            <a:ext cx="11002975" cy="658368"/>
           </a:xfrm>
           <a:prstGeom prst="roundRect">
             <a:avLst>
-              <a:gd name="adj" fmla="val 17308"/>
+              <a:gd name="adj" fmla="val 12500"/>
             </a:avLst>
           </a:prstGeom>
           <a:solidFill>
@@ -5335,14 +5669,36 @@
       </p:sp>
       <p:sp>
         <p:nvSpPr>
-          <p:cNvPr id="6" name="Text 4"/>
-          <p:cNvSpPr/>
-          <p:nvPr/>
-        </p:nvSpPr>
-        <p:spPr>
-          <a:xfrm>
-            <a:off x="841248" y="2148840"/>
-            <a:ext cx="3566160" cy="475488"/>
+          <p:cNvPr id="10" name="Shape 8"/>
+          <p:cNvSpPr/>
+          <p:nvPr/>
+        </p:nvSpPr>
+        <p:spPr>
+          <a:xfrm>
+            <a:off x="685800" y="2057400"/>
+            <a:ext cx="109728" cy="402336"/>
+          </a:xfrm>
+          <a:prstGeom prst="roundRect">
+            <a:avLst>
+              <a:gd name="adj" fmla="val 33333"/>
+            </a:avLst>
+          </a:prstGeom>
+          <a:solidFill>
+            <a:srgbClr val="7C5CFF"/>
+          </a:solidFill>
+          <a:ln/>
+        </p:spPr>
+      </p:sp>
+      <p:sp>
+        <p:nvSpPr>
+          <p:cNvPr id="11" name="Text 9"/>
+          <p:cNvSpPr/>
+          <p:nvPr/>
+        </p:nvSpPr>
+        <p:spPr>
+          <a:xfrm>
+            <a:off x="896112" y="1911096"/>
+            <a:ext cx="2075688" cy="713232"/>
           </a:xfrm>
           <a:prstGeom prst="rect">
             <a:avLst/>
@@ -5358,30 +5714,69 @@
               <a:buNone/>
             </a:pPr>
             <a:r>
-              <a:rPr lang="en-US" sz="1250" dirty="0">
+              <a:rPr lang="en-US" sz="1250" b="1" dirty="0">
                 <a:solidFill>
                   <a:srgbClr val="211D17"/>
+                </a:solidFill>
+                <a:latin typeface="Cambria" pitchFamily="34" charset="0"/>
+                <a:ea typeface="Cambria" pitchFamily="34" charset="-122"/>
+                <a:cs typeface="Cambria" pitchFamily="34" charset="-120"/>
+              </a:rPr>
+              <a:t>Coach &amp; organizer partnerships</a:t>
+            </a:r>
+            <a:endParaRPr lang="en-US" sz="1250" dirty="0"/>
+          </a:p>
+        </p:txBody>
+      </p:sp>
+      <p:sp>
+        <p:nvSpPr>
+          <p:cNvPr id="12" name="Text 10"/>
+          <p:cNvSpPr/>
+          <p:nvPr/>
+        </p:nvSpPr>
+        <p:spPr>
+          <a:xfrm>
+            <a:off x="3227832" y="1911096"/>
+            <a:ext cx="4233672" cy="713232"/>
+          </a:xfrm>
+          <a:prstGeom prst="rect">
+            <a:avLst/>
+          </a:prstGeom>
+          <a:noFill/>
+          <a:ln/>
+        </p:spPr>
+        <p:txBody>
+          <a:bodyPr wrap="square" lIns="0" tIns="0" rIns="0" bIns="0" rtlCol="0" anchor="ctr"/>
+          <a:lstStyle/>
+          <a:p>
+            <a:pPr indent="0" marL="0">
+              <a:buNone/>
+            </a:pPr>
+            <a:r>
+              <a:rPr lang="en-US" sz="1050" dirty="0">
+                <a:solidFill>
+                  <a:srgbClr val="6A6153"/>
                 </a:solidFill>
                 <a:latin typeface="Calibri" pitchFamily="34" charset="0"/>
                 <a:ea typeface="Calibri" pitchFamily="34" charset="-122"/>
                 <a:cs typeface="Calibri" pitchFamily="34" charset="-120"/>
               </a:rPr>
-              <a:t>Subscription revenue (ARR)</a:t>
-            </a:r>
-            <a:endParaRPr lang="en-US" sz="1250" dirty="0"/>
-          </a:p>
-        </p:txBody>
-      </p:sp>
-      <p:sp>
-        <p:nvSpPr>
-          <p:cNvPr id="7" name="Text 5"/>
-          <p:cNvSpPr/>
-          <p:nvPr/>
-        </p:nvSpPr>
-        <p:spPr>
-          <a:xfrm>
-            <a:off x="4297680" y="2148840"/>
-            <a:ext cx="1280160" cy="475488"/>
+              <a:t>Co-branded coach codes, free coach seats + roster view; land NSF / regional-bee coaches &amp; tutoring centers</a:t>
+            </a:r>
+            <a:endParaRPr lang="en-US" sz="1050" dirty="0"/>
+          </a:p>
+        </p:txBody>
+      </p:sp>
+      <p:sp>
+        <p:nvSpPr>
+          <p:cNvPr id="13" name="Text 11"/>
+          <p:cNvSpPr/>
+          <p:nvPr/>
+        </p:nvSpPr>
+        <p:spPr>
+          <a:xfrm>
+            <a:off x="7571232" y="1911096"/>
+            <a:ext cx="1307592" cy="713232"/>
           </a:xfrm>
           <a:prstGeom prst="rect">
             <a:avLst/>
@@ -5393,38 +5788,116 @@
           <a:bodyPr wrap="square" lIns="0" tIns="0" rIns="0" bIns="0" rtlCol="0" anchor="ctr"/>
           <a:lstStyle/>
           <a:p>
-            <a:pPr algn="r" indent="0" marL="0">
-              <a:buNone/>
-            </a:pPr>
-            <a:r>
-              <a:rPr lang="en-US" sz="1500" b="1" dirty="0">
-                <a:solidFill>
-                  <a:srgbClr val="211D17"/>
-                </a:solidFill>
-                <a:latin typeface="Cambria" pitchFamily="34" charset="0"/>
-                <a:ea typeface="Cambria" pitchFamily="34" charset="-122"/>
-                <a:cs typeface="Cambria" pitchFamily="34" charset="-120"/>
-              </a:rPr>
-              <a:t>$45.5k</a:t>
-            </a:r>
-            <a:endParaRPr lang="en-US" sz="1500" dirty="0"/>
-          </a:p>
-        </p:txBody>
-      </p:sp>
-      <p:sp>
-        <p:nvSpPr>
-          <p:cNvPr id="8" name="Shape 6"/>
-          <p:cNvSpPr/>
-          <p:nvPr/>
-        </p:nvSpPr>
-        <p:spPr>
-          <a:xfrm>
-            <a:off x="640080" y="2697480"/>
-            <a:ext cx="5120640" cy="475488"/>
+            <a:pPr indent="0" marL="0">
+              <a:buNone/>
+            </a:pPr>
+            <a:r>
+              <a:rPr lang="en-US" sz="1100" dirty="0">
+                <a:solidFill>
+                  <a:srgbClr val="6A6153"/>
+                </a:solidFill>
+                <a:latin typeface="Calibri" pitchFamily="34" charset="0"/>
+                <a:ea typeface="Calibri" pitchFamily="34" charset="-122"/>
+                <a:cs typeface="Calibri" pitchFamily="34" charset="-120"/>
+              </a:rPr>
+              <a:t>US · CA</a:t>
+            </a:r>
+            <a:endParaRPr lang="en-US" sz="1100" dirty="0"/>
+          </a:p>
+        </p:txBody>
+      </p:sp>
+      <p:sp>
+        <p:nvSpPr>
+          <p:cNvPr id="14" name="Text 12"/>
+          <p:cNvSpPr/>
+          <p:nvPr/>
+        </p:nvSpPr>
+        <p:spPr>
+          <a:xfrm>
+            <a:off x="8988552" y="1911096"/>
+            <a:ext cx="1033272" cy="713232"/>
+          </a:xfrm>
+          <a:prstGeom prst="rect">
+            <a:avLst/>
+          </a:prstGeom>
+          <a:noFill/>
+          <a:ln/>
+        </p:spPr>
+        <p:txBody>
+          <a:bodyPr wrap="square" lIns="0" tIns="0" rIns="0" bIns="0" rtlCol="0" anchor="ctr"/>
+          <a:lstStyle/>
+          <a:p>
+            <a:pPr indent="0" marL="0">
+              <a:buNone/>
+            </a:pPr>
+            <a:r>
+              <a:rPr lang="en-US" sz="1100" b="1" dirty="0">
+                <a:solidFill>
+                  <a:srgbClr val="7C5CFF"/>
+                </a:solidFill>
+                <a:latin typeface="Calibri" pitchFamily="34" charset="0"/>
+                <a:ea typeface="Calibri" pitchFamily="34" charset="-122"/>
+                <a:cs typeface="Calibri" pitchFamily="34" charset="-120"/>
+              </a:rPr>
+              <a:t>$2–10</a:t>
+            </a:r>
+            <a:endParaRPr lang="en-US" sz="1100" dirty="0"/>
+          </a:p>
+        </p:txBody>
+      </p:sp>
+      <p:sp>
+        <p:nvSpPr>
+          <p:cNvPr id="15" name="Text 13"/>
+          <p:cNvSpPr/>
+          <p:nvPr/>
+        </p:nvSpPr>
+        <p:spPr>
+          <a:xfrm>
+            <a:off x="10131552" y="1911096"/>
+            <a:ext cx="1536192" cy="713232"/>
+          </a:xfrm>
+          <a:prstGeom prst="rect">
+            <a:avLst/>
+          </a:prstGeom>
+          <a:noFill/>
+          <a:ln/>
+        </p:spPr>
+        <p:txBody>
+          <a:bodyPr wrap="square" lIns="0" tIns="0" rIns="0" bIns="0" rtlCol="0" anchor="ctr"/>
+          <a:lstStyle/>
+          <a:p>
+            <a:pPr indent="0" marL="0">
+              <a:buNone/>
+            </a:pPr>
+            <a:r>
+              <a:rPr lang="en-US" sz="1100" dirty="0">
+                <a:solidFill>
+                  <a:srgbClr val="7C5CFF"/>
+                </a:solidFill>
+                <a:latin typeface="Calibri" pitchFamily="34" charset="0"/>
+                <a:ea typeface="Calibri" pitchFamily="34" charset="-122"/>
+                <a:cs typeface="Calibri" pitchFamily="34" charset="-120"/>
+              </a:rPr>
+              <a:t>Primary land</a:t>
+            </a:r>
+            <a:endParaRPr lang="en-US" sz="1100" dirty="0"/>
+          </a:p>
+        </p:txBody>
+      </p:sp>
+      <p:sp>
+        <p:nvSpPr>
+          <p:cNvPr id="16" name="Shape 14"/>
+          <p:cNvSpPr/>
+          <p:nvPr/>
+        </p:nvSpPr>
+        <p:spPr>
+          <a:xfrm>
+            <a:off x="594360" y="2615184"/>
+            <a:ext cx="11002975" cy="658368"/>
           </a:xfrm>
           <a:prstGeom prst="roundRect">
             <a:avLst>
-              <a:gd name="adj" fmla="val 17308"/>
+              <a:gd name="adj" fmla="val 12500"/>
             </a:avLst>
           </a:prstGeom>
           <a:solidFill>
@@ -5442,14 +5915,36 @@
       </p:sp>
       <p:sp>
         <p:nvSpPr>
-          <p:cNvPr id="9" name="Text 7"/>
-          <p:cNvSpPr/>
-          <p:nvPr/>
-        </p:nvSpPr>
-        <p:spPr>
-          <a:xfrm>
-            <a:off x="841248" y="2697480"/>
-            <a:ext cx="3566160" cy="475488"/>
+          <p:cNvPr id="17" name="Shape 15"/>
+          <p:cNvSpPr/>
+          <p:nvPr/>
+        </p:nvSpPr>
+        <p:spPr>
+          <a:xfrm>
+            <a:off x="685800" y="2779776"/>
+            <a:ext cx="109728" cy="402336"/>
+          </a:xfrm>
+          <a:prstGeom prst="roundRect">
+            <a:avLst>
+              <a:gd name="adj" fmla="val 33333"/>
+            </a:avLst>
+          </a:prstGeom>
+          <a:solidFill>
+            <a:srgbClr val="1E8A9E"/>
+          </a:solidFill>
+          <a:ln/>
+        </p:spPr>
+      </p:sp>
+      <p:sp>
+        <p:nvSpPr>
+          <p:cNvPr id="18" name="Text 16"/>
+          <p:cNvSpPr/>
+          <p:nvPr/>
+        </p:nvSpPr>
+        <p:spPr>
+          <a:xfrm>
+            <a:off x="896112" y="2633472"/>
+            <a:ext cx="2075688" cy="713232"/>
           </a:xfrm>
           <a:prstGeom prst="rect">
             <a:avLst/>
@@ -5465,30 +5960,69 @@
               <a:buNone/>
             </a:pPr>
             <a:r>
-              <a:rPr lang="en-US" sz="1250" dirty="0">
+              <a:rPr lang="en-US" sz="1250" b="1" dirty="0">
                 <a:solidFill>
                   <a:srgbClr val="211D17"/>
+                </a:solidFill>
+                <a:latin typeface="Cambria" pitchFamily="34" charset="0"/>
+                <a:ea typeface="Cambria" pitchFamily="34" charset="-122"/>
+                <a:cs typeface="Cambria" pitchFamily="34" charset="-120"/>
+              </a:rPr>
+              <a:t>Community seeding</a:t>
+            </a:r>
+            <a:endParaRPr lang="en-US" sz="1250" dirty="0"/>
+          </a:p>
+        </p:txBody>
+      </p:sp>
+      <p:sp>
+        <p:nvSpPr>
+          <p:cNvPr id="19" name="Text 17"/>
+          <p:cNvSpPr/>
+          <p:nvPr/>
+        </p:nvSpPr>
+        <p:spPr>
+          <a:xfrm>
+            <a:off x="3227832" y="2633472"/>
+            <a:ext cx="4233672" cy="713232"/>
+          </a:xfrm>
+          <a:prstGeom prst="rect">
+            <a:avLst/>
+          </a:prstGeom>
+          <a:noFill/>
+          <a:ln/>
+        </p:spPr>
+        <p:txBody>
+          <a:bodyPr wrap="square" lIns="0" tIns="0" rIns="0" bIns="0" rtlCol="0" anchor="ctr"/>
+          <a:lstStyle/>
+          <a:p>
+            <a:pPr indent="0" marL="0">
+              <a:buNone/>
+            </a:pPr>
+            <a:r>
+              <a:rPr lang="en-US" sz="1050" dirty="0">
+                <a:solidFill>
+                  <a:srgbClr val="6A6153"/>
                 </a:solidFill>
                 <a:latin typeface="Calibri" pitchFamily="34" charset="0"/>
                 <a:ea typeface="Calibri" pitchFamily="34" charset="-122"/>
                 <a:cs typeface="Calibri" pitchFamily="34" charset="-120"/>
               </a:rPr>
-              <a:t>Payment processing (~3.5%)</a:t>
-            </a:r>
-            <a:endParaRPr lang="en-US" sz="1250" dirty="0"/>
-          </a:p>
-        </p:txBody>
-      </p:sp>
-      <p:sp>
-        <p:nvSpPr>
-          <p:cNvPr id="10" name="Text 8"/>
-          <p:cNvSpPr/>
-          <p:nvPr/>
-        </p:nvSpPr>
-        <p:spPr>
-          <a:xfrm>
-            <a:off x="4297680" y="2697480"/>
-            <a:ext cx="1280160" cy="475488"/>
+              <a:t>Value-first posts in diaspora WhatsApp / Facebook parent groups, temple &amp; association newsletters — via partners, never cold</a:t>
+            </a:r>
+            <a:endParaRPr lang="en-US" sz="1050" dirty="0"/>
+          </a:p>
+        </p:txBody>
+      </p:sp>
+      <p:sp>
+        <p:nvSpPr>
+          <p:cNvPr id="20" name="Text 18"/>
+          <p:cNvSpPr/>
+          <p:nvPr/>
+        </p:nvSpPr>
+        <p:spPr>
+          <a:xfrm>
+            <a:off x="7571232" y="2633472"/>
+            <a:ext cx="1307592" cy="713232"/>
           </a:xfrm>
           <a:prstGeom prst="rect">
             <a:avLst/>
@@ -5500,38 +6034,116 @@
           <a:bodyPr wrap="square" lIns="0" tIns="0" rIns="0" bIns="0" rtlCol="0" anchor="ctr"/>
           <a:lstStyle/>
           <a:p>
-            <a:pPr algn="r" indent="0" marL="0">
-              <a:buNone/>
-            </a:pPr>
-            <a:r>
-              <a:rPr lang="en-US" sz="1500" b="1" dirty="0">
+            <a:pPr indent="0" marL="0">
+              <a:buNone/>
+            </a:pPr>
+            <a:r>
+              <a:rPr lang="en-US" sz="1100" dirty="0">
                 <a:solidFill>
                   <a:srgbClr val="6A6153"/>
                 </a:solidFill>
-                <a:latin typeface="Cambria" pitchFamily="34" charset="0"/>
-                <a:ea typeface="Cambria" pitchFamily="34" charset="-122"/>
-                <a:cs typeface="Cambria" pitchFamily="34" charset="-120"/>
-              </a:rPr>
-              <a:t>–$1.6k</a:t>
-            </a:r>
-            <a:endParaRPr lang="en-US" sz="1500" dirty="0"/>
-          </a:p>
-        </p:txBody>
-      </p:sp>
-      <p:sp>
-        <p:nvSpPr>
-          <p:cNvPr id="11" name="Shape 9"/>
-          <p:cNvSpPr/>
-          <p:nvPr/>
-        </p:nvSpPr>
-        <p:spPr>
-          <a:xfrm>
-            <a:off x="640080" y="3246120"/>
-            <a:ext cx="5120640" cy="475488"/>
+                <a:latin typeface="Calibri" pitchFamily="34" charset="0"/>
+                <a:ea typeface="Calibri" pitchFamily="34" charset="-122"/>
+                <a:cs typeface="Calibri" pitchFamily="34" charset="-120"/>
+              </a:rPr>
+              <a:t>US · CA · SEA</a:t>
+            </a:r>
+            <a:endParaRPr lang="en-US" sz="1100" dirty="0"/>
+          </a:p>
+        </p:txBody>
+      </p:sp>
+      <p:sp>
+        <p:nvSpPr>
+          <p:cNvPr id="21" name="Text 19"/>
+          <p:cNvSpPr/>
+          <p:nvPr/>
+        </p:nvSpPr>
+        <p:spPr>
+          <a:xfrm>
+            <a:off x="8988552" y="2633472"/>
+            <a:ext cx="1033272" cy="713232"/>
+          </a:xfrm>
+          <a:prstGeom prst="rect">
+            <a:avLst/>
+          </a:prstGeom>
+          <a:noFill/>
+          <a:ln/>
+        </p:spPr>
+        <p:txBody>
+          <a:bodyPr wrap="square" lIns="0" tIns="0" rIns="0" bIns="0" rtlCol="0" anchor="ctr"/>
+          <a:lstStyle/>
+          <a:p>
+            <a:pPr indent="0" marL="0">
+              <a:buNone/>
+            </a:pPr>
+            <a:r>
+              <a:rPr lang="en-US" sz="1100" b="1" dirty="0">
+                <a:solidFill>
+                  <a:srgbClr val="1E8A9E"/>
+                </a:solidFill>
+                <a:latin typeface="Calibri" pitchFamily="34" charset="0"/>
+                <a:ea typeface="Calibri" pitchFamily="34" charset="-122"/>
+                <a:cs typeface="Calibri" pitchFamily="34" charset="-120"/>
+              </a:rPr>
+              <a:t>$0–8</a:t>
+            </a:r>
+            <a:endParaRPr lang="en-US" sz="1100" dirty="0"/>
+          </a:p>
+        </p:txBody>
+      </p:sp>
+      <p:sp>
+        <p:nvSpPr>
+          <p:cNvPr id="22" name="Text 20"/>
+          <p:cNvSpPr/>
+          <p:nvPr/>
+        </p:nvSpPr>
+        <p:spPr>
+          <a:xfrm>
+            <a:off x="10131552" y="2633472"/>
+            <a:ext cx="1536192" cy="713232"/>
+          </a:xfrm>
+          <a:prstGeom prst="rect">
+            <a:avLst/>
+          </a:prstGeom>
+          <a:noFill/>
+          <a:ln/>
+        </p:spPr>
+        <p:txBody>
+          <a:bodyPr wrap="square" lIns="0" tIns="0" rIns="0" bIns="0" rtlCol="0" anchor="ctr"/>
+          <a:lstStyle/>
+          <a:p>
+            <a:pPr indent="0" marL="0">
+              <a:buNone/>
+            </a:pPr>
+            <a:r>
+              <a:rPr lang="en-US" sz="1100" dirty="0">
+                <a:solidFill>
+                  <a:srgbClr val="1E8A9E"/>
+                </a:solidFill>
+                <a:latin typeface="Calibri" pitchFamily="34" charset="0"/>
+                <a:ea typeface="Calibri" pitchFamily="34" charset="-122"/>
+                <a:cs typeface="Calibri" pitchFamily="34" charset="-120"/>
+              </a:rPr>
+              <a:t>Amplify</a:t>
+            </a:r>
+            <a:endParaRPr lang="en-US" sz="1100" dirty="0"/>
+          </a:p>
+        </p:txBody>
+      </p:sp>
+      <p:sp>
+        <p:nvSpPr>
+          <p:cNvPr id="23" name="Shape 21"/>
+          <p:cNvSpPr/>
+          <p:nvPr/>
+        </p:nvSpPr>
+        <p:spPr>
+          <a:xfrm>
+            <a:off x="594360" y="3337560"/>
+            <a:ext cx="11002975" cy="658368"/>
           </a:xfrm>
           <a:prstGeom prst="roundRect">
             <a:avLst>
-              <a:gd name="adj" fmla="val 17308"/>
+              <a:gd name="adj" fmla="val 12500"/>
             </a:avLst>
           </a:prstGeom>
           <a:solidFill>
@@ -5549,14 +6161,36 @@
       </p:sp>
       <p:sp>
         <p:nvSpPr>
-          <p:cNvPr id="12" name="Text 10"/>
-          <p:cNvSpPr/>
-          <p:nvPr/>
-        </p:nvSpPr>
-        <p:spPr>
-          <a:xfrm>
-            <a:off x="841248" y="3246120"/>
-            <a:ext cx="3566160" cy="475488"/>
+          <p:cNvPr id="24" name="Shape 22"/>
+          <p:cNvSpPr/>
+          <p:nvPr/>
+        </p:nvSpPr>
+        <p:spPr>
+          <a:xfrm>
+            <a:off x="685800" y="3502152"/>
+            <a:ext cx="109728" cy="402336"/>
+          </a:xfrm>
+          <a:prstGeom prst="roundRect">
+            <a:avLst>
+              <a:gd name="adj" fmla="val 33333"/>
+            </a:avLst>
+          </a:prstGeom>
+          <a:solidFill>
+            <a:srgbClr val="B67B00"/>
+          </a:solidFill>
+          <a:ln/>
+        </p:spPr>
+      </p:sp>
+      <p:sp>
+        <p:nvSpPr>
+          <p:cNvPr id="25" name="Text 23"/>
+          <p:cNvSpPr/>
+          <p:nvPr/>
+        </p:nvSpPr>
+        <p:spPr>
+          <a:xfrm>
+            <a:off x="896112" y="3355848"/>
+            <a:ext cx="2075688" cy="713232"/>
           </a:xfrm>
           <a:prstGeom prst="rect">
             <a:avLst/>
@@ -5572,30 +6206,69 @@
               <a:buNone/>
             </a:pPr>
             <a:r>
-              <a:rPr lang="en-US" sz="1250" dirty="0">
+              <a:rPr lang="en-US" sz="1250" b="1" dirty="0">
                 <a:solidFill>
                   <a:srgbClr val="211D17"/>
+                </a:solidFill>
+                <a:latin typeface="Cambria" pitchFamily="34" charset="0"/>
+                <a:ea typeface="Cambria" pitchFamily="34" charset="-122"/>
+                <a:cs typeface="Cambria" pitchFamily="34" charset="-120"/>
+              </a:rPr>
+              <a:t>Referral program</a:t>
+            </a:r>
+            <a:endParaRPr lang="en-US" sz="1250" dirty="0"/>
+          </a:p>
+        </p:txBody>
+      </p:sp>
+      <p:sp>
+        <p:nvSpPr>
+          <p:cNvPr id="26" name="Text 24"/>
+          <p:cNvSpPr/>
+          <p:nvPr/>
+        </p:nvSpPr>
+        <p:spPr>
+          <a:xfrm>
+            <a:off x="3227832" y="3355848"/>
+            <a:ext cx="4233672" cy="713232"/>
+          </a:xfrm>
+          <a:prstGeom prst="rect">
+            <a:avLst/>
+          </a:prstGeom>
+          <a:noFill/>
+          <a:ln/>
+        </p:spPr>
+        <p:txBody>
+          <a:bodyPr wrap="square" lIns="0" tIns="0" rIns="0" bIns="0" rtlCol="0" anchor="ctr"/>
+          <a:lstStyle/>
+          <a:p>
+            <a:pPr indent="0" marL="0">
+              <a:buNone/>
+            </a:pPr>
+            <a:r>
+              <a:rPr lang="en-US" sz="1050" dirty="0">
+                <a:solidFill>
+                  <a:srgbClr val="6A6153"/>
                 </a:solidFill>
                 <a:latin typeface="Calibri" pitchFamily="34" charset="0"/>
                 <a:ea typeface="Calibri" pitchFamily="34" charset="-122"/>
                 <a:cs typeface="Calibri" pitchFamily="34" charset="-120"/>
               </a:rPr>
-              <a:t>Infra + email/CRM + tools</a:t>
-            </a:r>
-            <a:endParaRPr lang="en-US" sz="1250" dirty="0"/>
-          </a:p>
-        </p:txBody>
-      </p:sp>
-      <p:sp>
-        <p:nvSpPr>
-          <p:cNvPr id="13" name="Text 11"/>
-          <p:cNvSpPr/>
-          <p:nvPr/>
-        </p:nvSpPr>
-        <p:spPr>
-          <a:xfrm>
-            <a:off x="4297680" y="3246120"/>
-            <a:ext cx="1280160" cy="475488"/>
+              <a:t>In-app share-cards + “give a month, get a month”; cohort leaderboards run through coaches</a:t>
+            </a:r>
+            <a:endParaRPr lang="en-US" sz="1050" dirty="0"/>
+          </a:p>
+        </p:txBody>
+      </p:sp>
+      <p:sp>
+        <p:nvSpPr>
+          <p:cNvPr id="27" name="Text 25"/>
+          <p:cNvSpPr/>
+          <p:nvPr/>
+        </p:nvSpPr>
+        <p:spPr>
+          <a:xfrm>
+            <a:off x="7571232" y="3355848"/>
+            <a:ext cx="1307592" cy="713232"/>
           </a:xfrm>
           <a:prstGeom prst="rect">
             <a:avLst/>
@@ -5607,49 +6280,122 @@
           <a:bodyPr wrap="square" lIns="0" tIns="0" rIns="0" bIns="0" rtlCol="0" anchor="ctr"/>
           <a:lstStyle/>
           <a:p>
-            <a:pPr algn="r" indent="0" marL="0">
-              <a:buNone/>
-            </a:pPr>
-            <a:r>
-              <a:rPr lang="en-US" sz="1500" b="1" dirty="0">
+            <a:pPr indent="0" marL="0">
+              <a:buNone/>
+            </a:pPr>
+            <a:r>
+              <a:rPr lang="en-US" sz="1100" dirty="0">
                 <a:solidFill>
                   <a:srgbClr val="6A6153"/>
                 </a:solidFill>
-                <a:latin typeface="Cambria" pitchFamily="34" charset="0"/>
-                <a:ea typeface="Cambria" pitchFamily="34" charset="-122"/>
-                <a:cs typeface="Cambria" pitchFamily="34" charset="-120"/>
-              </a:rPr>
-              <a:t>–$2.5k</a:t>
-            </a:r>
-            <a:endParaRPr lang="en-US" sz="1500" dirty="0"/>
-          </a:p>
-        </p:txBody>
-      </p:sp>
-      <p:sp>
-        <p:nvSpPr>
-          <p:cNvPr id="14" name="Shape 12"/>
-          <p:cNvSpPr/>
-          <p:nvPr/>
-        </p:nvSpPr>
-        <p:spPr>
-          <a:xfrm>
-            <a:off x="640080" y="3794760"/>
-            <a:ext cx="5120640" cy="475488"/>
+                <a:latin typeface="Calibri" pitchFamily="34" charset="0"/>
+                <a:ea typeface="Calibri" pitchFamily="34" charset="-122"/>
+                <a:cs typeface="Calibri" pitchFamily="34" charset="-120"/>
+              </a:rPr>
+              <a:t>All</a:t>
+            </a:r>
+            <a:endParaRPr lang="en-US" sz="1100" dirty="0"/>
+          </a:p>
+        </p:txBody>
+      </p:sp>
+      <p:sp>
+        <p:nvSpPr>
+          <p:cNvPr id="28" name="Text 26"/>
+          <p:cNvSpPr/>
+          <p:nvPr/>
+        </p:nvSpPr>
+        <p:spPr>
+          <a:xfrm>
+            <a:off x="8988552" y="3355848"/>
+            <a:ext cx="1033272" cy="713232"/>
+          </a:xfrm>
+          <a:prstGeom prst="rect">
+            <a:avLst/>
+          </a:prstGeom>
+          <a:noFill/>
+          <a:ln/>
+        </p:spPr>
+        <p:txBody>
+          <a:bodyPr wrap="square" lIns="0" tIns="0" rIns="0" bIns="0" rtlCol="0" anchor="ctr"/>
+          <a:lstStyle/>
+          <a:p>
+            <a:pPr indent="0" marL="0">
+              <a:buNone/>
+            </a:pPr>
+            <a:r>
+              <a:rPr lang="en-US" sz="1100" b="1" dirty="0">
+                <a:solidFill>
+                  <a:srgbClr val="B67B00"/>
+                </a:solidFill>
+                <a:latin typeface="Calibri" pitchFamily="34" charset="0"/>
+                <a:ea typeface="Calibri" pitchFamily="34" charset="-122"/>
+                <a:cs typeface="Calibri" pitchFamily="34" charset="-120"/>
+              </a:rPr>
+              <a:t>$5–12</a:t>
+            </a:r>
+            <a:endParaRPr lang="en-US" sz="1100" dirty="0"/>
+          </a:p>
+        </p:txBody>
+      </p:sp>
+      <p:sp>
+        <p:nvSpPr>
+          <p:cNvPr id="29" name="Text 27"/>
+          <p:cNvSpPr/>
+          <p:nvPr/>
+        </p:nvSpPr>
+        <p:spPr>
+          <a:xfrm>
+            <a:off x="10131552" y="3355848"/>
+            <a:ext cx="1536192" cy="713232"/>
+          </a:xfrm>
+          <a:prstGeom prst="rect">
+            <a:avLst/>
+          </a:prstGeom>
+          <a:noFill/>
+          <a:ln/>
+        </p:spPr>
+        <p:txBody>
+          <a:bodyPr wrap="square" lIns="0" tIns="0" rIns="0" bIns="0" rtlCol="0" anchor="ctr"/>
+          <a:lstStyle/>
+          <a:p>
+            <a:pPr indent="0" marL="0">
+              <a:buNone/>
+            </a:pPr>
+            <a:r>
+              <a:rPr lang="en-US" sz="1100" dirty="0">
+                <a:solidFill>
+                  <a:srgbClr val="B67B00"/>
+                </a:solidFill>
+                <a:latin typeface="Calibri" pitchFamily="34" charset="0"/>
+                <a:ea typeface="Calibri" pitchFamily="34" charset="-122"/>
+                <a:cs typeface="Calibri" pitchFamily="34" charset="-120"/>
+              </a:rPr>
+              <a:t>Compounding loop</a:t>
+            </a:r>
+            <a:endParaRPr lang="en-US" sz="1100" dirty="0"/>
+          </a:p>
+        </p:txBody>
+      </p:sp>
+      <p:sp>
+        <p:nvSpPr>
+          <p:cNvPr id="30" name="Shape 28"/>
+          <p:cNvSpPr/>
+          <p:nvPr/>
+        </p:nvSpPr>
+        <p:spPr>
+          <a:xfrm>
+            <a:off x="594360" y="4059936"/>
+            <a:ext cx="11002975" cy="658368"/>
           </a:xfrm>
           <a:prstGeom prst="roundRect">
             <a:avLst>
-              <a:gd name="adj" fmla="val 17308"/>
+              <a:gd name="adj" fmla="val 12500"/>
             </a:avLst>
           </a:prstGeom>
           <a:solidFill>
-            <a:srgbClr val="FBEFCF"/>
+            <a:srgbClr val="FFFFFF"/>
           </a:solidFill>
-          <a:ln w="12700">
-            <a:solidFill>
-              <a:srgbClr val="E8A400"/>
-            </a:solidFill>
-            <a:prstDash val="solid"/>
-          </a:ln>
+          <a:ln/>
           <a:effectLst>
             <a:outerShdw sx="100000" sy="100000" kx="0" ky="0" algn="bl" rotWithShape="0" blurRad="114300" dist="38100" dir="5400000">
               <a:srgbClr val="D8CFBE">
@@ -5661,14 +6407,36 @@
       </p:sp>
       <p:sp>
         <p:nvSpPr>
-          <p:cNvPr id="15" name="Text 13"/>
-          <p:cNvSpPr/>
-          <p:nvPr/>
-        </p:nvSpPr>
-        <p:spPr>
-          <a:xfrm>
-            <a:off x="841248" y="3794760"/>
-            <a:ext cx="3566160" cy="475488"/>
+          <p:cNvPr id="31" name="Shape 29"/>
+          <p:cNvSpPr/>
+          <p:nvPr/>
+        </p:nvSpPr>
+        <p:spPr>
+          <a:xfrm>
+            <a:off x="685800" y="4224528"/>
+            <a:ext cx="109728" cy="402336"/>
+          </a:xfrm>
+          <a:prstGeom prst="roundRect">
+            <a:avLst>
+              <a:gd name="adj" fmla="val 33333"/>
+            </a:avLst>
+          </a:prstGeom>
+          <a:solidFill>
+            <a:srgbClr val="2E9E63"/>
+          </a:solidFill>
+          <a:ln/>
+        </p:spPr>
+      </p:sp>
+      <p:sp>
+        <p:nvSpPr>
+          <p:cNvPr id="32" name="Text 30"/>
+          <p:cNvSpPr/>
+          <p:nvPr/>
+        </p:nvSpPr>
+        <p:spPr>
+          <a:xfrm>
+            <a:off x="896112" y="4078224"/>
+            <a:ext cx="2075688" cy="713232"/>
           </a:xfrm>
           <a:prstGeom prst="rect">
             <a:avLst/>
@@ -5687,27 +6455,66 @@
               <a:rPr lang="en-US" sz="1250" b="1" dirty="0">
                 <a:solidFill>
                   <a:srgbClr val="211D17"/>
+                </a:solidFill>
+                <a:latin typeface="Cambria" pitchFamily="34" charset="0"/>
+                <a:ea typeface="Cambria" pitchFamily="34" charset="-122"/>
+                <a:cs typeface="Cambria" pitchFamily="34" charset="-120"/>
+              </a:rPr>
+              <a:t>Content &amp; SEO</a:t>
+            </a:r>
+            <a:endParaRPr lang="en-US" sz="1250" dirty="0"/>
+          </a:p>
+        </p:txBody>
+      </p:sp>
+      <p:sp>
+        <p:nvSpPr>
+          <p:cNvPr id="33" name="Text 31"/>
+          <p:cNvSpPr/>
+          <p:nvPr/>
+        </p:nvSpPr>
+        <p:spPr>
+          <a:xfrm>
+            <a:off x="3227832" y="4078224"/>
+            <a:ext cx="4233672" cy="713232"/>
+          </a:xfrm>
+          <a:prstGeom prst="rect">
+            <a:avLst/>
+          </a:prstGeom>
+          <a:noFill/>
+          <a:ln/>
+        </p:spPr>
+        <p:txBody>
+          <a:bodyPr wrap="square" lIns="0" tIns="0" rIns="0" bIns="0" rtlCol="0" anchor="ctr"/>
+          <a:lstStyle/>
+          <a:p>
+            <a:pPr indent="0" marL="0">
+              <a:buNone/>
+            </a:pPr>
+            <a:r>
+              <a:rPr lang="en-US" sz="1050" dirty="0">
+                <a:solidFill>
+                  <a:srgbClr val="6A6153"/>
                 </a:solidFill>
                 <a:latin typeface="Calibri" pitchFamily="34" charset="0"/>
                 <a:ea typeface="Calibri" pitchFamily="34" charset="-122"/>
                 <a:cs typeface="Calibri" pitchFamily="34" charset="-120"/>
               </a:rPr>
-              <a:t>Gross profit (~90%)</a:t>
-            </a:r>
-            <a:endParaRPr lang="en-US" sz="1250" dirty="0"/>
-          </a:p>
-        </p:txBody>
-      </p:sp>
-      <p:sp>
-        <p:nvSpPr>
-          <p:cNvPr id="16" name="Text 14"/>
-          <p:cNvSpPr/>
-          <p:nvPr/>
-        </p:nvSpPr>
-        <p:spPr>
-          <a:xfrm>
-            <a:off x="4297680" y="3794760"/>
-            <a:ext cx="1280160" cy="475488"/>
+              <a:t>NSF/Scripps word-list &amp; etymology hub built on the 41k-word library — owns the prep search intent</a:t>
+            </a:r>
+            <a:endParaRPr lang="en-US" sz="1050" dirty="0"/>
+          </a:p>
+        </p:txBody>
+      </p:sp>
+      <p:sp>
+        <p:nvSpPr>
+          <p:cNvPr id="34" name="Text 32"/>
+          <p:cNvSpPr/>
+          <p:nvPr/>
+        </p:nvSpPr>
+        <p:spPr>
+          <a:xfrm>
+            <a:off x="7571232" y="4078224"/>
+            <a:ext cx="1307592" cy="713232"/>
           </a:xfrm>
           <a:prstGeom prst="rect">
             <a:avLst/>
@@ -5719,38 +6526,116 @@
           <a:bodyPr wrap="square" lIns="0" tIns="0" rIns="0" bIns="0" rtlCol="0" anchor="ctr"/>
           <a:lstStyle/>
           <a:p>
-            <a:pPr algn="r" indent="0" marL="0">
-              <a:buNone/>
-            </a:pPr>
-            <a:r>
-              <a:rPr lang="en-US" sz="1500" b="1" dirty="0">
+            <a:pPr indent="0" marL="0">
+              <a:buNone/>
+            </a:pPr>
+            <a:r>
+              <a:rPr lang="en-US" sz="1100" dirty="0">
+                <a:solidFill>
+                  <a:srgbClr val="6A6153"/>
+                </a:solidFill>
+                <a:latin typeface="Calibri" pitchFamily="34" charset="0"/>
+                <a:ea typeface="Calibri" pitchFamily="34" charset="-122"/>
+                <a:cs typeface="Calibri" pitchFamily="34" charset="-120"/>
+              </a:rPr>
+              <a:t>All (esp. India)</a:t>
+            </a:r>
+            <a:endParaRPr lang="en-US" sz="1100" dirty="0"/>
+          </a:p>
+        </p:txBody>
+      </p:sp>
+      <p:sp>
+        <p:nvSpPr>
+          <p:cNvPr id="35" name="Text 33"/>
+          <p:cNvSpPr/>
+          <p:nvPr/>
+        </p:nvSpPr>
+        <p:spPr>
+          <a:xfrm>
+            <a:off x="8988552" y="4078224"/>
+            <a:ext cx="1033272" cy="713232"/>
+          </a:xfrm>
+          <a:prstGeom prst="rect">
+            <a:avLst/>
+          </a:prstGeom>
+          <a:noFill/>
+          <a:ln/>
+        </p:spPr>
+        <p:txBody>
+          <a:bodyPr wrap="square" lIns="0" tIns="0" rIns="0" bIns="0" rtlCol="0" anchor="ctr"/>
+          <a:lstStyle/>
+          <a:p>
+            <a:pPr indent="0" marL="0">
+              <a:buNone/>
+            </a:pPr>
+            <a:r>
+              <a:rPr lang="en-US" sz="1100" b="1" dirty="0">
                 <a:solidFill>
                   <a:srgbClr val="2E9E63"/>
                 </a:solidFill>
-                <a:latin typeface="Cambria" pitchFamily="34" charset="0"/>
-                <a:ea typeface="Cambria" pitchFamily="34" charset="-122"/>
-                <a:cs typeface="Cambria" pitchFamily="34" charset="-120"/>
-              </a:rPr>
-              <a:t>$41.4k</a:t>
-            </a:r>
-            <a:endParaRPr lang="en-US" sz="1500" dirty="0"/>
-          </a:p>
-        </p:txBody>
-      </p:sp>
-      <p:sp>
-        <p:nvSpPr>
-          <p:cNvPr id="17" name="Shape 15"/>
-          <p:cNvSpPr/>
-          <p:nvPr/>
-        </p:nvSpPr>
-        <p:spPr>
-          <a:xfrm>
-            <a:off x="640080" y="4343400"/>
-            <a:ext cx="5120640" cy="475488"/>
+                <a:latin typeface="Calibri" pitchFamily="34" charset="0"/>
+                <a:ea typeface="Calibri" pitchFamily="34" charset="-122"/>
+                <a:cs typeface="Calibri" pitchFamily="34" charset="-120"/>
+              </a:rPr>
+              <a:t>~$0*</a:t>
+            </a:r>
+            <a:endParaRPr lang="en-US" sz="1100" dirty="0"/>
+          </a:p>
+        </p:txBody>
+      </p:sp>
+      <p:sp>
+        <p:nvSpPr>
+          <p:cNvPr id="36" name="Text 34"/>
+          <p:cNvSpPr/>
+          <p:nvPr/>
+        </p:nvSpPr>
+        <p:spPr>
+          <a:xfrm>
+            <a:off x="10131552" y="4078224"/>
+            <a:ext cx="1536192" cy="713232"/>
+          </a:xfrm>
+          <a:prstGeom prst="rect">
+            <a:avLst/>
+          </a:prstGeom>
+          <a:noFill/>
+          <a:ln/>
+        </p:spPr>
+        <p:txBody>
+          <a:bodyPr wrap="square" lIns="0" tIns="0" rIns="0" bIns="0" rtlCol="0" anchor="ctr"/>
+          <a:lstStyle/>
+          <a:p>
+            <a:pPr indent="0" marL="0">
+              <a:buNone/>
+            </a:pPr>
+            <a:r>
+              <a:rPr lang="en-US" sz="1100" dirty="0">
+                <a:solidFill>
+                  <a:srgbClr val="2E9E63"/>
+                </a:solidFill>
+                <a:latin typeface="Calibri" pitchFamily="34" charset="0"/>
+                <a:ea typeface="Calibri" pitchFamily="34" charset="-122"/>
+                <a:cs typeface="Calibri" pitchFamily="34" charset="-120"/>
+              </a:rPr>
+              <a:t>Durable inbound</a:t>
+            </a:r>
+            <a:endParaRPr lang="en-US" sz="1100" dirty="0"/>
+          </a:p>
+        </p:txBody>
+      </p:sp>
+      <p:sp>
+        <p:nvSpPr>
+          <p:cNvPr id="37" name="Shape 35"/>
+          <p:cNvSpPr/>
+          <p:nvPr/>
+        </p:nvSpPr>
+        <p:spPr>
+          <a:xfrm>
+            <a:off x="594360" y="4782312"/>
+            <a:ext cx="11002975" cy="658368"/>
           </a:xfrm>
           <a:prstGeom prst="roundRect">
             <a:avLst>
-              <a:gd name="adj" fmla="val 17308"/>
+              <a:gd name="adj" fmla="val 12500"/>
             </a:avLst>
           </a:prstGeom>
           <a:solidFill>
@@ -5768,14 +6653,36 @@
       </p:sp>
       <p:sp>
         <p:nvSpPr>
-          <p:cNvPr id="18" name="Text 16"/>
-          <p:cNvSpPr/>
-          <p:nvPr/>
-        </p:nvSpPr>
-        <p:spPr>
-          <a:xfrm>
-            <a:off x="841248" y="4343400"/>
-            <a:ext cx="3566160" cy="475488"/>
+          <p:cNvPr id="38" name="Shape 36"/>
+          <p:cNvSpPr/>
+          <p:nvPr/>
+        </p:nvSpPr>
+        <p:spPr>
+          <a:xfrm>
+            <a:off x="685800" y="4946904"/>
+            <a:ext cx="109728" cy="402336"/>
+          </a:xfrm>
+          <a:prstGeom prst="roundRect">
+            <a:avLst>
+              <a:gd name="adj" fmla="val 33333"/>
+            </a:avLst>
+          </a:prstGeom>
+          <a:solidFill>
+            <a:srgbClr val="E67E45"/>
+          </a:solidFill>
+          <a:ln/>
+        </p:spPr>
+      </p:sp>
+      <p:sp>
+        <p:nvSpPr>
+          <p:cNvPr id="39" name="Text 37"/>
+          <p:cNvSpPr/>
+          <p:nvPr/>
+        </p:nvSpPr>
+        <p:spPr>
+          <a:xfrm>
+            <a:off x="896112" y="4800600"/>
+            <a:ext cx="2075688" cy="713232"/>
           </a:xfrm>
           <a:prstGeom prst="rect">
             <a:avLst/>
@@ -5791,30 +6698,69 @@
               <a:buNone/>
             </a:pPr>
             <a:r>
-              <a:rPr lang="en-US" sz="1250" dirty="0">
+              <a:rPr lang="en-US" sz="1250" b="1" dirty="0">
                 <a:solidFill>
                   <a:srgbClr val="211D17"/>
+                </a:solidFill>
+                <a:latin typeface="Cambria" pitchFamily="34" charset="0"/>
+                <a:ea typeface="Cambria" pitchFamily="34" charset="-122"/>
+                <a:cs typeface="Cambria" pitchFamily="34" charset="-120"/>
+              </a:rPr>
+              <a:t>Creator / influencer</a:t>
+            </a:r>
+            <a:endParaRPr lang="en-US" sz="1250" dirty="0"/>
+          </a:p>
+        </p:txBody>
+      </p:sp>
+      <p:sp>
+        <p:nvSpPr>
+          <p:cNvPr id="40" name="Text 38"/>
+          <p:cNvSpPr/>
+          <p:nvPr/>
+        </p:nvSpPr>
+        <p:spPr>
+          <a:xfrm>
+            <a:off x="3227832" y="4800600"/>
+            <a:ext cx="4233672" cy="713232"/>
+          </a:xfrm>
+          <a:prstGeom prst="rect">
+            <a:avLst/>
+          </a:prstGeom>
+          <a:noFill/>
+          <a:ln/>
+        </p:spPr>
+        <p:txBody>
+          <a:bodyPr wrap="square" lIns="0" tIns="0" rIns="0" bIns="0" rtlCol="0" anchor="ctr"/>
+          <a:lstStyle/>
+          <a:p>
+            <a:pPr indent="0" marL="0">
+              <a:buNone/>
+            </a:pPr>
+            <a:r>
+              <a:rPr lang="en-US" sz="1050" dirty="0">
+                <a:solidFill>
+                  <a:srgbClr val="6A6153"/>
                 </a:solidFill>
                 <a:latin typeface="Calibri" pitchFamily="34" charset="0"/>
                 <a:ea typeface="Calibri" pitchFamily="34" charset="-122"/>
                 <a:cs typeface="Calibri" pitchFamily="34" charset="-120"/>
               </a:rPr>
-              <a:t>Customer acquisition (blended ~$20)</a:t>
-            </a:r>
-            <a:endParaRPr lang="en-US" sz="1250" dirty="0"/>
-          </a:p>
-        </p:txBody>
-      </p:sp>
-      <p:sp>
-        <p:nvSpPr>
-          <p:cNvPr id="19" name="Text 17"/>
-          <p:cNvSpPr/>
-          <p:nvPr/>
-        </p:nvSpPr>
-        <p:spPr>
-          <a:xfrm>
-            <a:off x="4297680" y="4343400"/>
-            <a:ext cx="1280160" cy="475488"/>
+              <a:t>Sponsored posts with desi parenting YouTubers &amp; Instagram creators</a:t>
+            </a:r>
+            <a:endParaRPr lang="en-US" sz="1050" dirty="0"/>
+          </a:p>
+        </p:txBody>
+      </p:sp>
+      <p:sp>
+        <p:nvSpPr>
+          <p:cNvPr id="41" name="Text 39"/>
+          <p:cNvSpPr/>
+          <p:nvPr/>
+        </p:nvSpPr>
+        <p:spPr>
+          <a:xfrm>
+            <a:off x="7571232" y="4800600"/>
+            <a:ext cx="1307592" cy="713232"/>
           </a:xfrm>
           <a:prstGeom prst="rect">
             <a:avLst/>
@@ -5826,38 +6772,116 @@
           <a:bodyPr wrap="square" lIns="0" tIns="0" rIns="0" bIns="0" rtlCol="0" anchor="ctr"/>
           <a:lstStyle/>
           <a:p>
-            <a:pPr algn="r" indent="0" marL="0">
-              <a:buNone/>
-            </a:pPr>
-            <a:r>
-              <a:rPr lang="en-US" sz="1500" b="1" dirty="0">
+            <a:pPr indent="0" marL="0">
+              <a:buNone/>
+            </a:pPr>
+            <a:r>
+              <a:rPr lang="en-US" sz="1100" dirty="0">
+                <a:solidFill>
+                  <a:srgbClr val="6A6153"/>
+                </a:solidFill>
+                <a:latin typeface="Calibri" pitchFamily="34" charset="0"/>
+                <a:ea typeface="Calibri" pitchFamily="34" charset="-122"/>
+                <a:cs typeface="Calibri" pitchFamily="34" charset="-120"/>
+              </a:rPr>
+              <a:t>US · CA · IN</a:t>
+            </a:r>
+            <a:endParaRPr lang="en-US" sz="1100" dirty="0"/>
+          </a:p>
+        </p:txBody>
+      </p:sp>
+      <p:sp>
+        <p:nvSpPr>
+          <p:cNvPr id="42" name="Text 40"/>
+          <p:cNvSpPr/>
+          <p:nvPr/>
+        </p:nvSpPr>
+        <p:spPr>
+          <a:xfrm>
+            <a:off x="8988552" y="4800600"/>
+            <a:ext cx="1033272" cy="713232"/>
+          </a:xfrm>
+          <a:prstGeom prst="rect">
+            <a:avLst/>
+          </a:prstGeom>
+          <a:noFill/>
+          <a:ln/>
+        </p:spPr>
+        <p:txBody>
+          <a:bodyPr wrap="square" lIns="0" tIns="0" rIns="0" bIns="0" rtlCol="0" anchor="ctr"/>
+          <a:lstStyle/>
+          <a:p>
+            <a:pPr indent="0" marL="0">
+              <a:buNone/>
+            </a:pPr>
+            <a:r>
+              <a:rPr lang="en-US" sz="1100" b="1" dirty="0">
                 <a:solidFill>
                   <a:srgbClr val="E67E45"/>
                 </a:solidFill>
-                <a:latin typeface="Cambria" pitchFamily="34" charset="0"/>
-                <a:ea typeface="Cambria" pitchFamily="34" charset="-122"/>
-                <a:cs typeface="Cambria" pitchFamily="34" charset="-120"/>
-              </a:rPr>
-              <a:t>–$15k</a:t>
-            </a:r>
-            <a:endParaRPr lang="en-US" sz="1500" dirty="0"/>
-          </a:p>
-        </p:txBody>
-      </p:sp>
-      <p:sp>
-        <p:nvSpPr>
-          <p:cNvPr id="20" name="Shape 18"/>
-          <p:cNvSpPr/>
-          <p:nvPr/>
-        </p:nvSpPr>
-        <p:spPr>
-          <a:xfrm>
-            <a:off x="640080" y="4892040"/>
-            <a:ext cx="5120640" cy="475488"/>
+                <a:latin typeface="Calibri" pitchFamily="34" charset="0"/>
+                <a:ea typeface="Calibri" pitchFamily="34" charset="-122"/>
+                <a:cs typeface="Calibri" pitchFamily="34" charset="-120"/>
+              </a:rPr>
+              <a:t>$20–50</a:t>
+            </a:r>
+            <a:endParaRPr lang="en-US" sz="1100" dirty="0"/>
+          </a:p>
+        </p:txBody>
+      </p:sp>
+      <p:sp>
+        <p:nvSpPr>
+          <p:cNvPr id="43" name="Text 41"/>
+          <p:cNvSpPr/>
+          <p:nvPr/>
+        </p:nvSpPr>
+        <p:spPr>
+          <a:xfrm>
+            <a:off x="10131552" y="4800600"/>
+            <a:ext cx="1536192" cy="713232"/>
+          </a:xfrm>
+          <a:prstGeom prst="rect">
+            <a:avLst/>
+          </a:prstGeom>
+          <a:noFill/>
+          <a:ln/>
+        </p:spPr>
+        <p:txBody>
+          <a:bodyPr wrap="square" lIns="0" tIns="0" rIns="0" bIns="0" rtlCol="0" anchor="ctr"/>
+          <a:lstStyle/>
+          <a:p>
+            <a:pPr indent="0" marL="0">
+              <a:buNone/>
+            </a:pPr>
+            <a:r>
+              <a:rPr lang="en-US" sz="1100" dirty="0">
+                <a:solidFill>
+                  <a:srgbClr val="E67E45"/>
+                </a:solidFill>
+                <a:latin typeface="Calibri" pitchFamily="34" charset="0"/>
+                <a:ea typeface="Calibri" pitchFamily="34" charset="-122"/>
+                <a:cs typeface="Calibri" pitchFamily="34" charset="-120"/>
+              </a:rPr>
+              <a:t>Reach bursts (test)</a:t>
+            </a:r>
+            <a:endParaRPr lang="en-US" sz="1100" dirty="0"/>
+          </a:p>
+        </p:txBody>
+      </p:sp>
+      <p:sp>
+        <p:nvSpPr>
+          <p:cNvPr id="44" name="Shape 42"/>
+          <p:cNvSpPr/>
+          <p:nvPr/>
+        </p:nvSpPr>
+        <p:spPr>
+          <a:xfrm>
+            <a:off x="594360" y="5504688"/>
+            <a:ext cx="11002975" cy="658368"/>
           </a:xfrm>
           <a:prstGeom prst="roundRect">
             <a:avLst>
-              <a:gd name="adj" fmla="val 17308"/>
+              <a:gd name="adj" fmla="val 12500"/>
             </a:avLst>
           </a:prstGeom>
           <a:solidFill>
@@ -5875,14 +6899,36 @@
       </p:sp>
       <p:sp>
         <p:nvSpPr>
-          <p:cNvPr id="21" name="Text 19"/>
-          <p:cNvSpPr/>
-          <p:nvPr/>
-        </p:nvSpPr>
-        <p:spPr>
-          <a:xfrm>
-            <a:off x="841248" y="4892040"/>
-            <a:ext cx="3566160" cy="475488"/>
+          <p:cNvPr id="45" name="Shape 43"/>
+          <p:cNvSpPr/>
+          <p:nvPr/>
+        </p:nvSpPr>
+        <p:spPr>
+          <a:xfrm>
+            <a:off x="685800" y="5669280"/>
+            <a:ext cx="109728" cy="402336"/>
+          </a:xfrm>
+          <a:prstGeom prst="roundRect">
+            <a:avLst>
+              <a:gd name="adj" fmla="val 33333"/>
+            </a:avLst>
+          </a:prstGeom>
+          <a:solidFill>
+            <a:srgbClr val="D6304F"/>
+          </a:solidFill>
+          <a:ln/>
+        </p:spPr>
+      </p:sp>
+      <p:sp>
+        <p:nvSpPr>
+          <p:cNvPr id="46" name="Text 44"/>
+          <p:cNvSpPr/>
+          <p:nvPr/>
+        </p:nvSpPr>
+        <p:spPr>
+          <a:xfrm>
+            <a:off x="896112" y="5522976"/>
+            <a:ext cx="2075688" cy="713232"/>
           </a:xfrm>
           <a:prstGeom prst="rect">
             <a:avLst/>
@@ -5898,30 +6944,69 @@
               <a:buNone/>
             </a:pPr>
             <a:r>
-              <a:rPr lang="en-US" sz="1250" dirty="0">
+              <a:rPr lang="en-US" sz="1250" b="1" dirty="0">
                 <a:solidFill>
                   <a:srgbClr val="211D17"/>
+                </a:solidFill>
+                <a:latin typeface="Cambria" pitchFamily="34" charset="0"/>
+                <a:ea typeface="Cambria" pitchFamily="34" charset="-122"/>
+                <a:cs typeface="Cambria" pitchFamily="34" charset="-120"/>
+              </a:rPr>
+              <a:t>Paid retargeting</a:t>
+            </a:r>
+            <a:endParaRPr lang="en-US" sz="1250" dirty="0"/>
+          </a:p>
+        </p:txBody>
+      </p:sp>
+      <p:sp>
+        <p:nvSpPr>
+          <p:cNvPr id="47" name="Text 45"/>
+          <p:cNvSpPr/>
+          <p:nvPr/>
+        </p:nvSpPr>
+        <p:spPr>
+          <a:xfrm>
+            <a:off x="3227832" y="5522976"/>
+            <a:ext cx="4233672" cy="713232"/>
+          </a:xfrm>
+          <a:prstGeom prst="rect">
+            <a:avLst/>
+          </a:prstGeom>
+          <a:noFill/>
+          <a:ln/>
+        </p:spPr>
+        <p:txBody>
+          <a:bodyPr wrap="square" lIns="0" tIns="0" rIns="0" bIns="0" rtlCol="0" anchor="ctr"/>
+          <a:lstStyle/>
+          <a:p>
+            <a:pPr indent="0" marL="0">
+              <a:buNone/>
+            </a:pPr>
+            <a:r>
+              <a:rPr lang="en-US" sz="1050" dirty="0">
+                <a:solidFill>
+                  <a:srgbClr val="6A6153"/>
                 </a:solidFill>
                 <a:latin typeface="Calibri" pitchFamily="34" charset="0"/>
                 <a:ea typeface="Calibri" pitchFamily="34" charset="-122"/>
                 <a:cs typeface="Calibri" pitchFamily="34" charset="-120"/>
               </a:rPr>
-              <a:t>Legal (amortized, one-time)</a:t>
-            </a:r>
-            <a:endParaRPr lang="en-US" sz="1250" dirty="0"/>
-          </a:p>
-        </p:txBody>
-      </p:sp>
-      <p:sp>
-        <p:nvSpPr>
-          <p:cNvPr id="22" name="Text 20"/>
-          <p:cNvSpPr/>
-          <p:nvPr/>
-        </p:nvSpPr>
-        <p:spPr>
-          <a:xfrm>
-            <a:off x="4297680" y="4892040"/>
-            <a:ext cx="1280160" cy="475488"/>
+              <a:t>Meta / Google retargeting of warm visitors + lookalikes of converters — only once the funnel is proven</a:t>
+            </a:r>
+            <a:endParaRPr lang="en-US" sz="1050" dirty="0"/>
+          </a:p>
+        </p:txBody>
+      </p:sp>
+      <p:sp>
+        <p:nvSpPr>
+          <p:cNvPr id="48" name="Text 46"/>
+          <p:cNvSpPr/>
+          <p:nvPr/>
+        </p:nvSpPr>
+        <p:spPr>
+          <a:xfrm>
+            <a:off x="7571232" y="5522976"/>
+            <a:ext cx="1307592" cy="713232"/>
           </a:xfrm>
           <a:prstGeom prst="rect">
             <a:avLst/>
@@ -5933,107 +7018,34 @@
           <a:bodyPr wrap="square" lIns="0" tIns="0" rIns="0" bIns="0" rtlCol="0" anchor="ctr"/>
           <a:lstStyle/>
           <a:p>
-            <a:pPr algn="r" indent="0" marL="0">
-              <a:buNone/>
-            </a:pPr>
-            <a:r>
-              <a:rPr lang="en-US" sz="1500" b="1" dirty="0">
+            <a:pPr indent="0" marL="0">
+              <a:buNone/>
+            </a:pPr>
+            <a:r>
+              <a:rPr lang="en-US" sz="1100" dirty="0">
                 <a:solidFill>
                   <a:srgbClr val="6A6153"/>
-                </a:solidFill>
-                <a:latin typeface="Cambria" pitchFamily="34" charset="0"/>
-                <a:ea typeface="Cambria" pitchFamily="34" charset="-122"/>
-                <a:cs typeface="Cambria" pitchFamily="34" charset="-120"/>
-              </a:rPr>
-              <a:t>–$2.5k</a:t>
-            </a:r>
-            <a:endParaRPr lang="en-US" sz="1500" dirty="0"/>
-          </a:p>
-        </p:txBody>
-      </p:sp>
-      <p:sp>
-        <p:nvSpPr>
-          <p:cNvPr id="23" name="Shape 21"/>
-          <p:cNvSpPr/>
-          <p:nvPr/>
-        </p:nvSpPr>
-        <p:spPr>
-          <a:xfrm>
-            <a:off x="640080" y="5440680"/>
-            <a:ext cx="5120640" cy="475488"/>
-          </a:xfrm>
-          <a:prstGeom prst="roundRect">
-            <a:avLst>
-              <a:gd name="adj" fmla="val 17308"/>
-            </a:avLst>
-          </a:prstGeom>
-          <a:solidFill>
-            <a:srgbClr val="FBEFCF"/>
-          </a:solidFill>
-          <a:ln w="12700">
-            <a:solidFill>
-              <a:srgbClr val="E8A400"/>
-            </a:solidFill>
-            <a:prstDash val="solid"/>
-          </a:ln>
-          <a:effectLst>
-            <a:outerShdw sx="100000" sy="100000" kx="0" ky="0" algn="bl" rotWithShape="0" blurRad="114300" dist="38100" dir="5400000">
-              <a:srgbClr val="D8CFBE">
-                <a:alpha val="50000"/>
-              </a:srgbClr>
-            </a:outerShdw>
-          </a:effectLst>
-        </p:spPr>
-      </p:sp>
-      <p:sp>
-        <p:nvSpPr>
-          <p:cNvPr id="24" name="Text 22"/>
-          <p:cNvSpPr/>
-          <p:nvPr/>
-        </p:nvSpPr>
-        <p:spPr>
-          <a:xfrm>
-            <a:off x="841248" y="5440680"/>
-            <a:ext cx="3566160" cy="475488"/>
-          </a:xfrm>
-          <a:prstGeom prst="rect">
-            <a:avLst/>
-          </a:prstGeom>
-          <a:noFill/>
-          <a:ln/>
-        </p:spPr>
-        <p:txBody>
-          <a:bodyPr wrap="square" lIns="0" tIns="0" rIns="0" bIns="0" rtlCol="0" anchor="ctr"/>
-          <a:lstStyle/>
-          <a:p>
-            <a:pPr indent="0" marL="0">
-              <a:buNone/>
-            </a:pPr>
-            <a:r>
-              <a:rPr lang="en-US" sz="1250" b="1" dirty="0">
-                <a:solidFill>
-                  <a:srgbClr val="211D17"/>
                 </a:solidFill>
                 <a:latin typeface="Calibri" pitchFamily="34" charset="0"/>
                 <a:ea typeface="Calibri" pitchFamily="34" charset="-122"/>
                 <a:cs typeface="Calibri" pitchFamily="34" charset="-120"/>
               </a:rPr>
-              <a:t>Contribution before founder comp</a:t>
-            </a:r>
-            <a:endParaRPr lang="en-US" sz="1250" dirty="0"/>
-          </a:p>
-        </p:txBody>
-      </p:sp>
-      <p:sp>
-        <p:nvSpPr>
-          <p:cNvPr id="25" name="Text 23"/>
-          <p:cNvSpPr/>
-          <p:nvPr/>
-        </p:nvSpPr>
-        <p:spPr>
-          <a:xfrm>
-            <a:off x="4297680" y="5440680"/>
-            <a:ext cx="1280160" cy="475488"/>
+              <a:t>US · CA</a:t>
+            </a:r>
+            <a:endParaRPr lang="en-US" sz="1100" dirty="0"/>
+          </a:p>
+        </p:txBody>
+      </p:sp>
+      <p:sp>
+        <p:nvSpPr>
+          <p:cNvPr id="49" name="Text 47"/>
+          <p:cNvSpPr/>
+          <p:nvPr/>
+        </p:nvSpPr>
+        <p:spPr>
+          <a:xfrm>
+            <a:off x="8988552" y="5522976"/>
+            <a:ext cx="1033272" cy="713232"/>
           </a:xfrm>
           <a:prstGeom prst="rect">
             <a:avLst/>
@@ -6045,154 +7057,99 @@
           <a:bodyPr wrap="square" lIns="0" tIns="0" rIns="0" bIns="0" rtlCol="0" anchor="ctr"/>
           <a:lstStyle/>
           <a:p>
-            <a:pPr algn="r" indent="0" marL="0">
-              <a:buNone/>
-            </a:pPr>
-            <a:r>
-              <a:rPr lang="en-US" sz="1500" b="1" dirty="0">
-                <a:solidFill>
-                  <a:srgbClr val="B67B00"/>
-                </a:solidFill>
-                <a:latin typeface="Cambria" pitchFamily="34" charset="0"/>
-                <a:ea typeface="Cambria" pitchFamily="34" charset="-122"/>
-                <a:cs typeface="Cambria" pitchFamily="34" charset="-120"/>
-              </a:rPr>
-              <a:t>~$23k</a:t>
-            </a:r>
-            <a:endParaRPr lang="en-US" sz="1500" dirty="0"/>
-          </a:p>
-        </p:txBody>
-      </p:sp>
-      <p:sp>
-        <p:nvSpPr>
-          <p:cNvPr id="26" name="Text 24"/>
-          <p:cNvSpPr/>
-          <p:nvPr/>
-        </p:nvSpPr>
-        <p:spPr>
-          <a:xfrm>
-            <a:off x="640080" y="6035040"/>
-            <a:ext cx="5212080" cy="548640"/>
-          </a:xfrm>
-          <a:prstGeom prst="rect">
-            <a:avLst/>
-          </a:prstGeom>
-          <a:noFill/>
-          <a:ln/>
-        </p:spPr>
-        <p:txBody>
-          <a:bodyPr wrap="square" rtlCol="0" anchor="ctr"/>
-          <a:lstStyle/>
-          <a:p>
-            <a:pPr indent="0" marL="0">
-              <a:buNone/>
-            </a:pPr>
-            <a:r>
-              <a:rPr lang="en-US" sz="1150" i="1" dirty="0">
-                <a:solidFill>
-                  <a:srgbClr val="B67B00"/>
+            <a:pPr indent="0" marL="0">
+              <a:buNone/>
+            </a:pPr>
+            <a:r>
+              <a:rPr lang="en-US" sz="1100" b="1" dirty="0">
+                <a:solidFill>
+                  <a:srgbClr val="D6304F"/>
                 </a:solidFill>
                 <a:latin typeface="Calibri" pitchFamily="34" charset="0"/>
                 <a:ea typeface="Calibri" pitchFamily="34" charset="-122"/>
                 <a:cs typeface="Calibri" pitchFamily="34" charset="-120"/>
               </a:rPr>
-              <a:t>CAC is the single largest cost line — which is why the channel mix must stay low-CAC.</a:t>
-            </a:r>
-            <a:endParaRPr lang="en-US" sz="1150" dirty="0"/>
-          </a:p>
-        </p:txBody>
-      </p:sp>
-      <p:sp>
-        <p:nvSpPr>
-          <p:cNvPr id="27" name="Text 25"/>
-          <p:cNvSpPr/>
-          <p:nvPr/>
-        </p:nvSpPr>
-        <p:spPr>
-          <a:xfrm>
-            <a:off x="6309360" y="1691640"/>
-            <a:ext cx="5212080" cy="365760"/>
-          </a:xfrm>
-          <a:prstGeom prst="rect">
-            <a:avLst/>
-          </a:prstGeom>
-          <a:noFill/>
-          <a:ln/>
-        </p:spPr>
-        <p:txBody>
-          <a:bodyPr wrap="square" rtlCol="0" anchor="ctr"/>
-          <a:lstStyle/>
-          <a:p>
-            <a:pPr indent="0" marL="0">
-              <a:buNone/>
-            </a:pPr>
-            <a:r>
-              <a:rPr lang="en-US" sz="1500" b="1" dirty="0">
-                <a:solidFill>
-                  <a:srgbClr val="211D17"/>
-                </a:solidFill>
-                <a:latin typeface="Cambria" pitchFamily="34" charset="0"/>
-                <a:ea typeface="Cambria" pitchFamily="34" charset="-122"/>
-                <a:cs typeface="Cambria" pitchFamily="34" charset="-120"/>
-              </a:rPr>
-              <a:t>ARR trajectory ($k)</a:t>
-            </a:r>
-            <a:endParaRPr lang="en-US" sz="1500" dirty="0"/>
-          </a:p>
-        </p:txBody>
-      </p:sp>
-      <p:graphicFrame>
-        <p:nvGraphicFramePr>
-          <p:cNvPr id="28" name="Chart 0" descr=""/>
-          <p:cNvGraphicFramePr/>
-          <p:nvPr/>
-        </p:nvGraphicFramePr>
-        <p:xfrm>
-          <a:off x="6309360" y="2148840"/>
-          <a:ext cx="5212080" cy="3108960"/>
-        </p:xfrm>
-        <a:graphic xmlns:a="http://schemas.openxmlformats.org/drawingml/2006/main">
-          <a:graphicData uri="http://schemas.openxmlformats.org/drawingml/2006/chart">
-            <c:chart xmlns:c="http://schemas.openxmlformats.org/drawingml/2006/chart" r:id="rId1"/>
-          </a:graphicData>
-        </a:graphic>
-      </p:graphicFrame>
-      <p:sp>
-        <p:nvSpPr>
-          <p:cNvPr id="29" name="Text 26"/>
-          <p:cNvSpPr/>
-          <p:nvPr/>
-        </p:nvSpPr>
-        <p:spPr>
-          <a:xfrm>
-            <a:off x="6309360" y="5440680"/>
-            <a:ext cx="5212080" cy="914400"/>
-          </a:xfrm>
-          <a:prstGeom prst="rect">
-            <a:avLst/>
-          </a:prstGeom>
-          <a:noFill/>
-          <a:ln/>
-        </p:spPr>
-        <p:txBody>
-          <a:bodyPr wrap="square" rtlCol="0" anchor="ctr"/>
-          <a:lstStyle/>
-          <a:p>
-            <a:pPr indent="0" marL="0">
-              <a:buNone/>
-            </a:pPr>
-            <a:r>
-              <a:rPr lang="en-US" sz="1200" i="1" dirty="0">
-                <a:solidFill>
-                  <a:srgbClr val="6A6153"/>
+              <a:t>$30–60</a:t>
+            </a:r>
+            <a:endParaRPr lang="en-US" sz="1100" dirty="0"/>
+          </a:p>
+        </p:txBody>
+      </p:sp>
+      <p:sp>
+        <p:nvSpPr>
+          <p:cNvPr id="50" name="Text 48"/>
+          <p:cNvSpPr/>
+          <p:nvPr/>
+        </p:nvSpPr>
+        <p:spPr>
+          <a:xfrm>
+            <a:off x="10131552" y="5522976"/>
+            <a:ext cx="1536192" cy="713232"/>
+          </a:xfrm>
+          <a:prstGeom prst="rect">
+            <a:avLst/>
+          </a:prstGeom>
+          <a:noFill/>
+          <a:ln/>
+        </p:spPr>
+        <p:txBody>
+          <a:bodyPr wrap="square" lIns="0" tIns="0" rIns="0" bIns="0" rtlCol="0" anchor="ctr"/>
+          <a:lstStyle/>
+          <a:p>
+            <a:pPr indent="0" marL="0">
+              <a:buNone/>
+            </a:pPr>
+            <a:r>
+              <a:rPr lang="en-US" sz="1100" dirty="0">
+                <a:solidFill>
+                  <a:srgbClr val="D6304F"/>
                 </a:solidFill>
                 <a:latin typeface="Calibri" pitchFamily="34" charset="0"/>
                 <a:ea typeface="Calibri" pitchFamily="34" charset="-122"/>
                 <a:cs typeface="Calibri" pitchFamily="34" charset="-120"/>
               </a:rPr>
-              <a:t>1,000 → 3,000 → 6,000 kids as the wedge widens into general English-medium markets. Bootstrappable; venture-scale needs a B2B2C / coach motion on top.</a:t>
-            </a:r>
-            <a:endParaRPr lang="en-US" sz="1200" dirty="0"/>
+              <a:t>Amplify, last</a:t>
+            </a:r>
+            <a:endParaRPr lang="en-US" sz="1100" dirty="0"/>
+          </a:p>
+        </p:txBody>
+      </p:sp>
+      <p:sp>
+        <p:nvSpPr>
+          <p:cNvPr id="51" name="Text 49"/>
+          <p:cNvSpPr/>
+          <p:nvPr/>
+        </p:nvSpPr>
+        <p:spPr>
+          <a:xfrm>
+            <a:off x="640080" y="6382512"/>
+            <a:ext cx="10911535" cy="320040"/>
+          </a:xfrm>
+          <a:prstGeom prst="rect">
+            <a:avLst/>
+          </a:prstGeom>
+          <a:noFill/>
+          <a:ln/>
+        </p:spPr>
+        <p:txBody>
+          <a:bodyPr wrap="square" rtlCol="0" anchor="ctr"/>
+          <a:lstStyle/>
+          <a:p>
+            <a:pPr indent="0" marL="0">
+              <a:buNone/>
+            </a:pPr>
+            <a:r>
+              <a:rPr lang="en-US" sz="1150" i="1" dirty="0">
+                <a:solidFill>
+                  <a:srgbClr val="B67B00"/>
+                </a:solidFill>
+                <a:latin typeface="Calibri" pitchFamily="34" charset="0"/>
+                <a:ea typeface="Calibri" pitchFamily="34" charset="-122"/>
+                <a:cs typeface="Calibri" pitchFamily="34" charset="-120"/>
+              </a:rPr>
+              <a:t>*Content CAC amortizes toward zero as pages compound.   Blended CAC across the mix ≈ $11–20 → LTV:CAC ≈ 5:1.</a:t>
+            </a:r>
+            <a:endParaRPr lang="en-US" sz="1150" dirty="0"/>
           </a:p>
         </p:txBody>
       </p:sp>
@@ -6261,7 +7218,7 @@
                 <a:ea typeface="Calibri" pitchFamily="34" charset="-122"/>
                 <a:cs typeface="Calibri" pitchFamily="34" charset="-120"/>
               </a:rPr>
-              <a:t>ROADMAP TO ALPHA</a:t>
+              <a:t>THE 12-MONTH GTM MOTION</a:t>
             </a:r>
             <a:endParaRPr lang="en-US" sz="1200" dirty="0"/>
           </a:p>
@@ -6300,7 +7257,7 @@
                 <a:ea typeface="Cambria" pitchFamily="34" charset="-122"/>
                 <a:cs typeface="Cambria" pitchFamily="34" charset="-120"/>
               </a:rPr>
-              <a:t>Ship the seam, stand up the loop, invite the community</a:t>
+              <a:t>Turn channels on in sequence; CAC falls as referral &amp; content compound</a:t>
             </a:r>
             <a:endParaRPr lang="en-US" sz="3000" dirty="0"/>
           </a:p>
@@ -6314,12 +7271,12 @@
         </p:nvSpPr>
         <p:spPr>
           <a:xfrm>
-            <a:off x="640080" y="1737360"/>
-            <a:ext cx="5303520" cy="1005840"/>
+            <a:off x="640080" y="1783080"/>
+            <a:ext cx="2578608" cy="3429000"/>
           </a:xfrm>
           <a:prstGeom prst="roundRect">
             <a:avLst>
-              <a:gd name="adj" fmla="val 8182"/>
+              <a:gd name="adj" fmla="val 3191"/>
             </a:avLst>
           </a:prstGeom>
           <a:solidFill>
@@ -6343,14 +7300,16 @@
         </p:nvSpPr>
         <p:spPr>
           <a:xfrm>
-            <a:off x="868680" y="1993392"/>
-            <a:ext cx="566928" cy="530352"/>
-          </a:xfrm>
-          <a:prstGeom prst="hexagon">
-            <a:avLst/>
+            <a:off x="841248" y="2002536"/>
+            <a:ext cx="1051560" cy="457200"/>
+          </a:xfrm>
+          <a:prstGeom prst="roundRect">
+            <a:avLst>
+              <a:gd name="adj" fmla="val 20000"/>
+            </a:avLst>
           </a:prstGeom>
           <a:solidFill>
-            <a:srgbClr val="E8A400"/>
+            <a:srgbClr val="7C5CFF"/>
           </a:solidFill>
           <a:ln/>
         </p:spPr>
@@ -6363,8 +7322,8 @@
         </p:nvSpPr>
         <p:spPr>
           <a:xfrm>
-            <a:off x="868680" y="1993392"/>
-            <a:ext cx="566928" cy="530352"/>
+            <a:off x="841248" y="2002536"/>
+            <a:ext cx="1051560" cy="457200"/>
           </a:xfrm>
           <a:prstGeom prst="rect">
             <a:avLst/>
@@ -6388,7 +7347,7 @@
                 <a:ea typeface="Cambria" pitchFamily="34" charset="-122"/>
                 <a:cs typeface="Cambria" pitchFamily="34" charset="-120"/>
               </a:rPr>
-              <a:t>0</a:t>
+              <a:t>Q1</a:t>
             </a:r>
             <a:endParaRPr lang="en-US" sz="1800" dirty="0"/>
           </a:p>
@@ -6402,24 +7361,24 @@
         </p:nvSpPr>
         <p:spPr>
           <a:xfrm>
-            <a:off x="1600200" y="1920240"/>
-            <a:ext cx="4206240" cy="365760"/>
-          </a:xfrm>
-          <a:prstGeom prst="rect">
-            <a:avLst/>
-          </a:prstGeom>
-          <a:noFill/>
-          <a:ln/>
-        </p:spPr>
-        <p:txBody>
-          <a:bodyPr wrap="square" rtlCol="0" anchor="ctr"/>
-          <a:lstStyle/>
-          <a:p>
-            <a:pPr indent="0" marL="0">
-              <a:buNone/>
-            </a:pPr>
-            <a:r>
-              <a:rPr lang="en-US" sz="1500" b="1" dirty="0">
+            <a:off x="2011680" y="2020824"/>
+            <a:ext cx="1097280" cy="420624"/>
+          </a:xfrm>
+          <a:prstGeom prst="rect">
+            <a:avLst/>
+          </a:prstGeom>
+          <a:noFill/>
+          <a:ln/>
+        </p:spPr>
+        <p:txBody>
+          <a:bodyPr wrap="square" lIns="0" tIns="0" rIns="0" bIns="0" rtlCol="0" anchor="ctr"/>
+          <a:lstStyle/>
+          <a:p>
+            <a:pPr indent="0" marL="0">
+              <a:buNone/>
+            </a:pPr>
+            <a:r>
+              <a:rPr lang="en-US" sz="1600" b="1" dirty="0">
                 <a:solidFill>
                   <a:srgbClr val="211D17"/>
                 </a:solidFill>
@@ -6427,65 +7386,281 @@
                 <a:ea typeface="Cambria" pitchFamily="34" charset="-122"/>
                 <a:cs typeface="Cambria" pitchFamily="34" charset="-120"/>
               </a:rPr>
-              <a:t>Legal &amp; rails</a:t>
-            </a:r>
-            <a:endParaRPr lang="en-US" sz="1500" dirty="0"/>
-          </a:p>
-        </p:txBody>
-      </p:sp>
-      <p:sp>
-        <p:nvSpPr>
-          <p:cNvPr id="8" name="Text 6"/>
-          <p:cNvSpPr/>
-          <p:nvPr/>
-        </p:nvSpPr>
-        <p:spPr>
-          <a:xfrm>
-            <a:off x="1600200" y="2267712"/>
-            <a:ext cx="4251960" cy="457200"/>
-          </a:xfrm>
-          <a:prstGeom prst="rect">
-            <a:avLst/>
-          </a:prstGeom>
-          <a:noFill/>
-          <a:ln/>
-        </p:spPr>
-        <p:txBody>
-          <a:bodyPr wrap="square" rtlCol="0" anchor="ctr"/>
-          <a:lstStyle/>
-          <a:p>
-            <a:pPr indent="0" marL="0">
-              <a:buNone/>
-            </a:pPr>
-            <a:r>
-              <a:rPr lang="en-US" sz="1150" dirty="0">
-                <a:solidFill>
-                  <a:srgbClr val="6A6153"/>
+              <a:t>Land</a:t>
+            </a:r>
+            <a:endParaRPr lang="en-US" sz="1600" dirty="0"/>
+          </a:p>
+        </p:txBody>
+      </p:sp>
+      <p:sp>
+        <p:nvSpPr>
+          <p:cNvPr id="8" name="Shape 6"/>
+          <p:cNvSpPr/>
+          <p:nvPr/>
+        </p:nvSpPr>
+        <p:spPr>
+          <a:xfrm>
+            <a:off x="896112" y="2715768"/>
+            <a:ext cx="91440" cy="91440"/>
+          </a:xfrm>
+          <a:prstGeom prst="ellipse">
+            <a:avLst/>
+          </a:prstGeom>
+          <a:solidFill>
+            <a:srgbClr val="7C5CFF"/>
+          </a:solidFill>
+          <a:ln/>
+        </p:spPr>
+      </p:sp>
+      <p:sp>
+        <p:nvSpPr>
+          <p:cNvPr id="9" name="Text 7"/>
+          <p:cNvSpPr/>
+          <p:nvPr/>
+        </p:nvSpPr>
+        <p:spPr>
+          <a:xfrm>
+            <a:off x="1097280" y="2606040"/>
+            <a:ext cx="1938528" cy="548640"/>
+          </a:xfrm>
+          <a:prstGeom prst="rect">
+            <a:avLst/>
+          </a:prstGeom>
+          <a:noFill/>
+          <a:ln/>
+        </p:spPr>
+        <p:txBody>
+          <a:bodyPr wrap="square" lIns="0" tIns="0" rIns="0" bIns="0" rtlCol="0" anchor="t"/>
+          <a:lstStyle/>
+          <a:p>
+            <a:pPr indent="0" marL="0">
+              <a:buNone/>
+            </a:pPr>
+            <a:r>
+              <a:rPr lang="en-US" sz="1100" dirty="0">
+                <a:solidFill>
+                  <a:srgbClr val="4A4238"/>
                 </a:solidFill>
                 <a:latin typeface="Calibri" pitchFamily="34" charset="0"/>
                 <a:ea typeface="Calibri" pitchFamily="34" charset="-122"/>
                 <a:cs typeface="Calibri" pitchFamily="34" charset="-120"/>
               </a:rPr>
-              <a:t>Entity, domain, Stripe + Razorpay, Supabase, lawyer-reviewed consent</a:t>
-            </a:r>
-            <a:endParaRPr lang="en-US" sz="1150" dirty="0"/>
-          </a:p>
-        </p:txBody>
-      </p:sp>
-      <p:sp>
-        <p:nvSpPr>
-          <p:cNvPr id="9" name="Shape 7"/>
-          <p:cNvSpPr/>
-          <p:nvPr/>
-        </p:nvSpPr>
-        <p:spPr>
-          <a:xfrm>
-            <a:off x="6172200" y="1737360"/>
-            <a:ext cx="5303520" cy="1005840"/>
+              <a:t>Recruit 5–8 coaches</a:t>
+            </a:r>
+            <a:endParaRPr lang="en-US" sz="1100" dirty="0"/>
+          </a:p>
+        </p:txBody>
+      </p:sp>
+      <p:sp>
+        <p:nvSpPr>
+          <p:cNvPr id="10" name="Shape 8"/>
+          <p:cNvSpPr/>
+          <p:nvPr/>
+        </p:nvSpPr>
+        <p:spPr>
+          <a:xfrm>
+            <a:off x="896112" y="3282696"/>
+            <a:ext cx="91440" cy="91440"/>
+          </a:xfrm>
+          <a:prstGeom prst="ellipse">
+            <a:avLst/>
+          </a:prstGeom>
+          <a:solidFill>
+            <a:srgbClr val="7C5CFF"/>
+          </a:solidFill>
+          <a:ln/>
+        </p:spPr>
+      </p:sp>
+      <p:sp>
+        <p:nvSpPr>
+          <p:cNvPr id="11" name="Text 9"/>
+          <p:cNvSpPr/>
+          <p:nvPr/>
+        </p:nvSpPr>
+        <p:spPr>
+          <a:xfrm>
+            <a:off x="1097280" y="3172968"/>
+            <a:ext cx="1938528" cy="548640"/>
+          </a:xfrm>
+          <a:prstGeom prst="rect">
+            <a:avLst/>
+          </a:prstGeom>
+          <a:noFill/>
+          <a:ln/>
+        </p:spPr>
+        <p:txBody>
+          <a:bodyPr wrap="square" lIns="0" tIns="0" rIns="0" bIns="0" rtlCol="0" anchor="t"/>
+          <a:lstStyle/>
+          <a:p>
+            <a:pPr indent="0" marL="0">
+              <a:buNone/>
+            </a:pPr>
+            <a:r>
+              <a:rPr lang="en-US" sz="1100" dirty="0">
+                <a:solidFill>
+                  <a:srgbClr val="4A4238"/>
+                </a:solidFill>
+                <a:latin typeface="Calibri" pitchFamily="34" charset="0"/>
+                <a:ea typeface="Calibri" pitchFamily="34" charset="-122"/>
+                <a:cs typeface="Calibri" pitchFamily="34" charset="-120"/>
+              </a:rPr>
+              <a:t>Invite alpha: 100–300 families</a:t>
+            </a:r>
+            <a:endParaRPr lang="en-US" sz="1100" dirty="0"/>
+          </a:p>
+        </p:txBody>
+      </p:sp>
+      <p:sp>
+        <p:nvSpPr>
+          <p:cNvPr id="12" name="Shape 10"/>
+          <p:cNvSpPr/>
+          <p:nvPr/>
+        </p:nvSpPr>
+        <p:spPr>
+          <a:xfrm>
+            <a:off x="896112" y="3849624"/>
+            <a:ext cx="91440" cy="91440"/>
+          </a:xfrm>
+          <a:prstGeom prst="ellipse">
+            <a:avLst/>
+          </a:prstGeom>
+          <a:solidFill>
+            <a:srgbClr val="7C5CFF"/>
+          </a:solidFill>
+          <a:ln/>
+        </p:spPr>
+      </p:sp>
+      <p:sp>
+        <p:nvSpPr>
+          <p:cNvPr id="13" name="Text 11"/>
+          <p:cNvSpPr/>
+          <p:nvPr/>
+        </p:nvSpPr>
+        <p:spPr>
+          <a:xfrm>
+            <a:off x="1097280" y="3739896"/>
+            <a:ext cx="1938528" cy="548640"/>
+          </a:xfrm>
+          <a:prstGeom prst="rect">
+            <a:avLst/>
+          </a:prstGeom>
+          <a:noFill/>
+          <a:ln/>
+        </p:spPr>
+        <p:txBody>
+          <a:bodyPr wrap="square" lIns="0" tIns="0" rIns="0" bIns="0" rtlCol="0" anchor="t"/>
+          <a:lstStyle/>
+          <a:p>
+            <a:pPr indent="0" marL="0">
+              <a:buNone/>
+            </a:pPr>
+            <a:r>
+              <a:rPr lang="en-US" sz="1100" dirty="0">
+                <a:solidFill>
+                  <a:srgbClr val="4A4238"/>
+                </a:solidFill>
+                <a:latin typeface="Calibri" pitchFamily="34" charset="0"/>
+                <a:ea typeface="Calibri" pitchFamily="34" charset="-122"/>
+                <a:cs typeface="Calibri" pitchFamily="34" charset="-120"/>
+              </a:rPr>
+              <a:t>Instrument share-cards + referral</a:t>
+            </a:r>
+            <a:endParaRPr lang="en-US" sz="1100" dirty="0"/>
+          </a:p>
+        </p:txBody>
+      </p:sp>
+      <p:sp>
+        <p:nvSpPr>
+          <p:cNvPr id="14" name="Text 12"/>
+          <p:cNvSpPr/>
+          <p:nvPr/>
+        </p:nvSpPr>
+        <p:spPr>
+          <a:xfrm>
+            <a:off x="841248" y="4480560"/>
+            <a:ext cx="2176272" cy="274320"/>
+          </a:xfrm>
+          <a:prstGeom prst="rect">
+            <a:avLst/>
+          </a:prstGeom>
+          <a:noFill/>
+          <a:ln/>
+        </p:spPr>
+        <p:txBody>
+          <a:bodyPr wrap="square" lIns="0" tIns="0" rIns="0" bIns="0" rtlCol="0" anchor="ctr"/>
+          <a:lstStyle/>
+          <a:p>
+            <a:pPr indent="0" marL="0">
+              <a:buNone/>
+            </a:pPr>
+            <a:r>
+              <a:rPr lang="en-US" sz="950" dirty="0">
+                <a:solidFill>
+                  <a:srgbClr val="6A6153"/>
+                </a:solidFill>
+                <a:latin typeface="Calibri" pitchFamily="34" charset="0"/>
+                <a:ea typeface="Calibri" pitchFamily="34" charset="-122"/>
+                <a:cs typeface="Calibri" pitchFamily="34" charset="-120"/>
+              </a:rPr>
+              <a:t>cumulative paying families</a:t>
+            </a:r>
+            <a:endParaRPr lang="en-US" sz="950" dirty="0"/>
+          </a:p>
+        </p:txBody>
+      </p:sp>
+      <p:sp>
+        <p:nvSpPr>
+          <p:cNvPr id="15" name="Text 13"/>
+          <p:cNvSpPr/>
+          <p:nvPr/>
+        </p:nvSpPr>
+        <p:spPr>
+          <a:xfrm>
+            <a:off x="841248" y="4709160"/>
+            <a:ext cx="2176272" cy="457200"/>
+          </a:xfrm>
+          <a:prstGeom prst="rect">
+            <a:avLst/>
+          </a:prstGeom>
+          <a:noFill/>
+          <a:ln/>
+        </p:spPr>
+        <p:txBody>
+          <a:bodyPr wrap="square" lIns="0" tIns="0" rIns="0" bIns="0" rtlCol="0" anchor="ctr"/>
+          <a:lstStyle/>
+          <a:p>
+            <a:pPr indent="0" marL="0">
+              <a:buNone/>
+            </a:pPr>
+            <a:r>
+              <a:rPr lang="en-US" sz="2200" b="1" dirty="0">
+                <a:solidFill>
+                  <a:srgbClr val="7C5CFF"/>
+                </a:solidFill>
+                <a:latin typeface="Cambria" pitchFamily="34" charset="0"/>
+                <a:ea typeface="Cambria" pitchFamily="34" charset="-122"/>
+                <a:cs typeface="Cambria" pitchFamily="34" charset="-120"/>
+              </a:rPr>
+              <a:t>~150</a:t>
+            </a:r>
+            <a:endParaRPr lang="en-US" sz="2200" dirty="0"/>
+          </a:p>
+        </p:txBody>
+      </p:sp>
+      <p:sp>
+        <p:nvSpPr>
+          <p:cNvPr id="16" name="Shape 14"/>
+          <p:cNvSpPr/>
+          <p:nvPr/>
+        </p:nvSpPr>
+        <p:spPr>
+          <a:xfrm>
+            <a:off x="3401568" y="1783080"/>
+            <a:ext cx="2578608" cy="3429000"/>
           </a:xfrm>
           <a:prstGeom prst="roundRect">
             <a:avLst>
-              <a:gd name="adj" fmla="val 8182"/>
+              <a:gd name="adj" fmla="val 3191"/>
             </a:avLst>
           </a:prstGeom>
           <a:solidFill>
@@ -6503,34 +7678,36 @@
       </p:sp>
       <p:sp>
         <p:nvSpPr>
-          <p:cNvPr id="10" name="Shape 8"/>
-          <p:cNvSpPr/>
-          <p:nvPr/>
-        </p:nvSpPr>
-        <p:spPr>
-          <a:xfrm>
-            <a:off x="6400800" y="1993392"/>
-            <a:ext cx="566928" cy="530352"/>
-          </a:xfrm>
-          <a:prstGeom prst="hexagon">
-            <a:avLst/>
+          <p:cNvPr id="17" name="Shape 15"/>
+          <p:cNvSpPr/>
+          <p:nvPr/>
+        </p:nvSpPr>
+        <p:spPr>
+          <a:xfrm>
+            <a:off x="3602736" y="2002536"/>
+            <a:ext cx="1051560" cy="457200"/>
+          </a:xfrm>
+          <a:prstGeom prst="roundRect">
+            <a:avLst>
+              <a:gd name="adj" fmla="val 20000"/>
+            </a:avLst>
           </a:prstGeom>
           <a:solidFill>
-            <a:srgbClr val="E8A400"/>
+            <a:srgbClr val="B67B00"/>
           </a:solidFill>
           <a:ln/>
         </p:spPr>
       </p:sp>
       <p:sp>
         <p:nvSpPr>
-          <p:cNvPr id="11" name="Text 9"/>
-          <p:cNvSpPr/>
-          <p:nvPr/>
-        </p:nvSpPr>
-        <p:spPr>
-          <a:xfrm>
-            <a:off x="6400800" y="1993392"/>
-            <a:ext cx="566928" cy="530352"/>
+          <p:cNvPr id="18" name="Text 16"/>
+          <p:cNvSpPr/>
+          <p:nvPr/>
+        </p:nvSpPr>
+        <p:spPr>
+          <a:xfrm>
+            <a:off x="3602736" y="2002536"/>
+            <a:ext cx="1051560" cy="457200"/>
           </a:xfrm>
           <a:prstGeom prst="rect">
             <a:avLst/>
@@ -6554,7 +7731,7 @@
                 <a:ea typeface="Cambria" pitchFamily="34" charset="-122"/>
                 <a:cs typeface="Cambria" pitchFamily="34" charset="-120"/>
               </a:rPr>
-              <a:t>1</a:t>
+              <a:t>Q2</a:t>
             </a:r>
             <a:endParaRPr lang="en-US" sz="1800" dirty="0"/>
           </a:p>
@@ -6562,30 +7739,30 @@
       </p:sp>
       <p:sp>
         <p:nvSpPr>
-          <p:cNvPr id="12" name="Text 10"/>
-          <p:cNvSpPr/>
-          <p:nvPr/>
-        </p:nvSpPr>
-        <p:spPr>
-          <a:xfrm>
-            <a:off x="7132320" y="1920240"/>
-            <a:ext cx="4206240" cy="365760"/>
-          </a:xfrm>
-          <a:prstGeom prst="rect">
-            <a:avLst/>
-          </a:prstGeom>
-          <a:noFill/>
-          <a:ln/>
-        </p:spPr>
-        <p:txBody>
-          <a:bodyPr wrap="square" rtlCol="0" anchor="ctr"/>
-          <a:lstStyle/>
-          <a:p>
-            <a:pPr indent="0" marL="0">
-              <a:buNone/>
-            </a:pPr>
-            <a:r>
-              <a:rPr lang="en-US" sz="1500" b="1" dirty="0">
+          <p:cNvPr id="19" name="Text 17"/>
+          <p:cNvSpPr/>
+          <p:nvPr/>
+        </p:nvSpPr>
+        <p:spPr>
+          <a:xfrm>
+            <a:off x="4773168" y="2020824"/>
+            <a:ext cx="1097280" cy="420624"/>
+          </a:xfrm>
+          <a:prstGeom prst="rect">
+            <a:avLst/>
+          </a:prstGeom>
+          <a:noFill/>
+          <a:ln/>
+        </p:spPr>
+        <p:txBody>
+          <a:bodyPr wrap="square" lIns="0" tIns="0" rIns="0" bIns="0" rtlCol="0" anchor="ctr"/>
+          <a:lstStyle/>
+          <a:p>
+            <a:pPr indent="0" marL="0">
+              <a:buNone/>
+            </a:pPr>
+            <a:r>
+              <a:rPr lang="en-US" sz="1600" b="1" dirty="0">
                 <a:solidFill>
                   <a:srgbClr val="211D17"/>
                 </a:solidFill>
@@ -6593,65 +7770,281 @@
                 <a:ea typeface="Cambria" pitchFamily="34" charset="-122"/>
                 <a:cs typeface="Cambria" pitchFamily="34" charset="-120"/>
               </a:rPr>
-              <a:t>Storage seam</a:t>
-            </a:r>
-            <a:endParaRPr lang="en-US" sz="1500" dirty="0"/>
-          </a:p>
-        </p:txBody>
-      </p:sp>
-      <p:sp>
-        <p:nvSpPr>
-          <p:cNvPr id="13" name="Text 11"/>
-          <p:cNvSpPr/>
-          <p:nvPr/>
-        </p:nvSpPr>
-        <p:spPr>
-          <a:xfrm>
-            <a:off x="7132320" y="2267712"/>
-            <a:ext cx="4251960" cy="457200"/>
-          </a:xfrm>
-          <a:prstGeom prst="rect">
-            <a:avLst/>
-          </a:prstGeom>
-          <a:noFill/>
-          <a:ln/>
-        </p:spPr>
-        <p:txBody>
-          <a:bodyPr wrap="square" rtlCol="0" anchor="ctr"/>
-          <a:lstStyle/>
-          <a:p>
-            <a:pPr indent="0" marL="0">
-              <a:buNone/>
-            </a:pPr>
-            <a:r>
-              <a:rPr lang="en-US" sz="1150" dirty="0">
-                <a:solidFill>
-                  <a:srgbClr val="6A6153"/>
+              <a:t>Loop</a:t>
+            </a:r>
+            <a:endParaRPr lang="en-US" sz="1600" dirty="0"/>
+          </a:p>
+        </p:txBody>
+      </p:sp>
+      <p:sp>
+        <p:nvSpPr>
+          <p:cNvPr id="20" name="Shape 18"/>
+          <p:cNvSpPr/>
+          <p:nvPr/>
+        </p:nvSpPr>
+        <p:spPr>
+          <a:xfrm>
+            <a:off x="3657600" y="2715768"/>
+            <a:ext cx="91440" cy="91440"/>
+          </a:xfrm>
+          <a:prstGeom prst="ellipse">
+            <a:avLst/>
+          </a:prstGeom>
+          <a:solidFill>
+            <a:srgbClr val="B67B00"/>
+          </a:solidFill>
+          <a:ln/>
+        </p:spPr>
+      </p:sp>
+      <p:sp>
+        <p:nvSpPr>
+          <p:cNvPr id="21" name="Text 19"/>
+          <p:cNvSpPr/>
+          <p:nvPr/>
+        </p:nvSpPr>
+        <p:spPr>
+          <a:xfrm>
+            <a:off x="3858768" y="2606040"/>
+            <a:ext cx="1938528" cy="548640"/>
+          </a:xfrm>
+          <a:prstGeom prst="rect">
+            <a:avLst/>
+          </a:prstGeom>
+          <a:noFill/>
+          <a:ln/>
+        </p:spPr>
+        <p:txBody>
+          <a:bodyPr wrap="square" lIns="0" tIns="0" rIns="0" bIns="0" rtlCol="0" anchor="t"/>
+          <a:lstStyle/>
+          <a:p>
+            <a:pPr indent="0" marL="0">
+              <a:buNone/>
+            </a:pPr>
+            <a:r>
+              <a:rPr lang="en-US" sz="1100" dirty="0">
+                <a:solidFill>
+                  <a:srgbClr val="4A4238"/>
                 </a:solidFill>
                 <a:latin typeface="Calibri" pitchFamily="34" charset="0"/>
                 <a:ea typeface="Calibri" pitchFamily="34" charset="-122"/>
                 <a:cs typeface="Calibri" pitchFamily="34" charset="-120"/>
               </a:rPr>
-              <a:t>The Store adapter: sync vs device-local split, schema versioning</a:t>
-            </a:r>
-            <a:endParaRPr lang="en-US" sz="1150" dirty="0"/>
-          </a:p>
-        </p:txBody>
-      </p:sp>
-      <p:sp>
-        <p:nvSpPr>
-          <p:cNvPr id="14" name="Shape 12"/>
-          <p:cNvSpPr/>
-          <p:nvPr/>
-        </p:nvSpPr>
-        <p:spPr>
-          <a:xfrm>
-            <a:off x="640080" y="2880360"/>
-            <a:ext cx="5303520" cy="1005840"/>
+              <a:t>Referral incentive live</a:t>
+            </a:r>
+            <a:endParaRPr lang="en-US" sz="1100" dirty="0"/>
+          </a:p>
+        </p:txBody>
+      </p:sp>
+      <p:sp>
+        <p:nvSpPr>
+          <p:cNvPr id="22" name="Shape 20"/>
+          <p:cNvSpPr/>
+          <p:nvPr/>
+        </p:nvSpPr>
+        <p:spPr>
+          <a:xfrm>
+            <a:off x="3657600" y="3282696"/>
+            <a:ext cx="91440" cy="91440"/>
+          </a:xfrm>
+          <a:prstGeom prst="ellipse">
+            <a:avLst/>
+          </a:prstGeom>
+          <a:solidFill>
+            <a:srgbClr val="B67B00"/>
+          </a:solidFill>
+          <a:ln/>
+        </p:spPr>
+      </p:sp>
+      <p:sp>
+        <p:nvSpPr>
+          <p:cNvPr id="23" name="Text 21"/>
+          <p:cNvSpPr/>
+          <p:nvPr/>
+        </p:nvSpPr>
+        <p:spPr>
+          <a:xfrm>
+            <a:off x="3858768" y="3172968"/>
+            <a:ext cx="1938528" cy="548640"/>
+          </a:xfrm>
+          <a:prstGeom prst="rect">
+            <a:avLst/>
+          </a:prstGeom>
+          <a:noFill/>
+          <a:ln/>
+        </p:spPr>
+        <p:txBody>
+          <a:bodyPr wrap="square" lIns="0" tIns="0" rIns="0" bIns="0" rtlCol="0" anchor="t"/>
+          <a:lstStyle/>
+          <a:p>
+            <a:pPr indent="0" marL="0">
+              <a:buNone/>
+            </a:pPr>
+            <a:r>
+              <a:rPr lang="en-US" sz="1100" dirty="0">
+                <a:solidFill>
+                  <a:srgbClr val="4A4238"/>
+                </a:solidFill>
+                <a:latin typeface="Calibri" pitchFamily="34" charset="0"/>
+                <a:ea typeface="Calibri" pitchFamily="34" charset="-122"/>
+                <a:cs typeface="Calibri" pitchFamily="34" charset="-120"/>
+              </a:rPr>
+              <a:t>Content hub: 10–20 word-list pages</a:t>
+            </a:r>
+            <a:endParaRPr lang="en-US" sz="1100" dirty="0"/>
+          </a:p>
+        </p:txBody>
+      </p:sp>
+      <p:sp>
+        <p:nvSpPr>
+          <p:cNvPr id="24" name="Shape 22"/>
+          <p:cNvSpPr/>
+          <p:nvPr/>
+        </p:nvSpPr>
+        <p:spPr>
+          <a:xfrm>
+            <a:off x="3657600" y="3849624"/>
+            <a:ext cx="91440" cy="91440"/>
+          </a:xfrm>
+          <a:prstGeom prst="ellipse">
+            <a:avLst/>
+          </a:prstGeom>
+          <a:solidFill>
+            <a:srgbClr val="B67B00"/>
+          </a:solidFill>
+          <a:ln/>
+        </p:spPr>
+      </p:sp>
+      <p:sp>
+        <p:nvSpPr>
+          <p:cNvPr id="25" name="Text 23"/>
+          <p:cNvSpPr/>
+          <p:nvPr/>
+        </p:nvSpPr>
+        <p:spPr>
+          <a:xfrm>
+            <a:off x="3858768" y="3739896"/>
+            <a:ext cx="1938528" cy="548640"/>
+          </a:xfrm>
+          <a:prstGeom prst="rect">
+            <a:avLst/>
+          </a:prstGeom>
+          <a:noFill/>
+          <a:ln/>
+        </p:spPr>
+        <p:txBody>
+          <a:bodyPr wrap="square" lIns="0" tIns="0" rIns="0" bIns="0" rtlCol="0" anchor="t"/>
+          <a:lstStyle/>
+          <a:p>
+            <a:pPr indent="0" marL="0">
+              <a:buNone/>
+            </a:pPr>
+            <a:r>
+              <a:rPr lang="en-US" sz="1100" dirty="0">
+                <a:solidFill>
+                  <a:srgbClr val="4A4238"/>
+                </a:solidFill>
+                <a:latin typeface="Calibri" pitchFamily="34" charset="0"/>
+                <a:ea typeface="Calibri" pitchFamily="34" charset="-122"/>
+                <a:cs typeface="Calibri" pitchFamily="34" charset="-120"/>
+              </a:rPr>
+              <a:t>2–3 creator tests</a:t>
+            </a:r>
+            <a:endParaRPr lang="en-US" sz="1100" dirty="0"/>
+          </a:p>
+        </p:txBody>
+      </p:sp>
+      <p:sp>
+        <p:nvSpPr>
+          <p:cNvPr id="26" name="Text 24"/>
+          <p:cNvSpPr/>
+          <p:nvPr/>
+        </p:nvSpPr>
+        <p:spPr>
+          <a:xfrm>
+            <a:off x="3602736" y="4480560"/>
+            <a:ext cx="2176272" cy="274320"/>
+          </a:xfrm>
+          <a:prstGeom prst="rect">
+            <a:avLst/>
+          </a:prstGeom>
+          <a:noFill/>
+          <a:ln/>
+        </p:spPr>
+        <p:txBody>
+          <a:bodyPr wrap="square" lIns="0" tIns="0" rIns="0" bIns="0" rtlCol="0" anchor="ctr"/>
+          <a:lstStyle/>
+          <a:p>
+            <a:pPr indent="0" marL="0">
+              <a:buNone/>
+            </a:pPr>
+            <a:r>
+              <a:rPr lang="en-US" sz="950" dirty="0">
+                <a:solidFill>
+                  <a:srgbClr val="6A6153"/>
+                </a:solidFill>
+                <a:latin typeface="Calibri" pitchFamily="34" charset="0"/>
+                <a:ea typeface="Calibri" pitchFamily="34" charset="-122"/>
+                <a:cs typeface="Calibri" pitchFamily="34" charset="-120"/>
+              </a:rPr>
+              <a:t>cumulative paying families</a:t>
+            </a:r>
+            <a:endParaRPr lang="en-US" sz="950" dirty="0"/>
+          </a:p>
+        </p:txBody>
+      </p:sp>
+      <p:sp>
+        <p:nvSpPr>
+          <p:cNvPr id="27" name="Text 25"/>
+          <p:cNvSpPr/>
+          <p:nvPr/>
+        </p:nvSpPr>
+        <p:spPr>
+          <a:xfrm>
+            <a:off x="3602736" y="4709160"/>
+            <a:ext cx="2176272" cy="457200"/>
+          </a:xfrm>
+          <a:prstGeom prst="rect">
+            <a:avLst/>
+          </a:prstGeom>
+          <a:noFill/>
+          <a:ln/>
+        </p:spPr>
+        <p:txBody>
+          <a:bodyPr wrap="square" lIns="0" tIns="0" rIns="0" bIns="0" rtlCol="0" anchor="ctr"/>
+          <a:lstStyle/>
+          <a:p>
+            <a:pPr indent="0" marL="0">
+              <a:buNone/>
+            </a:pPr>
+            <a:r>
+              <a:rPr lang="en-US" sz="2200" b="1" dirty="0">
+                <a:solidFill>
+                  <a:srgbClr val="B67B00"/>
+                </a:solidFill>
+                <a:latin typeface="Cambria" pitchFamily="34" charset="0"/>
+                <a:ea typeface="Cambria" pitchFamily="34" charset="-122"/>
+                <a:cs typeface="Cambria" pitchFamily="34" charset="-120"/>
+              </a:rPr>
+              <a:t>~350</a:t>
+            </a:r>
+            <a:endParaRPr lang="en-US" sz="2200" dirty="0"/>
+          </a:p>
+        </p:txBody>
+      </p:sp>
+      <p:sp>
+        <p:nvSpPr>
+          <p:cNvPr id="28" name="Shape 26"/>
+          <p:cNvSpPr/>
+          <p:nvPr/>
+        </p:nvSpPr>
+        <p:spPr>
+          <a:xfrm>
+            <a:off x="6163056" y="1783080"/>
+            <a:ext cx="2578608" cy="3429000"/>
           </a:xfrm>
           <a:prstGeom prst="roundRect">
             <a:avLst>
-              <a:gd name="adj" fmla="val 8182"/>
+              <a:gd name="adj" fmla="val 3191"/>
             </a:avLst>
           </a:prstGeom>
           <a:solidFill>
@@ -6669,34 +8062,36 @@
       </p:sp>
       <p:sp>
         <p:nvSpPr>
-          <p:cNvPr id="15" name="Shape 13"/>
-          <p:cNvSpPr/>
-          <p:nvPr/>
-        </p:nvSpPr>
-        <p:spPr>
-          <a:xfrm>
-            <a:off x="868680" y="3136392"/>
-            <a:ext cx="566928" cy="530352"/>
-          </a:xfrm>
-          <a:prstGeom prst="hexagon">
-            <a:avLst/>
+          <p:cNvPr id="29" name="Shape 27"/>
+          <p:cNvSpPr/>
+          <p:nvPr/>
+        </p:nvSpPr>
+        <p:spPr>
+          <a:xfrm>
+            <a:off x="6364224" y="2002536"/>
+            <a:ext cx="1051560" cy="457200"/>
+          </a:xfrm>
+          <a:prstGeom prst="roundRect">
+            <a:avLst>
+              <a:gd name="adj" fmla="val 20000"/>
+            </a:avLst>
           </a:prstGeom>
           <a:solidFill>
-            <a:srgbClr val="E8A400"/>
+            <a:srgbClr val="1E8A9E"/>
           </a:solidFill>
           <a:ln/>
         </p:spPr>
       </p:sp>
       <p:sp>
         <p:nvSpPr>
-          <p:cNvPr id="16" name="Text 14"/>
-          <p:cNvSpPr/>
-          <p:nvPr/>
-        </p:nvSpPr>
-        <p:spPr>
-          <a:xfrm>
-            <a:off x="868680" y="3136392"/>
-            <a:ext cx="566928" cy="530352"/>
+          <p:cNvPr id="30" name="Text 28"/>
+          <p:cNvSpPr/>
+          <p:nvPr/>
+        </p:nvSpPr>
+        <p:spPr>
+          <a:xfrm>
+            <a:off x="6364224" y="2002536"/>
+            <a:ext cx="1051560" cy="457200"/>
           </a:xfrm>
           <a:prstGeom prst="rect">
             <a:avLst/>
@@ -6720,7 +8115,7 @@
                 <a:ea typeface="Cambria" pitchFamily="34" charset="-122"/>
                 <a:cs typeface="Cambria" pitchFamily="34" charset="-120"/>
               </a:rPr>
-              <a:t>2</a:t>
+              <a:t>Q3</a:t>
             </a:r>
             <a:endParaRPr lang="en-US" sz="1800" dirty="0"/>
           </a:p>
@@ -6728,30 +8123,30 @@
       </p:sp>
       <p:sp>
         <p:nvSpPr>
-          <p:cNvPr id="17" name="Text 15"/>
-          <p:cNvSpPr/>
-          <p:nvPr/>
-        </p:nvSpPr>
-        <p:spPr>
-          <a:xfrm>
-            <a:off x="1600200" y="3063240"/>
-            <a:ext cx="4206240" cy="365760"/>
-          </a:xfrm>
-          <a:prstGeom prst="rect">
-            <a:avLst/>
-          </a:prstGeom>
-          <a:noFill/>
-          <a:ln/>
-        </p:spPr>
-        <p:txBody>
-          <a:bodyPr wrap="square" rtlCol="0" anchor="ctr"/>
-          <a:lstStyle/>
-          <a:p>
-            <a:pPr indent="0" marL="0">
-              <a:buNone/>
-            </a:pPr>
-            <a:r>
-              <a:rPr lang="en-US" sz="1500" b="1" dirty="0">
+          <p:cNvPr id="31" name="Text 29"/>
+          <p:cNvSpPr/>
+          <p:nvPr/>
+        </p:nvSpPr>
+        <p:spPr>
+          <a:xfrm>
+            <a:off x="7534656" y="2020824"/>
+            <a:ext cx="1097280" cy="420624"/>
+          </a:xfrm>
+          <a:prstGeom prst="rect">
+            <a:avLst/>
+          </a:prstGeom>
+          <a:noFill/>
+          <a:ln/>
+        </p:spPr>
+        <p:txBody>
+          <a:bodyPr wrap="square" lIns="0" tIns="0" rIns="0" bIns="0" rtlCol="0" anchor="ctr"/>
+          <a:lstStyle/>
+          <a:p>
+            <a:pPr indent="0" marL="0">
+              <a:buNone/>
+            </a:pPr>
+            <a:r>
+              <a:rPr lang="en-US" sz="1600" b="1" dirty="0">
                 <a:solidFill>
                   <a:srgbClr val="211D17"/>
                 </a:solidFill>
@@ -6759,65 +8154,281 @@
                 <a:ea typeface="Cambria" pitchFamily="34" charset="-122"/>
                 <a:cs typeface="Cambria" pitchFamily="34" charset="-120"/>
               </a:rPr>
-              <a:t>Parent auth</a:t>
-            </a:r>
-            <a:endParaRPr lang="en-US" sz="1500" dirty="0"/>
-          </a:p>
-        </p:txBody>
-      </p:sp>
-      <p:sp>
-        <p:nvSpPr>
-          <p:cNvPr id="18" name="Text 16"/>
-          <p:cNvSpPr/>
-          <p:nvPr/>
-        </p:nvSpPr>
-        <p:spPr>
-          <a:xfrm>
-            <a:off x="1600200" y="3410712"/>
-            <a:ext cx="4251960" cy="457200"/>
-          </a:xfrm>
-          <a:prstGeom prst="rect">
-            <a:avLst/>
-          </a:prstGeom>
-          <a:noFill/>
-          <a:ln/>
-        </p:spPr>
-        <p:txBody>
-          <a:bodyPr wrap="square" rtlCol="0" anchor="ctr"/>
-          <a:lstStyle/>
-          <a:p>
-            <a:pPr indent="0" marL="0">
-              <a:buNone/>
-            </a:pPr>
-            <a:r>
-              <a:rPr lang="en-US" sz="1150" dirty="0">
-                <a:solidFill>
-                  <a:srgbClr val="6A6153"/>
+              <a:t>Scale</a:t>
+            </a:r>
+            <a:endParaRPr lang="en-US" sz="1600" dirty="0"/>
+          </a:p>
+        </p:txBody>
+      </p:sp>
+      <p:sp>
+        <p:nvSpPr>
+          <p:cNvPr id="32" name="Shape 30"/>
+          <p:cNvSpPr/>
+          <p:nvPr/>
+        </p:nvSpPr>
+        <p:spPr>
+          <a:xfrm>
+            <a:off x="6419088" y="2715768"/>
+            <a:ext cx="91440" cy="91440"/>
+          </a:xfrm>
+          <a:prstGeom prst="ellipse">
+            <a:avLst/>
+          </a:prstGeom>
+          <a:solidFill>
+            <a:srgbClr val="1E8A9E"/>
+          </a:solidFill>
+          <a:ln/>
+        </p:spPr>
+      </p:sp>
+      <p:sp>
+        <p:nvSpPr>
+          <p:cNvPr id="33" name="Text 31"/>
+          <p:cNvSpPr/>
+          <p:nvPr/>
+        </p:nvSpPr>
+        <p:spPr>
+          <a:xfrm>
+            <a:off x="6620256" y="2606040"/>
+            <a:ext cx="1938528" cy="548640"/>
+          </a:xfrm>
+          <a:prstGeom prst="rect">
+            <a:avLst/>
+          </a:prstGeom>
+          <a:noFill/>
+          <a:ln/>
+        </p:spPr>
+        <p:txBody>
+          <a:bodyPr wrap="square" lIns="0" tIns="0" rIns="0" bIns="0" rtlCol="0" anchor="t"/>
+          <a:lstStyle/>
+          <a:p>
+            <a:pPr indent="0" marL="0">
+              <a:buNone/>
+            </a:pPr>
+            <a:r>
+              <a:rPr lang="en-US" sz="1100" dirty="0">
+                <a:solidFill>
+                  <a:srgbClr val="4A4238"/>
                 </a:solidFill>
                 <a:latin typeface="Calibri" pitchFamily="34" charset="0"/>
                 <a:ea typeface="Calibri" pitchFamily="34" charset="-122"/>
                 <a:cs typeface="Calibri" pitchFamily="34" charset="-120"/>
               </a:rPr>
-              <a:t>Supabase auth; migrate existing local users on first login</a:t>
-            </a:r>
-            <a:endParaRPr lang="en-US" sz="1150" dirty="0"/>
-          </a:p>
-        </p:txBody>
-      </p:sp>
-      <p:sp>
-        <p:nvSpPr>
-          <p:cNvPr id="19" name="Shape 17"/>
-          <p:cNvSpPr/>
-          <p:nvPr/>
-        </p:nvSpPr>
-        <p:spPr>
-          <a:xfrm>
-            <a:off x="6172200" y="2880360"/>
-            <a:ext cx="5303520" cy="1005840"/>
+              <a:t>Grow to ~15 coaches</a:t>
+            </a:r>
+            <a:endParaRPr lang="en-US" sz="1100" dirty="0"/>
+          </a:p>
+        </p:txBody>
+      </p:sp>
+      <p:sp>
+        <p:nvSpPr>
+          <p:cNvPr id="34" name="Shape 32"/>
+          <p:cNvSpPr/>
+          <p:nvPr/>
+        </p:nvSpPr>
+        <p:spPr>
+          <a:xfrm>
+            <a:off x="6419088" y="3282696"/>
+            <a:ext cx="91440" cy="91440"/>
+          </a:xfrm>
+          <a:prstGeom prst="ellipse">
+            <a:avLst/>
+          </a:prstGeom>
+          <a:solidFill>
+            <a:srgbClr val="1E8A9E"/>
+          </a:solidFill>
+          <a:ln/>
+        </p:spPr>
+      </p:sp>
+      <p:sp>
+        <p:nvSpPr>
+          <p:cNvPr id="35" name="Text 33"/>
+          <p:cNvSpPr/>
+          <p:nvPr/>
+        </p:nvSpPr>
+        <p:spPr>
+          <a:xfrm>
+            <a:off x="6620256" y="3172968"/>
+            <a:ext cx="1938528" cy="548640"/>
+          </a:xfrm>
+          <a:prstGeom prst="rect">
+            <a:avLst/>
+          </a:prstGeom>
+          <a:noFill/>
+          <a:ln/>
+        </p:spPr>
+        <p:txBody>
+          <a:bodyPr wrap="square" lIns="0" tIns="0" rIns="0" bIns="0" rtlCol="0" anchor="t"/>
+          <a:lstStyle/>
+          <a:p>
+            <a:pPr indent="0" marL="0">
+              <a:buNone/>
+            </a:pPr>
+            <a:r>
+              <a:rPr lang="en-US" sz="1100" dirty="0">
+                <a:solidFill>
+                  <a:srgbClr val="4A4238"/>
+                </a:solidFill>
+                <a:latin typeface="Calibri" pitchFamily="34" charset="0"/>
+                <a:ea typeface="Calibri" pitchFamily="34" charset="-122"/>
+                <a:cs typeface="Calibri" pitchFamily="34" charset="-120"/>
+              </a:rPr>
+              <a:t>SEO begins ranking</a:t>
+            </a:r>
+            <a:endParaRPr lang="en-US" sz="1100" dirty="0"/>
+          </a:p>
+        </p:txBody>
+      </p:sp>
+      <p:sp>
+        <p:nvSpPr>
+          <p:cNvPr id="36" name="Shape 34"/>
+          <p:cNvSpPr/>
+          <p:nvPr/>
+        </p:nvSpPr>
+        <p:spPr>
+          <a:xfrm>
+            <a:off x="6419088" y="3849624"/>
+            <a:ext cx="91440" cy="91440"/>
+          </a:xfrm>
+          <a:prstGeom prst="ellipse">
+            <a:avLst/>
+          </a:prstGeom>
+          <a:solidFill>
+            <a:srgbClr val="1E8A9E"/>
+          </a:solidFill>
+          <a:ln/>
+        </p:spPr>
+      </p:sp>
+      <p:sp>
+        <p:nvSpPr>
+          <p:cNvPr id="37" name="Text 35"/>
+          <p:cNvSpPr/>
+          <p:nvPr/>
+        </p:nvSpPr>
+        <p:spPr>
+          <a:xfrm>
+            <a:off x="6620256" y="3739896"/>
+            <a:ext cx="1938528" cy="548640"/>
+          </a:xfrm>
+          <a:prstGeom prst="rect">
+            <a:avLst/>
+          </a:prstGeom>
+          <a:noFill/>
+          <a:ln/>
+        </p:spPr>
+        <p:txBody>
+          <a:bodyPr wrap="square" lIns="0" tIns="0" rIns="0" bIns="0" rtlCol="0" anchor="t"/>
+          <a:lstStyle/>
+          <a:p>
+            <a:pPr indent="0" marL="0">
+              <a:buNone/>
+            </a:pPr>
+            <a:r>
+              <a:rPr lang="en-US" sz="1100" dirty="0">
+                <a:solidFill>
+                  <a:srgbClr val="4A4238"/>
+                </a:solidFill>
+                <a:latin typeface="Calibri" pitchFamily="34" charset="0"/>
+                <a:ea typeface="Calibri" pitchFamily="34" charset="-122"/>
+                <a:cs typeface="Calibri" pitchFamily="34" charset="-120"/>
+              </a:rPr>
+              <a:t>India PPP launch (Razorpay)</a:t>
+            </a:r>
+            <a:endParaRPr lang="en-US" sz="1100" dirty="0"/>
+          </a:p>
+        </p:txBody>
+      </p:sp>
+      <p:sp>
+        <p:nvSpPr>
+          <p:cNvPr id="38" name="Text 36"/>
+          <p:cNvSpPr/>
+          <p:nvPr/>
+        </p:nvSpPr>
+        <p:spPr>
+          <a:xfrm>
+            <a:off x="6364224" y="4480560"/>
+            <a:ext cx="2176272" cy="274320"/>
+          </a:xfrm>
+          <a:prstGeom prst="rect">
+            <a:avLst/>
+          </a:prstGeom>
+          <a:noFill/>
+          <a:ln/>
+        </p:spPr>
+        <p:txBody>
+          <a:bodyPr wrap="square" lIns="0" tIns="0" rIns="0" bIns="0" rtlCol="0" anchor="ctr"/>
+          <a:lstStyle/>
+          <a:p>
+            <a:pPr indent="0" marL="0">
+              <a:buNone/>
+            </a:pPr>
+            <a:r>
+              <a:rPr lang="en-US" sz="950" dirty="0">
+                <a:solidFill>
+                  <a:srgbClr val="6A6153"/>
+                </a:solidFill>
+                <a:latin typeface="Calibri" pitchFamily="34" charset="0"/>
+                <a:ea typeface="Calibri" pitchFamily="34" charset="-122"/>
+                <a:cs typeface="Calibri" pitchFamily="34" charset="-120"/>
+              </a:rPr>
+              <a:t>cumulative paying families</a:t>
+            </a:r>
+            <a:endParaRPr lang="en-US" sz="950" dirty="0"/>
+          </a:p>
+        </p:txBody>
+      </p:sp>
+      <p:sp>
+        <p:nvSpPr>
+          <p:cNvPr id="39" name="Text 37"/>
+          <p:cNvSpPr/>
+          <p:nvPr/>
+        </p:nvSpPr>
+        <p:spPr>
+          <a:xfrm>
+            <a:off x="6364224" y="4709160"/>
+            <a:ext cx="2176272" cy="457200"/>
+          </a:xfrm>
+          <a:prstGeom prst="rect">
+            <a:avLst/>
+          </a:prstGeom>
+          <a:noFill/>
+          <a:ln/>
+        </p:spPr>
+        <p:txBody>
+          <a:bodyPr wrap="square" lIns="0" tIns="0" rIns="0" bIns="0" rtlCol="0" anchor="ctr"/>
+          <a:lstStyle/>
+          <a:p>
+            <a:pPr indent="0" marL="0">
+              <a:buNone/>
+            </a:pPr>
+            <a:r>
+              <a:rPr lang="en-US" sz="2200" b="1" dirty="0">
+                <a:solidFill>
+                  <a:srgbClr val="1E8A9E"/>
+                </a:solidFill>
+                <a:latin typeface="Cambria" pitchFamily="34" charset="0"/>
+                <a:ea typeface="Cambria" pitchFamily="34" charset="-122"/>
+                <a:cs typeface="Cambria" pitchFamily="34" charset="-120"/>
+              </a:rPr>
+              <a:t>~550</a:t>
+            </a:r>
+            <a:endParaRPr lang="en-US" sz="2200" dirty="0"/>
+          </a:p>
+        </p:txBody>
+      </p:sp>
+      <p:sp>
+        <p:nvSpPr>
+          <p:cNvPr id="40" name="Shape 38"/>
+          <p:cNvSpPr/>
+          <p:nvPr/>
+        </p:nvSpPr>
+        <p:spPr>
+          <a:xfrm>
+            <a:off x="8924544" y="1783080"/>
+            <a:ext cx="2578608" cy="3429000"/>
           </a:xfrm>
           <a:prstGeom prst="roundRect">
             <a:avLst>
-              <a:gd name="adj" fmla="val 8182"/>
+              <a:gd name="adj" fmla="val 3191"/>
             </a:avLst>
           </a:prstGeom>
           <a:solidFill>
@@ -6835,34 +8446,36 @@
       </p:sp>
       <p:sp>
         <p:nvSpPr>
-          <p:cNvPr id="20" name="Shape 18"/>
-          <p:cNvSpPr/>
-          <p:nvPr/>
-        </p:nvSpPr>
-        <p:spPr>
-          <a:xfrm>
-            <a:off x="6400800" y="3136392"/>
-            <a:ext cx="566928" cy="530352"/>
-          </a:xfrm>
-          <a:prstGeom prst="hexagon">
-            <a:avLst/>
+          <p:cNvPr id="41" name="Shape 39"/>
+          <p:cNvSpPr/>
+          <p:nvPr/>
+        </p:nvSpPr>
+        <p:spPr>
+          <a:xfrm>
+            <a:off x="9125712" y="2002536"/>
+            <a:ext cx="1051560" cy="457200"/>
+          </a:xfrm>
+          <a:prstGeom prst="roundRect">
+            <a:avLst>
+              <a:gd name="adj" fmla="val 20000"/>
+            </a:avLst>
           </a:prstGeom>
           <a:solidFill>
-            <a:srgbClr val="E8A400"/>
+            <a:srgbClr val="2E9E63"/>
           </a:solidFill>
           <a:ln/>
         </p:spPr>
       </p:sp>
       <p:sp>
         <p:nvSpPr>
-          <p:cNvPr id="21" name="Text 19"/>
-          <p:cNvSpPr/>
-          <p:nvPr/>
-        </p:nvSpPr>
-        <p:spPr>
-          <a:xfrm>
-            <a:off x="6400800" y="3136392"/>
-            <a:ext cx="566928" cy="530352"/>
+          <p:cNvPr id="42" name="Text 40"/>
+          <p:cNvSpPr/>
+          <p:nvPr/>
+        </p:nvSpPr>
+        <p:spPr>
+          <a:xfrm>
+            <a:off x="9125712" y="2002536"/>
+            <a:ext cx="1051560" cy="457200"/>
           </a:xfrm>
           <a:prstGeom prst="rect">
             <a:avLst/>
@@ -6886,7 +8499,7 @@
                 <a:ea typeface="Cambria" pitchFamily="34" charset="-122"/>
                 <a:cs typeface="Cambria" pitchFamily="34" charset="-120"/>
               </a:rPr>
-              <a:t>3</a:t>
+              <a:t>Q4</a:t>
             </a:r>
             <a:endParaRPr lang="en-US" sz="1800" dirty="0"/>
           </a:p>
@@ -6894,30 +8507,30 @@
       </p:sp>
       <p:sp>
         <p:nvSpPr>
-          <p:cNvPr id="22" name="Text 20"/>
-          <p:cNvSpPr/>
-          <p:nvPr/>
-        </p:nvSpPr>
-        <p:spPr>
-          <a:xfrm>
-            <a:off x="7132320" y="3063240"/>
-            <a:ext cx="4206240" cy="365760"/>
-          </a:xfrm>
-          <a:prstGeom prst="rect">
-            <a:avLst/>
-          </a:prstGeom>
-          <a:noFill/>
-          <a:ln/>
-        </p:spPr>
-        <p:txBody>
-          <a:bodyPr wrap="square" rtlCol="0" anchor="ctr"/>
-          <a:lstStyle/>
-          <a:p>
-            <a:pPr indent="0" marL="0">
-              <a:buNone/>
-            </a:pPr>
-            <a:r>
-              <a:rPr lang="en-US" sz="1500" b="1" dirty="0">
+          <p:cNvPr id="43" name="Text 41"/>
+          <p:cNvSpPr/>
+          <p:nvPr/>
+        </p:nvSpPr>
+        <p:spPr>
+          <a:xfrm>
+            <a:off x="10296144" y="2020824"/>
+            <a:ext cx="1097280" cy="420624"/>
+          </a:xfrm>
+          <a:prstGeom prst="rect">
+            <a:avLst/>
+          </a:prstGeom>
+          <a:noFill/>
+          <a:ln/>
+        </p:spPr>
+        <p:txBody>
+          <a:bodyPr wrap="square" lIns="0" tIns="0" rIns="0" bIns="0" rtlCol="0" anchor="ctr"/>
+          <a:lstStyle/>
+          <a:p>
+            <a:pPr indent="0" marL="0">
+              <a:buNone/>
+            </a:pPr>
+            <a:r>
+              <a:rPr lang="en-US" sz="1600" b="1" dirty="0">
                 <a:solidFill>
                   <a:srgbClr val="211D17"/>
                 </a:solidFill>
@@ -6925,71 +8538,292 @@
                 <a:ea typeface="Cambria" pitchFamily="34" charset="-122"/>
                 <a:cs typeface="Cambria" pitchFamily="34" charset="-120"/>
               </a:rPr>
-              <a:t>Cloud sync</a:t>
-            </a:r>
-            <a:endParaRPr lang="en-US" sz="1500" dirty="0"/>
-          </a:p>
-        </p:txBody>
-      </p:sp>
-      <p:sp>
-        <p:nvSpPr>
-          <p:cNvPr id="23" name="Text 21"/>
-          <p:cNvSpPr/>
-          <p:nvPr/>
-        </p:nvSpPr>
-        <p:spPr>
-          <a:xfrm>
-            <a:off x="7132320" y="3410712"/>
-            <a:ext cx="4251960" cy="457200"/>
-          </a:xfrm>
-          <a:prstGeom prst="rect">
-            <a:avLst/>
-          </a:prstGeom>
-          <a:noFill/>
-          <a:ln/>
-        </p:spPr>
-        <p:txBody>
-          <a:bodyPr wrap="square" rtlCol="0" anchor="ctr"/>
-          <a:lstStyle/>
-          <a:p>
-            <a:pPr indent="0" marL="0">
-              <a:buNone/>
-            </a:pPr>
-            <a:r>
-              <a:rPr lang="en-US" sz="1150" dirty="0">
-                <a:solidFill>
-                  <a:srgbClr val="6A6153"/>
+              <a:t>Compound</a:t>
+            </a:r>
+            <a:endParaRPr lang="en-US" sz="1600" dirty="0"/>
+          </a:p>
+        </p:txBody>
+      </p:sp>
+      <p:sp>
+        <p:nvSpPr>
+          <p:cNvPr id="44" name="Shape 42"/>
+          <p:cNvSpPr/>
+          <p:nvPr/>
+        </p:nvSpPr>
+        <p:spPr>
+          <a:xfrm>
+            <a:off x="9180576" y="2715768"/>
+            <a:ext cx="91440" cy="91440"/>
+          </a:xfrm>
+          <a:prstGeom prst="ellipse">
+            <a:avLst/>
+          </a:prstGeom>
+          <a:solidFill>
+            <a:srgbClr val="2E9E63"/>
+          </a:solidFill>
+          <a:ln/>
+        </p:spPr>
+      </p:sp>
+      <p:sp>
+        <p:nvSpPr>
+          <p:cNvPr id="45" name="Text 43"/>
+          <p:cNvSpPr/>
+          <p:nvPr/>
+        </p:nvSpPr>
+        <p:spPr>
+          <a:xfrm>
+            <a:off x="9381744" y="2606040"/>
+            <a:ext cx="1938528" cy="548640"/>
+          </a:xfrm>
+          <a:prstGeom prst="rect">
+            <a:avLst/>
+          </a:prstGeom>
+          <a:noFill/>
+          <a:ln/>
+        </p:spPr>
+        <p:txBody>
+          <a:bodyPr wrap="square" lIns="0" tIns="0" rIns="0" bIns="0" rtlCol="0" anchor="t"/>
+          <a:lstStyle/>
+          <a:p>
+            <a:pPr indent="0" marL="0">
+              <a:buNone/>
+            </a:pPr>
+            <a:r>
+              <a:rPr lang="en-US" sz="1100" dirty="0">
+                <a:solidFill>
+                  <a:srgbClr val="4A4238"/>
                 </a:solidFill>
                 <a:latin typeface="Calibri" pitchFamily="34" charset="0"/>
                 <a:ea typeface="Calibri" pitchFamily="34" charset="-122"/>
                 <a:cs typeface="Calibri" pitchFamily="34" charset="-120"/>
               </a:rPr>
-              <a:t>RLS per family; activity log feeding the weekly aggregation</a:t>
-            </a:r>
-            <a:endParaRPr lang="en-US" sz="1150" dirty="0"/>
-          </a:p>
-        </p:txBody>
-      </p:sp>
-      <p:sp>
-        <p:nvSpPr>
-          <p:cNvPr id="24" name="Shape 22"/>
-          <p:cNvSpPr/>
-          <p:nvPr/>
-        </p:nvSpPr>
-        <p:spPr>
-          <a:xfrm>
-            <a:off x="640080" y="4023360"/>
-            <a:ext cx="5303520" cy="1005840"/>
+              <a:t>Paid retargeting on warm traffic</a:t>
+            </a:r>
+            <a:endParaRPr lang="en-US" sz="1100" dirty="0"/>
+          </a:p>
+        </p:txBody>
+      </p:sp>
+      <p:sp>
+        <p:nvSpPr>
+          <p:cNvPr id="46" name="Shape 44"/>
+          <p:cNvSpPr/>
+          <p:nvPr/>
+        </p:nvSpPr>
+        <p:spPr>
+          <a:xfrm>
+            <a:off x="9180576" y="3282696"/>
+            <a:ext cx="91440" cy="91440"/>
+          </a:xfrm>
+          <a:prstGeom prst="ellipse">
+            <a:avLst/>
+          </a:prstGeom>
+          <a:solidFill>
+            <a:srgbClr val="2E9E63"/>
+          </a:solidFill>
+          <a:ln/>
+        </p:spPr>
+      </p:sp>
+      <p:sp>
+        <p:nvSpPr>
+          <p:cNvPr id="47" name="Text 45"/>
+          <p:cNvSpPr/>
+          <p:nvPr/>
+        </p:nvSpPr>
+        <p:spPr>
+          <a:xfrm>
+            <a:off x="9381744" y="3172968"/>
+            <a:ext cx="1938528" cy="548640"/>
+          </a:xfrm>
+          <a:prstGeom prst="rect">
+            <a:avLst/>
+          </a:prstGeom>
+          <a:noFill/>
+          <a:ln/>
+        </p:spPr>
+        <p:txBody>
+          <a:bodyPr wrap="square" lIns="0" tIns="0" rIns="0" bIns="0" rtlCol="0" anchor="t"/>
+          <a:lstStyle/>
+          <a:p>
+            <a:pPr indent="0" marL="0">
+              <a:buNone/>
+            </a:pPr>
+            <a:r>
+              <a:rPr lang="en-US" sz="1100" dirty="0">
+                <a:solidFill>
+                  <a:srgbClr val="4A4238"/>
+                </a:solidFill>
+                <a:latin typeface="Calibri" pitchFamily="34" charset="0"/>
+                <a:ea typeface="Calibri" pitchFamily="34" charset="-122"/>
+                <a:cs typeface="Calibri" pitchFamily="34" charset="-120"/>
+              </a:rPr>
+              <a:t>Annual / renewal push</a:t>
+            </a:r>
+            <a:endParaRPr lang="en-US" sz="1100" dirty="0"/>
+          </a:p>
+        </p:txBody>
+      </p:sp>
+      <p:sp>
+        <p:nvSpPr>
+          <p:cNvPr id="48" name="Shape 46"/>
+          <p:cNvSpPr/>
+          <p:nvPr/>
+        </p:nvSpPr>
+        <p:spPr>
+          <a:xfrm>
+            <a:off x="9180576" y="3849624"/>
+            <a:ext cx="91440" cy="91440"/>
+          </a:xfrm>
+          <a:prstGeom prst="ellipse">
+            <a:avLst/>
+          </a:prstGeom>
+          <a:solidFill>
+            <a:srgbClr val="2E9E63"/>
+          </a:solidFill>
+          <a:ln/>
+        </p:spPr>
+      </p:sp>
+      <p:sp>
+        <p:nvSpPr>
+          <p:cNvPr id="49" name="Text 47"/>
+          <p:cNvSpPr/>
+          <p:nvPr/>
+        </p:nvSpPr>
+        <p:spPr>
+          <a:xfrm>
+            <a:off x="9381744" y="3739896"/>
+            <a:ext cx="1938528" cy="548640"/>
+          </a:xfrm>
+          <a:prstGeom prst="rect">
+            <a:avLst/>
+          </a:prstGeom>
+          <a:noFill/>
+          <a:ln/>
+        </p:spPr>
+        <p:txBody>
+          <a:bodyPr wrap="square" lIns="0" tIns="0" rIns="0" bIns="0" rtlCol="0" anchor="t"/>
+          <a:lstStyle/>
+          <a:p>
+            <a:pPr indent="0" marL="0">
+              <a:buNone/>
+            </a:pPr>
+            <a:r>
+              <a:rPr lang="en-US" sz="1100" dirty="0">
+                <a:solidFill>
+                  <a:srgbClr val="4A4238"/>
+                </a:solidFill>
+                <a:latin typeface="Calibri" pitchFamily="34" charset="0"/>
+                <a:ea typeface="Calibri" pitchFamily="34" charset="-122"/>
+                <a:cs typeface="Calibri" pitchFamily="34" charset="-120"/>
+              </a:rPr>
+              <a:t>SE Asia opens</a:t>
+            </a:r>
+            <a:endParaRPr lang="en-US" sz="1100" dirty="0"/>
+          </a:p>
+        </p:txBody>
+      </p:sp>
+      <p:sp>
+        <p:nvSpPr>
+          <p:cNvPr id="50" name="Text 48"/>
+          <p:cNvSpPr/>
+          <p:nvPr/>
+        </p:nvSpPr>
+        <p:spPr>
+          <a:xfrm>
+            <a:off x="9125712" y="4480560"/>
+            <a:ext cx="2176272" cy="274320"/>
+          </a:xfrm>
+          <a:prstGeom prst="rect">
+            <a:avLst/>
+          </a:prstGeom>
+          <a:noFill/>
+          <a:ln/>
+        </p:spPr>
+        <p:txBody>
+          <a:bodyPr wrap="square" lIns="0" tIns="0" rIns="0" bIns="0" rtlCol="0" anchor="ctr"/>
+          <a:lstStyle/>
+          <a:p>
+            <a:pPr indent="0" marL="0">
+              <a:buNone/>
+            </a:pPr>
+            <a:r>
+              <a:rPr lang="en-US" sz="950" dirty="0">
+                <a:solidFill>
+                  <a:srgbClr val="6A6153"/>
+                </a:solidFill>
+                <a:latin typeface="Calibri" pitchFamily="34" charset="0"/>
+                <a:ea typeface="Calibri" pitchFamily="34" charset="-122"/>
+                <a:cs typeface="Calibri" pitchFamily="34" charset="-120"/>
+              </a:rPr>
+              <a:t>cumulative paying families</a:t>
+            </a:r>
+            <a:endParaRPr lang="en-US" sz="950" dirty="0"/>
+          </a:p>
+        </p:txBody>
+      </p:sp>
+      <p:sp>
+        <p:nvSpPr>
+          <p:cNvPr id="51" name="Text 49"/>
+          <p:cNvSpPr/>
+          <p:nvPr/>
+        </p:nvSpPr>
+        <p:spPr>
+          <a:xfrm>
+            <a:off x="9125712" y="4709160"/>
+            <a:ext cx="2176272" cy="457200"/>
+          </a:xfrm>
+          <a:prstGeom prst="rect">
+            <a:avLst/>
+          </a:prstGeom>
+          <a:noFill/>
+          <a:ln/>
+        </p:spPr>
+        <p:txBody>
+          <a:bodyPr wrap="square" lIns="0" tIns="0" rIns="0" bIns="0" rtlCol="0" anchor="ctr"/>
+          <a:lstStyle/>
+          <a:p>
+            <a:pPr indent="0" marL="0">
+              <a:buNone/>
+            </a:pPr>
+            <a:r>
+              <a:rPr lang="en-US" sz="2200" b="1" dirty="0">
+                <a:solidFill>
+                  <a:srgbClr val="2E9E63"/>
+                </a:solidFill>
+                <a:latin typeface="Cambria" pitchFamily="34" charset="0"/>
+                <a:ea typeface="Cambria" pitchFamily="34" charset="-122"/>
+                <a:cs typeface="Cambria" pitchFamily="34" charset="-120"/>
+              </a:rPr>
+              <a:t>~800–1,000</a:t>
+            </a:r>
+            <a:endParaRPr lang="en-US" sz="2200" dirty="0"/>
+          </a:p>
+        </p:txBody>
+      </p:sp>
+      <p:sp>
+        <p:nvSpPr>
+          <p:cNvPr id="52" name="Shape 50"/>
+          <p:cNvSpPr/>
+          <p:nvPr/>
+        </p:nvSpPr>
+        <p:spPr>
+          <a:xfrm>
+            <a:off x="640080" y="5440680"/>
+            <a:ext cx="10911535" cy="914400"/>
           </a:xfrm>
           <a:prstGeom prst="roundRect">
             <a:avLst>
-              <a:gd name="adj" fmla="val 8182"/>
+              <a:gd name="adj" fmla="val 9000"/>
             </a:avLst>
           </a:prstGeom>
           <a:solidFill>
-            <a:srgbClr val="FFFFFF"/>
+            <a:srgbClr val="FBEFCF"/>
           </a:solidFill>
-          <a:ln/>
+          <a:ln w="12700">
+            <a:solidFill>
+              <a:srgbClr val="E8A400"/>
+            </a:solidFill>
+            <a:prstDash val="solid"/>
+          </a:ln>
           <a:effectLst>
             <a:outerShdw sx="100000" sy="100000" kx="0" ky="0" algn="bl" rotWithShape="0" blurRad="114300" dist="38100" dir="5400000">
               <a:srgbClr val="D8CFBE">
@@ -7001,509 +8835,79 @@
       </p:sp>
       <p:sp>
         <p:nvSpPr>
-          <p:cNvPr id="25" name="Shape 23"/>
-          <p:cNvSpPr/>
-          <p:nvPr/>
-        </p:nvSpPr>
-        <p:spPr>
-          <a:xfrm>
-            <a:off x="868680" y="4279392"/>
-            <a:ext cx="566928" cy="530352"/>
-          </a:xfrm>
-          <a:prstGeom prst="hexagon">
-            <a:avLst/>
-          </a:prstGeom>
-          <a:solidFill>
-            <a:srgbClr val="E8A400"/>
-          </a:solidFill>
-          <a:ln/>
-        </p:spPr>
-      </p:sp>
-      <p:sp>
-        <p:nvSpPr>
-          <p:cNvPr id="26" name="Text 24"/>
-          <p:cNvSpPr/>
-          <p:nvPr/>
-        </p:nvSpPr>
-        <p:spPr>
-          <a:xfrm>
-            <a:off x="868680" y="4279392"/>
-            <a:ext cx="566928" cy="530352"/>
-          </a:xfrm>
-          <a:prstGeom prst="rect">
-            <a:avLst/>
-          </a:prstGeom>
-          <a:noFill/>
-          <a:ln/>
-        </p:spPr>
-        <p:txBody>
-          <a:bodyPr wrap="square" lIns="0" tIns="0" rIns="0" bIns="0" rtlCol="0" anchor="ctr"/>
-          <a:lstStyle/>
-          <a:p>
-            <a:pPr algn="ctr" indent="0" marL="0">
-              <a:buNone/>
-            </a:pPr>
-            <a:r>
-              <a:rPr lang="en-US" sz="1800" b="1" dirty="0">
-                <a:solidFill>
-                  <a:srgbClr val="FFFFFF"/>
+          <p:cNvPr id="53" name="Text 51"/>
+          <p:cNvSpPr/>
+          <p:nvPr/>
+        </p:nvSpPr>
+        <p:spPr>
+          <a:xfrm>
+            <a:off x="914400" y="5559552"/>
+            <a:ext cx="2743200" cy="320040"/>
+          </a:xfrm>
+          <a:prstGeom prst="rect">
+            <a:avLst/>
+          </a:prstGeom>
+          <a:noFill/>
+          <a:ln/>
+        </p:spPr>
+        <p:txBody>
+          <a:bodyPr wrap="square" rtlCol="0" anchor="ctr"/>
+          <a:lstStyle/>
+          <a:p>
+            <a:pPr indent="0" marL="0">
+              <a:buNone/>
+            </a:pPr>
+            <a:r>
+              <a:rPr lang="en-US" sz="1300" b="1" dirty="0">
+                <a:solidFill>
+                  <a:srgbClr val="B67B00"/>
                 </a:solidFill>
                 <a:latin typeface="Cambria" pitchFamily="34" charset="0"/>
                 <a:ea typeface="Cambria" pitchFamily="34" charset="-122"/>
                 <a:cs typeface="Cambria" pitchFamily="34" charset="-120"/>
               </a:rPr>
-              <a:t>4</a:t>
-            </a:r>
-            <a:endParaRPr lang="en-US" sz="1800" dirty="0"/>
-          </a:p>
-        </p:txBody>
-      </p:sp>
-      <p:sp>
-        <p:nvSpPr>
-          <p:cNvPr id="27" name="Text 25"/>
-          <p:cNvSpPr/>
-          <p:nvPr/>
-        </p:nvSpPr>
-        <p:spPr>
-          <a:xfrm>
-            <a:off x="1600200" y="4206240"/>
-            <a:ext cx="4206240" cy="365760"/>
-          </a:xfrm>
-          <a:prstGeom prst="rect">
-            <a:avLst/>
-          </a:prstGeom>
-          <a:noFill/>
-          <a:ln/>
-        </p:spPr>
-        <p:txBody>
-          <a:bodyPr wrap="square" rtlCol="0" anchor="ctr"/>
-          <a:lstStyle/>
-          <a:p>
-            <a:pPr indent="0" marL="0">
-              <a:buNone/>
-            </a:pPr>
-            <a:r>
-              <a:rPr lang="en-US" sz="1500" b="1" dirty="0">
+              <a:t>Blended CAC trend</a:t>
+            </a:r>
+            <a:endParaRPr lang="en-US" sz="1300" dirty="0"/>
+          </a:p>
+        </p:txBody>
+      </p:sp>
+      <p:sp>
+        <p:nvSpPr>
+          <p:cNvPr id="54" name="Text 52"/>
+          <p:cNvSpPr/>
+          <p:nvPr/>
+        </p:nvSpPr>
+        <p:spPr>
+          <a:xfrm>
+            <a:off x="914400" y="5870448"/>
+            <a:ext cx="10362895" cy="411480"/>
+          </a:xfrm>
+          <a:prstGeom prst="rect">
+            <a:avLst/>
+          </a:prstGeom>
+          <a:noFill/>
+          <a:ln/>
+        </p:spPr>
+        <p:txBody>
+          <a:bodyPr wrap="square" lIns="0" tIns="0" rIns="0" bIns="0" rtlCol="0" anchor="ctr"/>
+          <a:lstStyle/>
+          <a:p>
+            <a:pPr indent="0" marL="0">
+              <a:buNone/>
+            </a:pPr>
+            <a:r>
+              <a:rPr lang="en-US" sz="1350" dirty="0">
                 <a:solidFill>
                   <a:srgbClr val="211D17"/>
-                </a:solidFill>
-                <a:latin typeface="Cambria" pitchFamily="34" charset="0"/>
-                <a:ea typeface="Cambria" pitchFamily="34" charset="-122"/>
-                <a:cs typeface="Cambria" pitchFamily="34" charset="-120"/>
-              </a:rPr>
-              <a:t>Payments</a:t>
-            </a:r>
-            <a:endParaRPr lang="en-US" sz="1500" dirty="0"/>
-          </a:p>
-        </p:txBody>
-      </p:sp>
-      <p:sp>
-        <p:nvSpPr>
-          <p:cNvPr id="28" name="Text 26"/>
-          <p:cNvSpPr/>
-          <p:nvPr/>
-        </p:nvSpPr>
-        <p:spPr>
-          <a:xfrm>
-            <a:off x="1600200" y="4553712"/>
-            <a:ext cx="4251960" cy="457200"/>
-          </a:xfrm>
-          <a:prstGeom prst="rect">
-            <a:avLst/>
-          </a:prstGeom>
-          <a:noFill/>
-          <a:ln/>
-        </p:spPr>
-        <p:txBody>
-          <a:bodyPr wrap="square" rtlCol="0" anchor="ctr"/>
-          <a:lstStyle/>
-          <a:p>
-            <a:pPr indent="0" marL="0">
-              <a:buNone/>
-            </a:pPr>
-            <a:r>
-              <a:rPr lang="en-US" sz="1150" dirty="0">
-                <a:solidFill>
-                  <a:srgbClr val="6A6153"/>
                 </a:solidFill>
                 <a:latin typeface="Calibri" pitchFamily="34" charset="0"/>
                 <a:ea typeface="Calibri" pitchFamily="34" charset="-122"/>
                 <a:cs typeface="Calibri" pitchFamily="34" charset="-120"/>
               </a:rPr>
-              <a:t>Stripe + Razorpay entitlements, server-authoritative gate</a:t>
-            </a:r>
-            <a:endParaRPr lang="en-US" sz="1150" dirty="0"/>
-          </a:p>
-        </p:txBody>
-      </p:sp>
-      <p:sp>
-        <p:nvSpPr>
-          <p:cNvPr id="29" name="Shape 27"/>
-          <p:cNvSpPr/>
-          <p:nvPr/>
-        </p:nvSpPr>
-        <p:spPr>
-          <a:xfrm>
-            <a:off x="6172200" y="4023360"/>
-            <a:ext cx="5303520" cy="1005840"/>
-          </a:xfrm>
-          <a:prstGeom prst="roundRect">
-            <a:avLst>
-              <a:gd name="adj" fmla="val 8182"/>
-            </a:avLst>
-          </a:prstGeom>
-          <a:solidFill>
-            <a:srgbClr val="FFFFFF"/>
-          </a:solidFill>
-          <a:ln/>
-          <a:effectLst>
-            <a:outerShdw sx="100000" sy="100000" kx="0" ky="0" algn="bl" rotWithShape="0" blurRad="114300" dist="38100" dir="5400000">
-              <a:srgbClr val="D8CFBE">
-                <a:alpha val="50000"/>
-              </a:srgbClr>
-            </a:outerShdw>
-          </a:effectLst>
-        </p:spPr>
-      </p:sp>
-      <p:sp>
-        <p:nvSpPr>
-          <p:cNvPr id="30" name="Shape 28"/>
-          <p:cNvSpPr/>
-          <p:nvPr/>
-        </p:nvSpPr>
-        <p:spPr>
-          <a:xfrm>
-            <a:off x="6400800" y="4279392"/>
-            <a:ext cx="566928" cy="530352"/>
-          </a:xfrm>
-          <a:prstGeom prst="hexagon">
-            <a:avLst/>
-          </a:prstGeom>
-          <a:solidFill>
-            <a:srgbClr val="E8A400"/>
-          </a:solidFill>
-          <a:ln/>
-        </p:spPr>
-      </p:sp>
-      <p:sp>
-        <p:nvSpPr>
-          <p:cNvPr id="31" name="Text 29"/>
-          <p:cNvSpPr/>
-          <p:nvPr/>
-        </p:nvSpPr>
-        <p:spPr>
-          <a:xfrm>
-            <a:off x="6400800" y="4279392"/>
-            <a:ext cx="566928" cy="530352"/>
-          </a:xfrm>
-          <a:prstGeom prst="rect">
-            <a:avLst/>
-          </a:prstGeom>
-          <a:noFill/>
-          <a:ln/>
-        </p:spPr>
-        <p:txBody>
-          <a:bodyPr wrap="square" lIns="0" tIns="0" rIns="0" bIns="0" rtlCol="0" anchor="ctr"/>
-          <a:lstStyle/>
-          <a:p>
-            <a:pPr algn="ctr" indent="0" marL="0">
-              <a:buNone/>
-            </a:pPr>
-            <a:r>
-              <a:rPr lang="en-US" sz="1800" b="1" dirty="0">
-                <a:solidFill>
-                  <a:srgbClr val="FFFFFF"/>
-                </a:solidFill>
-                <a:latin typeface="Cambria" pitchFamily="34" charset="0"/>
-                <a:ea typeface="Cambria" pitchFamily="34" charset="-122"/>
-                <a:cs typeface="Cambria" pitchFamily="34" charset="-120"/>
-              </a:rPr>
-              <a:t>5</a:t>
-            </a:r>
-            <a:endParaRPr lang="en-US" sz="1800" dirty="0"/>
-          </a:p>
-        </p:txBody>
-      </p:sp>
-      <p:sp>
-        <p:nvSpPr>
-          <p:cNvPr id="32" name="Text 30"/>
-          <p:cNvSpPr/>
-          <p:nvPr/>
-        </p:nvSpPr>
-        <p:spPr>
-          <a:xfrm>
-            <a:off x="7132320" y="4206240"/>
-            <a:ext cx="4206240" cy="365760"/>
-          </a:xfrm>
-          <a:prstGeom prst="rect">
-            <a:avLst/>
-          </a:prstGeom>
-          <a:noFill/>
-          <a:ln/>
-        </p:spPr>
-        <p:txBody>
-          <a:bodyPr wrap="square" rtlCol="0" anchor="ctr"/>
-          <a:lstStyle/>
-          <a:p>
-            <a:pPr indent="0" marL="0">
-              <a:buNone/>
-            </a:pPr>
-            <a:r>
-              <a:rPr lang="en-US" sz="1500" b="1" dirty="0">
-                <a:solidFill>
-                  <a:srgbClr val="211D17"/>
-                </a:solidFill>
-                <a:latin typeface="Cambria" pitchFamily="34" charset="0"/>
-                <a:ea typeface="Cambria" pitchFamily="34" charset="-122"/>
-                <a:cs typeface="Cambria" pitchFamily="34" charset="-120"/>
-              </a:rPr>
-              <a:t>CRM loop</a:t>
-            </a:r>
-            <a:endParaRPr lang="en-US" sz="1500" dirty="0"/>
-          </a:p>
-        </p:txBody>
-      </p:sp>
-      <p:sp>
-        <p:nvSpPr>
-          <p:cNvPr id="33" name="Text 31"/>
-          <p:cNvSpPr/>
-          <p:nvPr/>
-        </p:nvSpPr>
-        <p:spPr>
-          <a:xfrm>
-            <a:off x="7132320" y="4553712"/>
-            <a:ext cx="4251960" cy="457200"/>
-          </a:xfrm>
-          <a:prstGeom prst="rect">
-            <a:avLst/>
-          </a:prstGeom>
-          <a:noFill/>
-          <a:ln/>
-        </p:spPr>
-        <p:txBody>
-          <a:bodyPr wrap="square" rtlCol="0" anchor="ctr"/>
-          <a:lstStyle/>
-          <a:p>
-            <a:pPr indent="0" marL="0">
-              <a:buNone/>
-            </a:pPr>
-            <a:r>
-              <a:rPr lang="en-US" sz="1150" dirty="0">
-                <a:solidFill>
-                  <a:srgbClr val="6A6153"/>
-                </a:solidFill>
-                <a:latin typeface="Calibri" pitchFamily="34" charset="0"/>
-                <a:ea typeface="Calibri" pitchFamily="34" charset="-122"/>
-                <a:cs typeface="Calibri" pitchFamily="34" charset="-120"/>
-              </a:rPr>
-              <a:t>Resend progress email + Loops onboarding journey</a:t>
-            </a:r>
-            <a:endParaRPr lang="en-US" sz="1150" dirty="0"/>
-          </a:p>
-        </p:txBody>
-      </p:sp>
-      <p:sp>
-        <p:nvSpPr>
-          <p:cNvPr id="34" name="Shape 32"/>
-          <p:cNvSpPr/>
-          <p:nvPr/>
-        </p:nvSpPr>
-        <p:spPr>
-          <a:xfrm>
-            <a:off x="640080" y="5166360"/>
-            <a:ext cx="5303520" cy="1005840"/>
-          </a:xfrm>
-          <a:prstGeom prst="roundRect">
-            <a:avLst>
-              <a:gd name="adj" fmla="val 8182"/>
-            </a:avLst>
-          </a:prstGeom>
-          <a:solidFill>
-            <a:srgbClr val="FFFFFF"/>
-          </a:solidFill>
-          <a:ln/>
-          <a:effectLst>
-            <a:outerShdw sx="100000" sy="100000" kx="0" ky="0" algn="bl" rotWithShape="0" blurRad="114300" dist="38100" dir="5400000">
-              <a:srgbClr val="D8CFBE">
-                <a:alpha val="50000"/>
-              </a:srgbClr>
-            </a:outerShdw>
-          </a:effectLst>
-        </p:spPr>
-      </p:sp>
-      <p:sp>
-        <p:nvSpPr>
-          <p:cNvPr id="35" name="Shape 33"/>
-          <p:cNvSpPr/>
-          <p:nvPr/>
-        </p:nvSpPr>
-        <p:spPr>
-          <a:xfrm>
-            <a:off x="868680" y="5422392"/>
-            <a:ext cx="566928" cy="530352"/>
-          </a:xfrm>
-          <a:prstGeom prst="hexagon">
-            <a:avLst/>
-          </a:prstGeom>
-          <a:solidFill>
-            <a:srgbClr val="E8A400"/>
-          </a:solidFill>
-          <a:ln/>
-        </p:spPr>
-      </p:sp>
-      <p:sp>
-        <p:nvSpPr>
-          <p:cNvPr id="36" name="Text 34"/>
-          <p:cNvSpPr/>
-          <p:nvPr/>
-        </p:nvSpPr>
-        <p:spPr>
-          <a:xfrm>
-            <a:off x="868680" y="5422392"/>
-            <a:ext cx="566928" cy="530352"/>
-          </a:xfrm>
-          <a:prstGeom prst="rect">
-            <a:avLst/>
-          </a:prstGeom>
-          <a:noFill/>
-          <a:ln/>
-        </p:spPr>
-        <p:txBody>
-          <a:bodyPr wrap="square" lIns="0" tIns="0" rIns="0" bIns="0" rtlCol="0" anchor="ctr"/>
-          <a:lstStyle/>
-          <a:p>
-            <a:pPr algn="ctr" indent="0" marL="0">
-              <a:buNone/>
-            </a:pPr>
-            <a:r>
-              <a:rPr lang="en-US" sz="1800" b="1" dirty="0">
-                <a:solidFill>
-                  <a:srgbClr val="FFFFFF"/>
-                </a:solidFill>
-                <a:latin typeface="Cambria" pitchFamily="34" charset="0"/>
-                <a:ea typeface="Cambria" pitchFamily="34" charset="-122"/>
-                <a:cs typeface="Cambria" pitchFamily="34" charset="-120"/>
-              </a:rPr>
-              <a:t>6</a:t>
-            </a:r>
-            <a:endParaRPr lang="en-US" sz="1800" dirty="0"/>
-          </a:p>
-        </p:txBody>
-      </p:sp>
-      <p:sp>
-        <p:nvSpPr>
-          <p:cNvPr id="37" name="Text 35"/>
-          <p:cNvSpPr/>
-          <p:nvPr/>
-        </p:nvSpPr>
-        <p:spPr>
-          <a:xfrm>
-            <a:off x="1600200" y="5349240"/>
-            <a:ext cx="4206240" cy="365760"/>
-          </a:xfrm>
-          <a:prstGeom prst="rect">
-            <a:avLst/>
-          </a:prstGeom>
-          <a:noFill/>
-          <a:ln/>
-        </p:spPr>
-        <p:txBody>
-          <a:bodyPr wrap="square" rtlCol="0" anchor="ctr"/>
-          <a:lstStyle/>
-          <a:p>
-            <a:pPr indent="0" marL="0">
-              <a:buNone/>
-            </a:pPr>
-            <a:r>
-              <a:rPr lang="en-US" sz="1500" b="1" dirty="0">
-                <a:solidFill>
-                  <a:srgbClr val="211D17"/>
-                </a:solidFill>
-                <a:latin typeface="Cambria" pitchFamily="34" charset="0"/>
-                <a:ea typeface="Cambria" pitchFamily="34" charset="-122"/>
-                <a:cs typeface="Cambria" pitchFamily="34" charset="-120"/>
-              </a:rPr>
-              <a:t>Invite alpha</a:t>
-            </a:r>
-            <a:endParaRPr lang="en-US" sz="1500" dirty="0"/>
-          </a:p>
-        </p:txBody>
-      </p:sp>
-      <p:sp>
-        <p:nvSpPr>
-          <p:cNvPr id="38" name="Text 36"/>
-          <p:cNvSpPr/>
-          <p:nvPr/>
-        </p:nvSpPr>
-        <p:spPr>
-          <a:xfrm>
-            <a:off x="1600200" y="5696712"/>
-            <a:ext cx="4251960" cy="457200"/>
-          </a:xfrm>
-          <a:prstGeom prst="rect">
-            <a:avLst/>
-          </a:prstGeom>
-          <a:noFill/>
-          <a:ln/>
-        </p:spPr>
-        <p:txBody>
-          <a:bodyPr wrap="square" rtlCol="0" anchor="ctr"/>
-          <a:lstStyle/>
-          <a:p>
-            <a:pPr indent="0" marL="0">
-              <a:buNone/>
-            </a:pPr>
-            <a:r>
-              <a:rPr lang="en-US" sz="1150" dirty="0">
-                <a:solidFill>
-                  <a:srgbClr val="6A6153"/>
-                </a:solidFill>
-                <a:latin typeface="Calibri" pitchFamily="34" charset="0"/>
-                <a:ea typeface="Calibri" pitchFamily="34" charset="-122"/>
-                <a:cs typeface="Calibri" pitchFamily="34" charset="-120"/>
-              </a:rPr>
-              <a:t>100–300 families via 3–5 coaches — measure retention, iterate</a:t>
-            </a:r>
-            <a:endParaRPr lang="en-US" sz="1150" dirty="0"/>
-          </a:p>
-        </p:txBody>
-      </p:sp>
-      <p:sp>
-        <p:nvSpPr>
-          <p:cNvPr id="39" name="Text 37"/>
-          <p:cNvSpPr/>
-          <p:nvPr/>
-        </p:nvSpPr>
-        <p:spPr>
-          <a:xfrm>
-            <a:off x="640080" y="6309360"/>
-            <a:ext cx="10911535" cy="365760"/>
-          </a:xfrm>
-          <a:prstGeom prst="rect">
-            <a:avLst/>
-          </a:prstGeom>
-          <a:noFill/>
-          <a:ln/>
-        </p:spPr>
-        <p:txBody>
-          <a:bodyPr wrap="square" rtlCol="0" anchor="ctr"/>
-          <a:lstStyle/>
-          <a:p>
-            <a:pPr indent="0" marL="0">
-              <a:buNone/>
-            </a:pPr>
-            <a:r>
-              <a:rPr lang="en-US" sz="1200" i="1" dirty="0">
-                <a:solidFill>
-                  <a:srgbClr val="B67B00"/>
-                </a:solidFill>
-                <a:latin typeface="Calibri" pitchFamily="34" charset="0"/>
-                <a:ea typeface="Calibri" pitchFamily="34" charset="-122"/>
-                <a:cs typeface="Calibri" pitchFamily="34" charset="-120"/>
-              </a:rPr>
-              <a:t>Alpha exit: RLS proven · weekly-email open rate ≥ 40% · a clean payment per region rail · healthy W4 kid retention · ≥ 10 testimonials.</a:t>
-            </a:r>
-            <a:endParaRPr lang="en-US" sz="1200" dirty="0"/>
+              <a:t>$18  →  $15  →  $12  →  $10   as coach-sourced referral and evergreen content take over from founder-led outreach.</a:t>
+            </a:r>
+            <a:endParaRPr lang="en-US" sz="1350" dirty="0"/>
           </a:p>
         </p:txBody>
       </p:sp>
@@ -7518,6 +8922,2358 @@
 <file path=ppt/slides/slide15.xml><?xml version="1.0" encoding="utf-8"?>
 <p:sld xmlns:a="http://schemas.openxmlformats.org/drawingml/2006/main" xmlns:r="http://schemas.openxmlformats.org/officeDocument/2006/relationships" xmlns:p="http://schemas.openxmlformats.org/presentationml/2006/main">
   <p:cSld name="Slide 15">
+    <p:bg>
+      <p:bgPr>
+        <a:solidFill>
+          <a:srgbClr val="F7F4EE"/>
+        </a:solidFill>
+      </p:bgPr>
+    </p:bg>
+    <p:spTree>
+      <p:nvGrpSpPr>
+        <p:cNvPr id="1" name=""/>
+        <p:cNvGrpSpPr/>
+        <p:nvPr/>
+      </p:nvGrpSpPr>
+      <p:grpSpPr>
+        <a:xfrm>
+          <a:off x="0" y="0"/>
+          <a:ext cx="0" cy="0"/>
+          <a:chOff x="0" y="0"/>
+          <a:chExt cx="0" cy="0"/>
+        </a:xfrm>
+      </p:grpSpPr>
+      <p:sp>
+        <p:nvSpPr>
+          <p:cNvPr id="2" name="Text 0"/>
+          <p:cNvSpPr/>
+          <p:nvPr/>
+        </p:nvSpPr>
+        <p:spPr>
+          <a:xfrm>
+            <a:off x="640080" y="457200"/>
+            <a:ext cx="10911535" cy="274320"/>
+          </a:xfrm>
+          <a:prstGeom prst="rect">
+            <a:avLst/>
+          </a:prstGeom>
+          <a:noFill/>
+          <a:ln/>
+        </p:spPr>
+        <p:txBody>
+          <a:bodyPr wrap="square" rtlCol="0" anchor="ctr"/>
+          <a:lstStyle/>
+          <a:p>
+            <a:pPr indent="0" marL="0">
+              <a:buNone/>
+            </a:pPr>
+            <a:r>
+              <a:rPr lang="en-US" sz="1200" b="1" spc="200" kern="0" dirty="0">
+                <a:solidFill>
+                  <a:srgbClr val="B67B00"/>
+                </a:solidFill>
+                <a:latin typeface="Calibri" pitchFamily="34" charset="0"/>
+                <a:ea typeface="Calibri" pitchFamily="34" charset="-122"/>
+                <a:cs typeface="Calibri" pitchFamily="34" charset="-120"/>
+              </a:rPr>
+              <a:t>THE NUMBERS</a:t>
+            </a:r>
+            <a:endParaRPr lang="en-US" sz="1200" dirty="0"/>
+          </a:p>
+        </p:txBody>
+      </p:sp>
+      <p:sp>
+        <p:nvSpPr>
+          <p:cNvPr id="3" name="Text 1"/>
+          <p:cNvSpPr/>
+          <p:nvPr/>
+        </p:nvSpPr>
+        <p:spPr>
+          <a:xfrm>
+            <a:off x="640080" y="713232"/>
+            <a:ext cx="10911535" cy="822960"/>
+          </a:xfrm>
+          <a:prstGeom prst="rect">
+            <a:avLst/>
+          </a:prstGeom>
+          <a:noFill/>
+          <a:ln/>
+        </p:spPr>
+        <p:txBody>
+          <a:bodyPr wrap="square" rtlCol="0" anchor="ctr"/>
+          <a:lstStyle/>
+          <a:p>
+            <a:pPr indent="0" marL="0">
+              <a:buNone/>
+            </a:pPr>
+            <a:r>
+              <a:rPr lang="en-US" sz="3000" b="1" dirty="0">
+                <a:solidFill>
+                  <a:srgbClr val="211D17"/>
+                </a:solidFill>
+                <a:latin typeface="Cambria" pitchFamily="34" charset="0"/>
+                <a:ea typeface="Cambria" pitchFamily="34" charset="-122"/>
+                <a:cs typeface="Cambria" pitchFamily="34" charset="-120"/>
+              </a:rPr>
+              <a:t>Validated Year-1 P&amp;L and a 3-year sketch</a:t>
+            </a:r>
+            <a:endParaRPr lang="en-US" sz="3000" dirty="0"/>
+          </a:p>
+        </p:txBody>
+      </p:sp>
+      <p:sp>
+        <p:nvSpPr>
+          <p:cNvPr id="4" name="Text 2"/>
+          <p:cNvSpPr/>
+          <p:nvPr/>
+        </p:nvSpPr>
+        <p:spPr>
+          <a:xfrm>
+            <a:off x="640080" y="1691640"/>
+            <a:ext cx="5029200" cy="365760"/>
+          </a:xfrm>
+          <a:prstGeom prst="rect">
+            <a:avLst/>
+          </a:prstGeom>
+          <a:noFill/>
+          <a:ln/>
+        </p:spPr>
+        <p:txBody>
+          <a:bodyPr wrap="square" rtlCol="0" anchor="ctr"/>
+          <a:lstStyle/>
+          <a:p>
+            <a:pPr indent="0" marL="0">
+              <a:buNone/>
+            </a:pPr>
+            <a:r>
+              <a:rPr lang="en-US" sz="1500" b="1" dirty="0">
+                <a:solidFill>
+                  <a:srgbClr val="211D17"/>
+                </a:solidFill>
+                <a:latin typeface="Cambria" pitchFamily="34" charset="0"/>
+                <a:ea typeface="Cambria" pitchFamily="34" charset="-122"/>
+                <a:cs typeface="Cambria" pitchFamily="34" charset="-120"/>
+              </a:rPr>
+              <a:t>Year-1 P&amp;L @ 1,000 kids</a:t>
+            </a:r>
+            <a:endParaRPr lang="en-US" sz="1500" dirty="0"/>
+          </a:p>
+        </p:txBody>
+      </p:sp>
+      <p:sp>
+        <p:nvSpPr>
+          <p:cNvPr id="5" name="Shape 3"/>
+          <p:cNvSpPr/>
+          <p:nvPr/>
+        </p:nvSpPr>
+        <p:spPr>
+          <a:xfrm>
+            <a:off x="640080" y="2148840"/>
+            <a:ext cx="5120640" cy="475488"/>
+          </a:xfrm>
+          <a:prstGeom prst="roundRect">
+            <a:avLst>
+              <a:gd name="adj" fmla="val 17308"/>
+            </a:avLst>
+          </a:prstGeom>
+          <a:solidFill>
+            <a:srgbClr val="FFFFFF"/>
+          </a:solidFill>
+          <a:ln/>
+          <a:effectLst>
+            <a:outerShdw sx="100000" sy="100000" kx="0" ky="0" algn="bl" rotWithShape="0" blurRad="114300" dist="38100" dir="5400000">
+              <a:srgbClr val="D8CFBE">
+                <a:alpha val="50000"/>
+              </a:srgbClr>
+            </a:outerShdw>
+          </a:effectLst>
+        </p:spPr>
+      </p:sp>
+      <p:sp>
+        <p:nvSpPr>
+          <p:cNvPr id="6" name="Text 4"/>
+          <p:cNvSpPr/>
+          <p:nvPr/>
+        </p:nvSpPr>
+        <p:spPr>
+          <a:xfrm>
+            <a:off x="841248" y="2148840"/>
+            <a:ext cx="3566160" cy="475488"/>
+          </a:xfrm>
+          <a:prstGeom prst="rect">
+            <a:avLst/>
+          </a:prstGeom>
+          <a:noFill/>
+          <a:ln/>
+        </p:spPr>
+        <p:txBody>
+          <a:bodyPr wrap="square" lIns="0" tIns="0" rIns="0" bIns="0" rtlCol="0" anchor="ctr"/>
+          <a:lstStyle/>
+          <a:p>
+            <a:pPr indent="0" marL="0">
+              <a:buNone/>
+            </a:pPr>
+            <a:r>
+              <a:rPr lang="en-US" sz="1250" dirty="0">
+                <a:solidFill>
+                  <a:srgbClr val="211D17"/>
+                </a:solidFill>
+                <a:latin typeface="Calibri" pitchFamily="34" charset="0"/>
+                <a:ea typeface="Calibri" pitchFamily="34" charset="-122"/>
+                <a:cs typeface="Calibri" pitchFamily="34" charset="-120"/>
+              </a:rPr>
+              <a:t>Subscription revenue (ARR)</a:t>
+            </a:r>
+            <a:endParaRPr lang="en-US" sz="1250" dirty="0"/>
+          </a:p>
+        </p:txBody>
+      </p:sp>
+      <p:sp>
+        <p:nvSpPr>
+          <p:cNvPr id="7" name="Text 5"/>
+          <p:cNvSpPr/>
+          <p:nvPr/>
+        </p:nvSpPr>
+        <p:spPr>
+          <a:xfrm>
+            <a:off x="4297680" y="2148840"/>
+            <a:ext cx="1280160" cy="475488"/>
+          </a:xfrm>
+          <a:prstGeom prst="rect">
+            <a:avLst/>
+          </a:prstGeom>
+          <a:noFill/>
+          <a:ln/>
+        </p:spPr>
+        <p:txBody>
+          <a:bodyPr wrap="square" lIns="0" tIns="0" rIns="0" bIns="0" rtlCol="0" anchor="ctr"/>
+          <a:lstStyle/>
+          <a:p>
+            <a:pPr algn="r" indent="0" marL="0">
+              <a:buNone/>
+            </a:pPr>
+            <a:r>
+              <a:rPr lang="en-US" sz="1500" b="1" dirty="0">
+                <a:solidFill>
+                  <a:srgbClr val="211D17"/>
+                </a:solidFill>
+                <a:latin typeface="Cambria" pitchFamily="34" charset="0"/>
+                <a:ea typeface="Cambria" pitchFamily="34" charset="-122"/>
+                <a:cs typeface="Cambria" pitchFamily="34" charset="-120"/>
+              </a:rPr>
+              <a:t>$45.5k</a:t>
+            </a:r>
+            <a:endParaRPr lang="en-US" sz="1500" dirty="0"/>
+          </a:p>
+        </p:txBody>
+      </p:sp>
+      <p:sp>
+        <p:nvSpPr>
+          <p:cNvPr id="8" name="Shape 6"/>
+          <p:cNvSpPr/>
+          <p:nvPr/>
+        </p:nvSpPr>
+        <p:spPr>
+          <a:xfrm>
+            <a:off x="640080" y="2697480"/>
+            <a:ext cx="5120640" cy="475488"/>
+          </a:xfrm>
+          <a:prstGeom prst="roundRect">
+            <a:avLst>
+              <a:gd name="adj" fmla="val 17308"/>
+            </a:avLst>
+          </a:prstGeom>
+          <a:solidFill>
+            <a:srgbClr val="FFFFFF"/>
+          </a:solidFill>
+          <a:ln/>
+          <a:effectLst>
+            <a:outerShdw sx="100000" sy="100000" kx="0" ky="0" algn="bl" rotWithShape="0" blurRad="114300" dist="38100" dir="5400000">
+              <a:srgbClr val="D8CFBE">
+                <a:alpha val="50000"/>
+              </a:srgbClr>
+            </a:outerShdw>
+          </a:effectLst>
+        </p:spPr>
+      </p:sp>
+      <p:sp>
+        <p:nvSpPr>
+          <p:cNvPr id="9" name="Text 7"/>
+          <p:cNvSpPr/>
+          <p:nvPr/>
+        </p:nvSpPr>
+        <p:spPr>
+          <a:xfrm>
+            <a:off x="841248" y="2697480"/>
+            <a:ext cx="3566160" cy="475488"/>
+          </a:xfrm>
+          <a:prstGeom prst="rect">
+            <a:avLst/>
+          </a:prstGeom>
+          <a:noFill/>
+          <a:ln/>
+        </p:spPr>
+        <p:txBody>
+          <a:bodyPr wrap="square" lIns="0" tIns="0" rIns="0" bIns="0" rtlCol="0" anchor="ctr"/>
+          <a:lstStyle/>
+          <a:p>
+            <a:pPr indent="0" marL="0">
+              <a:buNone/>
+            </a:pPr>
+            <a:r>
+              <a:rPr lang="en-US" sz="1250" dirty="0">
+                <a:solidFill>
+                  <a:srgbClr val="211D17"/>
+                </a:solidFill>
+                <a:latin typeface="Calibri" pitchFamily="34" charset="0"/>
+                <a:ea typeface="Calibri" pitchFamily="34" charset="-122"/>
+                <a:cs typeface="Calibri" pitchFamily="34" charset="-120"/>
+              </a:rPr>
+              <a:t>Payment processing (~3.5%)</a:t>
+            </a:r>
+            <a:endParaRPr lang="en-US" sz="1250" dirty="0"/>
+          </a:p>
+        </p:txBody>
+      </p:sp>
+      <p:sp>
+        <p:nvSpPr>
+          <p:cNvPr id="10" name="Text 8"/>
+          <p:cNvSpPr/>
+          <p:nvPr/>
+        </p:nvSpPr>
+        <p:spPr>
+          <a:xfrm>
+            <a:off x="4297680" y="2697480"/>
+            <a:ext cx="1280160" cy="475488"/>
+          </a:xfrm>
+          <a:prstGeom prst="rect">
+            <a:avLst/>
+          </a:prstGeom>
+          <a:noFill/>
+          <a:ln/>
+        </p:spPr>
+        <p:txBody>
+          <a:bodyPr wrap="square" lIns="0" tIns="0" rIns="0" bIns="0" rtlCol="0" anchor="ctr"/>
+          <a:lstStyle/>
+          <a:p>
+            <a:pPr algn="r" indent="0" marL="0">
+              <a:buNone/>
+            </a:pPr>
+            <a:r>
+              <a:rPr lang="en-US" sz="1500" b="1" dirty="0">
+                <a:solidFill>
+                  <a:srgbClr val="6A6153"/>
+                </a:solidFill>
+                <a:latin typeface="Cambria" pitchFamily="34" charset="0"/>
+                <a:ea typeface="Cambria" pitchFamily="34" charset="-122"/>
+                <a:cs typeface="Cambria" pitchFamily="34" charset="-120"/>
+              </a:rPr>
+              <a:t>–$1.6k</a:t>
+            </a:r>
+            <a:endParaRPr lang="en-US" sz="1500" dirty="0"/>
+          </a:p>
+        </p:txBody>
+      </p:sp>
+      <p:sp>
+        <p:nvSpPr>
+          <p:cNvPr id="11" name="Shape 9"/>
+          <p:cNvSpPr/>
+          <p:nvPr/>
+        </p:nvSpPr>
+        <p:spPr>
+          <a:xfrm>
+            <a:off x="640080" y="3246120"/>
+            <a:ext cx="5120640" cy="475488"/>
+          </a:xfrm>
+          <a:prstGeom prst="roundRect">
+            <a:avLst>
+              <a:gd name="adj" fmla="val 17308"/>
+            </a:avLst>
+          </a:prstGeom>
+          <a:solidFill>
+            <a:srgbClr val="FFFFFF"/>
+          </a:solidFill>
+          <a:ln/>
+          <a:effectLst>
+            <a:outerShdw sx="100000" sy="100000" kx="0" ky="0" algn="bl" rotWithShape="0" blurRad="114300" dist="38100" dir="5400000">
+              <a:srgbClr val="D8CFBE">
+                <a:alpha val="50000"/>
+              </a:srgbClr>
+            </a:outerShdw>
+          </a:effectLst>
+        </p:spPr>
+      </p:sp>
+      <p:sp>
+        <p:nvSpPr>
+          <p:cNvPr id="12" name="Text 10"/>
+          <p:cNvSpPr/>
+          <p:nvPr/>
+        </p:nvSpPr>
+        <p:spPr>
+          <a:xfrm>
+            <a:off x="841248" y="3246120"/>
+            <a:ext cx="3566160" cy="475488"/>
+          </a:xfrm>
+          <a:prstGeom prst="rect">
+            <a:avLst/>
+          </a:prstGeom>
+          <a:noFill/>
+          <a:ln/>
+        </p:spPr>
+        <p:txBody>
+          <a:bodyPr wrap="square" lIns="0" tIns="0" rIns="0" bIns="0" rtlCol="0" anchor="ctr"/>
+          <a:lstStyle/>
+          <a:p>
+            <a:pPr indent="0" marL="0">
+              <a:buNone/>
+            </a:pPr>
+            <a:r>
+              <a:rPr lang="en-US" sz="1250" dirty="0">
+                <a:solidFill>
+                  <a:srgbClr val="211D17"/>
+                </a:solidFill>
+                <a:latin typeface="Calibri" pitchFamily="34" charset="0"/>
+                <a:ea typeface="Calibri" pitchFamily="34" charset="-122"/>
+                <a:cs typeface="Calibri" pitchFamily="34" charset="-120"/>
+              </a:rPr>
+              <a:t>Infra + email/CRM + tools</a:t>
+            </a:r>
+            <a:endParaRPr lang="en-US" sz="1250" dirty="0"/>
+          </a:p>
+        </p:txBody>
+      </p:sp>
+      <p:sp>
+        <p:nvSpPr>
+          <p:cNvPr id="13" name="Text 11"/>
+          <p:cNvSpPr/>
+          <p:nvPr/>
+        </p:nvSpPr>
+        <p:spPr>
+          <a:xfrm>
+            <a:off x="4297680" y="3246120"/>
+            <a:ext cx="1280160" cy="475488"/>
+          </a:xfrm>
+          <a:prstGeom prst="rect">
+            <a:avLst/>
+          </a:prstGeom>
+          <a:noFill/>
+          <a:ln/>
+        </p:spPr>
+        <p:txBody>
+          <a:bodyPr wrap="square" lIns="0" tIns="0" rIns="0" bIns="0" rtlCol="0" anchor="ctr"/>
+          <a:lstStyle/>
+          <a:p>
+            <a:pPr algn="r" indent="0" marL="0">
+              <a:buNone/>
+            </a:pPr>
+            <a:r>
+              <a:rPr lang="en-US" sz="1500" b="1" dirty="0">
+                <a:solidFill>
+                  <a:srgbClr val="6A6153"/>
+                </a:solidFill>
+                <a:latin typeface="Cambria" pitchFamily="34" charset="0"/>
+                <a:ea typeface="Cambria" pitchFamily="34" charset="-122"/>
+                <a:cs typeface="Cambria" pitchFamily="34" charset="-120"/>
+              </a:rPr>
+              <a:t>–$2.5k</a:t>
+            </a:r>
+            <a:endParaRPr lang="en-US" sz="1500" dirty="0"/>
+          </a:p>
+        </p:txBody>
+      </p:sp>
+      <p:sp>
+        <p:nvSpPr>
+          <p:cNvPr id="14" name="Shape 12"/>
+          <p:cNvSpPr/>
+          <p:nvPr/>
+        </p:nvSpPr>
+        <p:spPr>
+          <a:xfrm>
+            <a:off x="640080" y="3794760"/>
+            <a:ext cx="5120640" cy="475488"/>
+          </a:xfrm>
+          <a:prstGeom prst="roundRect">
+            <a:avLst>
+              <a:gd name="adj" fmla="val 17308"/>
+            </a:avLst>
+          </a:prstGeom>
+          <a:solidFill>
+            <a:srgbClr val="FBEFCF"/>
+          </a:solidFill>
+          <a:ln w="12700">
+            <a:solidFill>
+              <a:srgbClr val="E8A400"/>
+            </a:solidFill>
+            <a:prstDash val="solid"/>
+          </a:ln>
+          <a:effectLst>
+            <a:outerShdw sx="100000" sy="100000" kx="0" ky="0" algn="bl" rotWithShape="0" blurRad="114300" dist="38100" dir="5400000">
+              <a:srgbClr val="D8CFBE">
+                <a:alpha val="50000"/>
+              </a:srgbClr>
+            </a:outerShdw>
+          </a:effectLst>
+        </p:spPr>
+      </p:sp>
+      <p:sp>
+        <p:nvSpPr>
+          <p:cNvPr id="15" name="Text 13"/>
+          <p:cNvSpPr/>
+          <p:nvPr/>
+        </p:nvSpPr>
+        <p:spPr>
+          <a:xfrm>
+            <a:off x="841248" y="3794760"/>
+            <a:ext cx="3566160" cy="475488"/>
+          </a:xfrm>
+          <a:prstGeom prst="rect">
+            <a:avLst/>
+          </a:prstGeom>
+          <a:noFill/>
+          <a:ln/>
+        </p:spPr>
+        <p:txBody>
+          <a:bodyPr wrap="square" lIns="0" tIns="0" rIns="0" bIns="0" rtlCol="0" anchor="ctr"/>
+          <a:lstStyle/>
+          <a:p>
+            <a:pPr indent="0" marL="0">
+              <a:buNone/>
+            </a:pPr>
+            <a:r>
+              <a:rPr lang="en-US" sz="1250" b="1" dirty="0">
+                <a:solidFill>
+                  <a:srgbClr val="211D17"/>
+                </a:solidFill>
+                <a:latin typeface="Calibri" pitchFamily="34" charset="0"/>
+                <a:ea typeface="Calibri" pitchFamily="34" charset="-122"/>
+                <a:cs typeface="Calibri" pitchFamily="34" charset="-120"/>
+              </a:rPr>
+              <a:t>Gross profit (~90%)</a:t>
+            </a:r>
+            <a:endParaRPr lang="en-US" sz="1250" dirty="0"/>
+          </a:p>
+        </p:txBody>
+      </p:sp>
+      <p:sp>
+        <p:nvSpPr>
+          <p:cNvPr id="16" name="Text 14"/>
+          <p:cNvSpPr/>
+          <p:nvPr/>
+        </p:nvSpPr>
+        <p:spPr>
+          <a:xfrm>
+            <a:off x="4297680" y="3794760"/>
+            <a:ext cx="1280160" cy="475488"/>
+          </a:xfrm>
+          <a:prstGeom prst="rect">
+            <a:avLst/>
+          </a:prstGeom>
+          <a:noFill/>
+          <a:ln/>
+        </p:spPr>
+        <p:txBody>
+          <a:bodyPr wrap="square" lIns="0" tIns="0" rIns="0" bIns="0" rtlCol="0" anchor="ctr"/>
+          <a:lstStyle/>
+          <a:p>
+            <a:pPr algn="r" indent="0" marL="0">
+              <a:buNone/>
+            </a:pPr>
+            <a:r>
+              <a:rPr lang="en-US" sz="1500" b="1" dirty="0">
+                <a:solidFill>
+                  <a:srgbClr val="2E9E63"/>
+                </a:solidFill>
+                <a:latin typeface="Cambria" pitchFamily="34" charset="0"/>
+                <a:ea typeface="Cambria" pitchFamily="34" charset="-122"/>
+                <a:cs typeface="Cambria" pitchFamily="34" charset="-120"/>
+              </a:rPr>
+              <a:t>$41.4k</a:t>
+            </a:r>
+            <a:endParaRPr lang="en-US" sz="1500" dirty="0"/>
+          </a:p>
+        </p:txBody>
+      </p:sp>
+      <p:sp>
+        <p:nvSpPr>
+          <p:cNvPr id="17" name="Shape 15"/>
+          <p:cNvSpPr/>
+          <p:nvPr/>
+        </p:nvSpPr>
+        <p:spPr>
+          <a:xfrm>
+            <a:off x="640080" y="4343400"/>
+            <a:ext cx="5120640" cy="475488"/>
+          </a:xfrm>
+          <a:prstGeom prst="roundRect">
+            <a:avLst>
+              <a:gd name="adj" fmla="val 17308"/>
+            </a:avLst>
+          </a:prstGeom>
+          <a:solidFill>
+            <a:srgbClr val="FFFFFF"/>
+          </a:solidFill>
+          <a:ln/>
+          <a:effectLst>
+            <a:outerShdw sx="100000" sy="100000" kx="0" ky="0" algn="bl" rotWithShape="0" blurRad="114300" dist="38100" dir="5400000">
+              <a:srgbClr val="D8CFBE">
+                <a:alpha val="50000"/>
+              </a:srgbClr>
+            </a:outerShdw>
+          </a:effectLst>
+        </p:spPr>
+      </p:sp>
+      <p:sp>
+        <p:nvSpPr>
+          <p:cNvPr id="18" name="Text 16"/>
+          <p:cNvSpPr/>
+          <p:nvPr/>
+        </p:nvSpPr>
+        <p:spPr>
+          <a:xfrm>
+            <a:off x="841248" y="4343400"/>
+            <a:ext cx="3566160" cy="475488"/>
+          </a:xfrm>
+          <a:prstGeom prst="rect">
+            <a:avLst/>
+          </a:prstGeom>
+          <a:noFill/>
+          <a:ln/>
+        </p:spPr>
+        <p:txBody>
+          <a:bodyPr wrap="square" lIns="0" tIns="0" rIns="0" bIns="0" rtlCol="0" anchor="ctr"/>
+          <a:lstStyle/>
+          <a:p>
+            <a:pPr indent="0" marL="0">
+              <a:buNone/>
+            </a:pPr>
+            <a:r>
+              <a:rPr lang="en-US" sz="1250" dirty="0">
+                <a:solidFill>
+                  <a:srgbClr val="211D17"/>
+                </a:solidFill>
+                <a:latin typeface="Calibri" pitchFamily="34" charset="0"/>
+                <a:ea typeface="Calibri" pitchFamily="34" charset="-122"/>
+                <a:cs typeface="Calibri" pitchFamily="34" charset="-120"/>
+              </a:rPr>
+              <a:t>Customer acquisition (blended ~$20)</a:t>
+            </a:r>
+            <a:endParaRPr lang="en-US" sz="1250" dirty="0"/>
+          </a:p>
+        </p:txBody>
+      </p:sp>
+      <p:sp>
+        <p:nvSpPr>
+          <p:cNvPr id="19" name="Text 17"/>
+          <p:cNvSpPr/>
+          <p:nvPr/>
+        </p:nvSpPr>
+        <p:spPr>
+          <a:xfrm>
+            <a:off x="4297680" y="4343400"/>
+            <a:ext cx="1280160" cy="475488"/>
+          </a:xfrm>
+          <a:prstGeom prst="rect">
+            <a:avLst/>
+          </a:prstGeom>
+          <a:noFill/>
+          <a:ln/>
+        </p:spPr>
+        <p:txBody>
+          <a:bodyPr wrap="square" lIns="0" tIns="0" rIns="0" bIns="0" rtlCol="0" anchor="ctr"/>
+          <a:lstStyle/>
+          <a:p>
+            <a:pPr algn="r" indent="0" marL="0">
+              <a:buNone/>
+            </a:pPr>
+            <a:r>
+              <a:rPr lang="en-US" sz="1500" b="1" dirty="0">
+                <a:solidFill>
+                  <a:srgbClr val="E67E45"/>
+                </a:solidFill>
+                <a:latin typeface="Cambria" pitchFamily="34" charset="0"/>
+                <a:ea typeface="Cambria" pitchFamily="34" charset="-122"/>
+                <a:cs typeface="Cambria" pitchFamily="34" charset="-120"/>
+              </a:rPr>
+              <a:t>–$15k</a:t>
+            </a:r>
+            <a:endParaRPr lang="en-US" sz="1500" dirty="0"/>
+          </a:p>
+        </p:txBody>
+      </p:sp>
+      <p:sp>
+        <p:nvSpPr>
+          <p:cNvPr id="20" name="Shape 18"/>
+          <p:cNvSpPr/>
+          <p:nvPr/>
+        </p:nvSpPr>
+        <p:spPr>
+          <a:xfrm>
+            <a:off x="640080" y="4892040"/>
+            <a:ext cx="5120640" cy="475488"/>
+          </a:xfrm>
+          <a:prstGeom prst="roundRect">
+            <a:avLst>
+              <a:gd name="adj" fmla="val 17308"/>
+            </a:avLst>
+          </a:prstGeom>
+          <a:solidFill>
+            <a:srgbClr val="FFFFFF"/>
+          </a:solidFill>
+          <a:ln/>
+          <a:effectLst>
+            <a:outerShdw sx="100000" sy="100000" kx="0" ky="0" algn="bl" rotWithShape="0" blurRad="114300" dist="38100" dir="5400000">
+              <a:srgbClr val="D8CFBE">
+                <a:alpha val="50000"/>
+              </a:srgbClr>
+            </a:outerShdw>
+          </a:effectLst>
+        </p:spPr>
+      </p:sp>
+      <p:sp>
+        <p:nvSpPr>
+          <p:cNvPr id="21" name="Text 19"/>
+          <p:cNvSpPr/>
+          <p:nvPr/>
+        </p:nvSpPr>
+        <p:spPr>
+          <a:xfrm>
+            <a:off x="841248" y="4892040"/>
+            <a:ext cx="3566160" cy="475488"/>
+          </a:xfrm>
+          <a:prstGeom prst="rect">
+            <a:avLst/>
+          </a:prstGeom>
+          <a:noFill/>
+          <a:ln/>
+        </p:spPr>
+        <p:txBody>
+          <a:bodyPr wrap="square" lIns="0" tIns="0" rIns="0" bIns="0" rtlCol="0" anchor="ctr"/>
+          <a:lstStyle/>
+          <a:p>
+            <a:pPr indent="0" marL="0">
+              <a:buNone/>
+            </a:pPr>
+            <a:r>
+              <a:rPr lang="en-US" sz="1250" dirty="0">
+                <a:solidFill>
+                  <a:srgbClr val="211D17"/>
+                </a:solidFill>
+                <a:latin typeface="Calibri" pitchFamily="34" charset="0"/>
+                <a:ea typeface="Calibri" pitchFamily="34" charset="-122"/>
+                <a:cs typeface="Calibri" pitchFamily="34" charset="-120"/>
+              </a:rPr>
+              <a:t>Legal (amortized, one-time)</a:t>
+            </a:r>
+            <a:endParaRPr lang="en-US" sz="1250" dirty="0"/>
+          </a:p>
+        </p:txBody>
+      </p:sp>
+      <p:sp>
+        <p:nvSpPr>
+          <p:cNvPr id="22" name="Text 20"/>
+          <p:cNvSpPr/>
+          <p:nvPr/>
+        </p:nvSpPr>
+        <p:spPr>
+          <a:xfrm>
+            <a:off x="4297680" y="4892040"/>
+            <a:ext cx="1280160" cy="475488"/>
+          </a:xfrm>
+          <a:prstGeom prst="rect">
+            <a:avLst/>
+          </a:prstGeom>
+          <a:noFill/>
+          <a:ln/>
+        </p:spPr>
+        <p:txBody>
+          <a:bodyPr wrap="square" lIns="0" tIns="0" rIns="0" bIns="0" rtlCol="0" anchor="ctr"/>
+          <a:lstStyle/>
+          <a:p>
+            <a:pPr algn="r" indent="0" marL="0">
+              <a:buNone/>
+            </a:pPr>
+            <a:r>
+              <a:rPr lang="en-US" sz="1500" b="1" dirty="0">
+                <a:solidFill>
+                  <a:srgbClr val="6A6153"/>
+                </a:solidFill>
+                <a:latin typeface="Cambria" pitchFamily="34" charset="0"/>
+                <a:ea typeface="Cambria" pitchFamily="34" charset="-122"/>
+                <a:cs typeface="Cambria" pitchFamily="34" charset="-120"/>
+              </a:rPr>
+              <a:t>–$2.5k</a:t>
+            </a:r>
+            <a:endParaRPr lang="en-US" sz="1500" dirty="0"/>
+          </a:p>
+        </p:txBody>
+      </p:sp>
+      <p:sp>
+        <p:nvSpPr>
+          <p:cNvPr id="23" name="Shape 21"/>
+          <p:cNvSpPr/>
+          <p:nvPr/>
+        </p:nvSpPr>
+        <p:spPr>
+          <a:xfrm>
+            <a:off x="640080" y="5440680"/>
+            <a:ext cx="5120640" cy="475488"/>
+          </a:xfrm>
+          <a:prstGeom prst="roundRect">
+            <a:avLst>
+              <a:gd name="adj" fmla="val 17308"/>
+            </a:avLst>
+          </a:prstGeom>
+          <a:solidFill>
+            <a:srgbClr val="FBEFCF"/>
+          </a:solidFill>
+          <a:ln w="12700">
+            <a:solidFill>
+              <a:srgbClr val="E8A400"/>
+            </a:solidFill>
+            <a:prstDash val="solid"/>
+          </a:ln>
+          <a:effectLst>
+            <a:outerShdw sx="100000" sy="100000" kx="0" ky="0" algn="bl" rotWithShape="0" blurRad="114300" dist="38100" dir="5400000">
+              <a:srgbClr val="D8CFBE">
+                <a:alpha val="50000"/>
+              </a:srgbClr>
+            </a:outerShdw>
+          </a:effectLst>
+        </p:spPr>
+      </p:sp>
+      <p:sp>
+        <p:nvSpPr>
+          <p:cNvPr id="24" name="Text 22"/>
+          <p:cNvSpPr/>
+          <p:nvPr/>
+        </p:nvSpPr>
+        <p:spPr>
+          <a:xfrm>
+            <a:off x="841248" y="5440680"/>
+            <a:ext cx="3566160" cy="475488"/>
+          </a:xfrm>
+          <a:prstGeom prst="rect">
+            <a:avLst/>
+          </a:prstGeom>
+          <a:noFill/>
+          <a:ln/>
+        </p:spPr>
+        <p:txBody>
+          <a:bodyPr wrap="square" lIns="0" tIns="0" rIns="0" bIns="0" rtlCol="0" anchor="ctr"/>
+          <a:lstStyle/>
+          <a:p>
+            <a:pPr indent="0" marL="0">
+              <a:buNone/>
+            </a:pPr>
+            <a:r>
+              <a:rPr lang="en-US" sz="1250" b="1" dirty="0">
+                <a:solidFill>
+                  <a:srgbClr val="211D17"/>
+                </a:solidFill>
+                <a:latin typeface="Calibri" pitchFamily="34" charset="0"/>
+                <a:ea typeface="Calibri" pitchFamily="34" charset="-122"/>
+                <a:cs typeface="Calibri" pitchFamily="34" charset="-120"/>
+              </a:rPr>
+              <a:t>Contribution before founder comp</a:t>
+            </a:r>
+            <a:endParaRPr lang="en-US" sz="1250" dirty="0"/>
+          </a:p>
+        </p:txBody>
+      </p:sp>
+      <p:sp>
+        <p:nvSpPr>
+          <p:cNvPr id="25" name="Text 23"/>
+          <p:cNvSpPr/>
+          <p:nvPr/>
+        </p:nvSpPr>
+        <p:spPr>
+          <a:xfrm>
+            <a:off x="4297680" y="5440680"/>
+            <a:ext cx="1280160" cy="475488"/>
+          </a:xfrm>
+          <a:prstGeom prst="rect">
+            <a:avLst/>
+          </a:prstGeom>
+          <a:noFill/>
+          <a:ln/>
+        </p:spPr>
+        <p:txBody>
+          <a:bodyPr wrap="square" lIns="0" tIns="0" rIns="0" bIns="0" rtlCol="0" anchor="ctr"/>
+          <a:lstStyle/>
+          <a:p>
+            <a:pPr algn="r" indent="0" marL="0">
+              <a:buNone/>
+            </a:pPr>
+            <a:r>
+              <a:rPr lang="en-US" sz="1500" b="1" dirty="0">
+                <a:solidFill>
+                  <a:srgbClr val="B67B00"/>
+                </a:solidFill>
+                <a:latin typeface="Cambria" pitchFamily="34" charset="0"/>
+                <a:ea typeface="Cambria" pitchFamily="34" charset="-122"/>
+                <a:cs typeface="Cambria" pitchFamily="34" charset="-120"/>
+              </a:rPr>
+              <a:t>~$23k</a:t>
+            </a:r>
+            <a:endParaRPr lang="en-US" sz="1500" dirty="0"/>
+          </a:p>
+        </p:txBody>
+      </p:sp>
+      <p:sp>
+        <p:nvSpPr>
+          <p:cNvPr id="26" name="Text 24"/>
+          <p:cNvSpPr/>
+          <p:nvPr/>
+        </p:nvSpPr>
+        <p:spPr>
+          <a:xfrm>
+            <a:off x="640080" y="6035040"/>
+            <a:ext cx="5212080" cy="548640"/>
+          </a:xfrm>
+          <a:prstGeom prst="rect">
+            <a:avLst/>
+          </a:prstGeom>
+          <a:noFill/>
+          <a:ln/>
+        </p:spPr>
+        <p:txBody>
+          <a:bodyPr wrap="square" rtlCol="0" anchor="ctr"/>
+          <a:lstStyle/>
+          <a:p>
+            <a:pPr indent="0" marL="0">
+              <a:buNone/>
+            </a:pPr>
+            <a:r>
+              <a:rPr lang="en-US" sz="1150" i="1" dirty="0">
+                <a:solidFill>
+                  <a:srgbClr val="B67B00"/>
+                </a:solidFill>
+                <a:latin typeface="Calibri" pitchFamily="34" charset="0"/>
+                <a:ea typeface="Calibri" pitchFamily="34" charset="-122"/>
+                <a:cs typeface="Calibri" pitchFamily="34" charset="-120"/>
+              </a:rPr>
+              <a:t>CAC is the single largest cost line — which is why the channel mix must stay low-CAC.</a:t>
+            </a:r>
+            <a:endParaRPr lang="en-US" sz="1150" dirty="0"/>
+          </a:p>
+        </p:txBody>
+      </p:sp>
+      <p:sp>
+        <p:nvSpPr>
+          <p:cNvPr id="27" name="Text 25"/>
+          <p:cNvSpPr/>
+          <p:nvPr/>
+        </p:nvSpPr>
+        <p:spPr>
+          <a:xfrm>
+            <a:off x="6309360" y="1691640"/>
+            <a:ext cx="5212080" cy="365760"/>
+          </a:xfrm>
+          <a:prstGeom prst="rect">
+            <a:avLst/>
+          </a:prstGeom>
+          <a:noFill/>
+          <a:ln/>
+        </p:spPr>
+        <p:txBody>
+          <a:bodyPr wrap="square" rtlCol="0" anchor="ctr"/>
+          <a:lstStyle/>
+          <a:p>
+            <a:pPr indent="0" marL="0">
+              <a:buNone/>
+            </a:pPr>
+            <a:r>
+              <a:rPr lang="en-US" sz="1500" b="1" dirty="0">
+                <a:solidFill>
+                  <a:srgbClr val="211D17"/>
+                </a:solidFill>
+                <a:latin typeface="Cambria" pitchFamily="34" charset="0"/>
+                <a:ea typeface="Cambria" pitchFamily="34" charset="-122"/>
+                <a:cs typeface="Cambria" pitchFamily="34" charset="-120"/>
+              </a:rPr>
+              <a:t>ARR trajectory ($k)</a:t>
+            </a:r>
+            <a:endParaRPr lang="en-US" sz="1500" dirty="0"/>
+          </a:p>
+        </p:txBody>
+      </p:sp>
+      <p:graphicFrame>
+        <p:nvGraphicFramePr>
+          <p:cNvPr id="28" name="Chart 0" descr=""/>
+          <p:cNvGraphicFramePr/>
+          <p:nvPr/>
+        </p:nvGraphicFramePr>
+        <p:xfrm>
+          <a:off x="6309360" y="2148840"/>
+          <a:ext cx="5212080" cy="3108960"/>
+        </p:xfrm>
+        <a:graphic xmlns:a="http://schemas.openxmlformats.org/drawingml/2006/main">
+          <a:graphicData uri="http://schemas.openxmlformats.org/drawingml/2006/chart">
+            <c:chart xmlns:c="http://schemas.openxmlformats.org/drawingml/2006/chart" r:id="rId1"/>
+          </a:graphicData>
+        </a:graphic>
+      </p:graphicFrame>
+      <p:sp>
+        <p:nvSpPr>
+          <p:cNvPr id="29" name="Text 26"/>
+          <p:cNvSpPr/>
+          <p:nvPr/>
+        </p:nvSpPr>
+        <p:spPr>
+          <a:xfrm>
+            <a:off x="6309360" y="5440680"/>
+            <a:ext cx="5212080" cy="914400"/>
+          </a:xfrm>
+          <a:prstGeom prst="rect">
+            <a:avLst/>
+          </a:prstGeom>
+          <a:noFill/>
+          <a:ln/>
+        </p:spPr>
+        <p:txBody>
+          <a:bodyPr wrap="square" rtlCol="0" anchor="ctr"/>
+          <a:lstStyle/>
+          <a:p>
+            <a:pPr indent="0" marL="0">
+              <a:buNone/>
+            </a:pPr>
+            <a:r>
+              <a:rPr lang="en-US" sz="1200" i="1" dirty="0">
+                <a:solidFill>
+                  <a:srgbClr val="6A6153"/>
+                </a:solidFill>
+                <a:latin typeface="Calibri" pitchFamily="34" charset="0"/>
+                <a:ea typeface="Calibri" pitchFamily="34" charset="-122"/>
+                <a:cs typeface="Calibri" pitchFamily="34" charset="-120"/>
+              </a:rPr>
+              <a:t>1,000 → 3,000 → 6,000 kids as the wedge widens into general English-medium markets. Bootstrappable; venture-scale needs a B2B2C / coach motion on top.</a:t>
+            </a:r>
+            <a:endParaRPr lang="en-US" sz="1200" dirty="0"/>
+          </a:p>
+        </p:txBody>
+      </p:sp>
+    </p:spTree>
+  </p:cSld>
+  <p:clrMapOvr>
+    <a:masterClrMapping/>
+  </p:clrMapOvr>
+</p:sld>
+</file>
+
+<file path=ppt/slides/slide16.xml><?xml version="1.0" encoding="utf-8"?>
+<p:sld xmlns:a="http://schemas.openxmlformats.org/drawingml/2006/main" xmlns:r="http://schemas.openxmlformats.org/officeDocument/2006/relationships" xmlns:p="http://schemas.openxmlformats.org/presentationml/2006/main">
+  <p:cSld name="Slide 16">
+    <p:bg>
+      <p:bgPr>
+        <a:solidFill>
+          <a:srgbClr val="FFFFFF"/>
+        </a:solidFill>
+      </p:bgPr>
+    </p:bg>
+    <p:spTree>
+      <p:nvGrpSpPr>
+        <p:cNvPr id="1" name=""/>
+        <p:cNvGrpSpPr/>
+        <p:nvPr/>
+      </p:nvGrpSpPr>
+      <p:grpSpPr>
+        <a:xfrm>
+          <a:off x="0" y="0"/>
+          <a:ext cx="0" cy="0"/>
+          <a:chOff x="0" y="0"/>
+          <a:chExt cx="0" cy="0"/>
+        </a:xfrm>
+      </p:grpSpPr>
+      <p:sp>
+        <p:nvSpPr>
+          <p:cNvPr id="2" name="Text 0"/>
+          <p:cNvSpPr/>
+          <p:nvPr/>
+        </p:nvSpPr>
+        <p:spPr>
+          <a:xfrm>
+            <a:off x="640080" y="457200"/>
+            <a:ext cx="10911535" cy="274320"/>
+          </a:xfrm>
+          <a:prstGeom prst="rect">
+            <a:avLst/>
+          </a:prstGeom>
+          <a:noFill/>
+          <a:ln/>
+        </p:spPr>
+        <p:txBody>
+          <a:bodyPr wrap="square" rtlCol="0" anchor="ctr"/>
+          <a:lstStyle/>
+          <a:p>
+            <a:pPr indent="0" marL="0">
+              <a:buNone/>
+            </a:pPr>
+            <a:r>
+              <a:rPr lang="en-US" sz="1200" b="1" spc="200" kern="0" dirty="0">
+                <a:solidFill>
+                  <a:srgbClr val="B67B00"/>
+                </a:solidFill>
+                <a:latin typeface="Calibri" pitchFamily="34" charset="0"/>
+                <a:ea typeface="Calibri" pitchFamily="34" charset="-122"/>
+                <a:cs typeface="Calibri" pitchFamily="34" charset="-120"/>
+              </a:rPr>
+              <a:t>ROADMAP TO ALPHA</a:t>
+            </a:r>
+            <a:endParaRPr lang="en-US" sz="1200" dirty="0"/>
+          </a:p>
+        </p:txBody>
+      </p:sp>
+      <p:sp>
+        <p:nvSpPr>
+          <p:cNvPr id="3" name="Text 1"/>
+          <p:cNvSpPr/>
+          <p:nvPr/>
+        </p:nvSpPr>
+        <p:spPr>
+          <a:xfrm>
+            <a:off x="640080" y="713232"/>
+            <a:ext cx="10911535" cy="822960"/>
+          </a:xfrm>
+          <a:prstGeom prst="rect">
+            <a:avLst/>
+          </a:prstGeom>
+          <a:noFill/>
+          <a:ln/>
+        </p:spPr>
+        <p:txBody>
+          <a:bodyPr wrap="square" rtlCol="0" anchor="ctr"/>
+          <a:lstStyle/>
+          <a:p>
+            <a:pPr indent="0" marL="0">
+              <a:buNone/>
+            </a:pPr>
+            <a:r>
+              <a:rPr lang="en-US" sz="3000" b="1" dirty="0">
+                <a:solidFill>
+                  <a:srgbClr val="211D17"/>
+                </a:solidFill>
+                <a:latin typeface="Cambria" pitchFamily="34" charset="0"/>
+                <a:ea typeface="Cambria" pitchFamily="34" charset="-122"/>
+                <a:cs typeface="Cambria" pitchFamily="34" charset="-120"/>
+              </a:rPr>
+              <a:t>Ship the seam, stand up the loop, invite the community</a:t>
+            </a:r>
+            <a:endParaRPr lang="en-US" sz="3000" dirty="0"/>
+          </a:p>
+        </p:txBody>
+      </p:sp>
+      <p:sp>
+        <p:nvSpPr>
+          <p:cNvPr id="4" name="Shape 2"/>
+          <p:cNvSpPr/>
+          <p:nvPr/>
+        </p:nvSpPr>
+        <p:spPr>
+          <a:xfrm>
+            <a:off x="640080" y="1737360"/>
+            <a:ext cx="5303520" cy="1005840"/>
+          </a:xfrm>
+          <a:prstGeom prst="roundRect">
+            <a:avLst>
+              <a:gd name="adj" fmla="val 8182"/>
+            </a:avLst>
+          </a:prstGeom>
+          <a:solidFill>
+            <a:srgbClr val="FFFFFF"/>
+          </a:solidFill>
+          <a:ln/>
+          <a:effectLst>
+            <a:outerShdw sx="100000" sy="100000" kx="0" ky="0" algn="bl" rotWithShape="0" blurRad="114300" dist="38100" dir="5400000">
+              <a:srgbClr val="D8CFBE">
+                <a:alpha val="50000"/>
+              </a:srgbClr>
+            </a:outerShdw>
+          </a:effectLst>
+        </p:spPr>
+      </p:sp>
+      <p:sp>
+        <p:nvSpPr>
+          <p:cNvPr id="5" name="Shape 3"/>
+          <p:cNvSpPr/>
+          <p:nvPr/>
+        </p:nvSpPr>
+        <p:spPr>
+          <a:xfrm>
+            <a:off x="868680" y="1993392"/>
+            <a:ext cx="566928" cy="530352"/>
+          </a:xfrm>
+          <a:prstGeom prst="hexagon">
+            <a:avLst/>
+          </a:prstGeom>
+          <a:solidFill>
+            <a:srgbClr val="E8A400"/>
+          </a:solidFill>
+          <a:ln/>
+        </p:spPr>
+      </p:sp>
+      <p:sp>
+        <p:nvSpPr>
+          <p:cNvPr id="6" name="Text 4"/>
+          <p:cNvSpPr/>
+          <p:nvPr/>
+        </p:nvSpPr>
+        <p:spPr>
+          <a:xfrm>
+            <a:off x="868680" y="1993392"/>
+            <a:ext cx="566928" cy="530352"/>
+          </a:xfrm>
+          <a:prstGeom prst="rect">
+            <a:avLst/>
+          </a:prstGeom>
+          <a:noFill/>
+          <a:ln/>
+        </p:spPr>
+        <p:txBody>
+          <a:bodyPr wrap="square" lIns="0" tIns="0" rIns="0" bIns="0" rtlCol="0" anchor="ctr"/>
+          <a:lstStyle/>
+          <a:p>
+            <a:pPr algn="ctr" indent="0" marL="0">
+              <a:buNone/>
+            </a:pPr>
+            <a:r>
+              <a:rPr lang="en-US" sz="1800" b="1" dirty="0">
+                <a:solidFill>
+                  <a:srgbClr val="FFFFFF"/>
+                </a:solidFill>
+                <a:latin typeface="Cambria" pitchFamily="34" charset="0"/>
+                <a:ea typeface="Cambria" pitchFamily="34" charset="-122"/>
+                <a:cs typeface="Cambria" pitchFamily="34" charset="-120"/>
+              </a:rPr>
+              <a:t>0</a:t>
+            </a:r>
+            <a:endParaRPr lang="en-US" sz="1800" dirty="0"/>
+          </a:p>
+        </p:txBody>
+      </p:sp>
+      <p:sp>
+        <p:nvSpPr>
+          <p:cNvPr id="7" name="Text 5"/>
+          <p:cNvSpPr/>
+          <p:nvPr/>
+        </p:nvSpPr>
+        <p:spPr>
+          <a:xfrm>
+            <a:off x="1600200" y="1920240"/>
+            <a:ext cx="4206240" cy="365760"/>
+          </a:xfrm>
+          <a:prstGeom prst="rect">
+            <a:avLst/>
+          </a:prstGeom>
+          <a:noFill/>
+          <a:ln/>
+        </p:spPr>
+        <p:txBody>
+          <a:bodyPr wrap="square" rtlCol="0" anchor="ctr"/>
+          <a:lstStyle/>
+          <a:p>
+            <a:pPr indent="0" marL="0">
+              <a:buNone/>
+            </a:pPr>
+            <a:r>
+              <a:rPr lang="en-US" sz="1500" b="1" dirty="0">
+                <a:solidFill>
+                  <a:srgbClr val="211D17"/>
+                </a:solidFill>
+                <a:latin typeface="Cambria" pitchFamily="34" charset="0"/>
+                <a:ea typeface="Cambria" pitchFamily="34" charset="-122"/>
+                <a:cs typeface="Cambria" pitchFamily="34" charset="-120"/>
+              </a:rPr>
+              <a:t>Legal &amp; rails</a:t>
+            </a:r>
+            <a:endParaRPr lang="en-US" sz="1500" dirty="0"/>
+          </a:p>
+        </p:txBody>
+      </p:sp>
+      <p:sp>
+        <p:nvSpPr>
+          <p:cNvPr id="8" name="Text 6"/>
+          <p:cNvSpPr/>
+          <p:nvPr/>
+        </p:nvSpPr>
+        <p:spPr>
+          <a:xfrm>
+            <a:off x="1600200" y="2267712"/>
+            <a:ext cx="4251960" cy="457200"/>
+          </a:xfrm>
+          <a:prstGeom prst="rect">
+            <a:avLst/>
+          </a:prstGeom>
+          <a:noFill/>
+          <a:ln/>
+        </p:spPr>
+        <p:txBody>
+          <a:bodyPr wrap="square" rtlCol="0" anchor="ctr"/>
+          <a:lstStyle/>
+          <a:p>
+            <a:pPr indent="0" marL="0">
+              <a:buNone/>
+            </a:pPr>
+            <a:r>
+              <a:rPr lang="en-US" sz="1150" dirty="0">
+                <a:solidFill>
+                  <a:srgbClr val="6A6153"/>
+                </a:solidFill>
+                <a:latin typeface="Calibri" pitchFamily="34" charset="0"/>
+                <a:ea typeface="Calibri" pitchFamily="34" charset="-122"/>
+                <a:cs typeface="Calibri" pitchFamily="34" charset="-120"/>
+              </a:rPr>
+              <a:t>Entity, domain, Stripe + Razorpay, Supabase, lawyer-reviewed consent</a:t>
+            </a:r>
+            <a:endParaRPr lang="en-US" sz="1150" dirty="0"/>
+          </a:p>
+        </p:txBody>
+      </p:sp>
+      <p:sp>
+        <p:nvSpPr>
+          <p:cNvPr id="9" name="Shape 7"/>
+          <p:cNvSpPr/>
+          <p:nvPr/>
+        </p:nvSpPr>
+        <p:spPr>
+          <a:xfrm>
+            <a:off x="6172200" y="1737360"/>
+            <a:ext cx="5303520" cy="1005840"/>
+          </a:xfrm>
+          <a:prstGeom prst="roundRect">
+            <a:avLst>
+              <a:gd name="adj" fmla="val 8182"/>
+            </a:avLst>
+          </a:prstGeom>
+          <a:solidFill>
+            <a:srgbClr val="FFFFFF"/>
+          </a:solidFill>
+          <a:ln/>
+          <a:effectLst>
+            <a:outerShdw sx="100000" sy="100000" kx="0" ky="0" algn="bl" rotWithShape="0" blurRad="114300" dist="38100" dir="5400000">
+              <a:srgbClr val="D8CFBE">
+                <a:alpha val="50000"/>
+              </a:srgbClr>
+            </a:outerShdw>
+          </a:effectLst>
+        </p:spPr>
+      </p:sp>
+      <p:sp>
+        <p:nvSpPr>
+          <p:cNvPr id="10" name="Shape 8"/>
+          <p:cNvSpPr/>
+          <p:nvPr/>
+        </p:nvSpPr>
+        <p:spPr>
+          <a:xfrm>
+            <a:off x="6400800" y="1993392"/>
+            <a:ext cx="566928" cy="530352"/>
+          </a:xfrm>
+          <a:prstGeom prst="hexagon">
+            <a:avLst/>
+          </a:prstGeom>
+          <a:solidFill>
+            <a:srgbClr val="E8A400"/>
+          </a:solidFill>
+          <a:ln/>
+        </p:spPr>
+      </p:sp>
+      <p:sp>
+        <p:nvSpPr>
+          <p:cNvPr id="11" name="Text 9"/>
+          <p:cNvSpPr/>
+          <p:nvPr/>
+        </p:nvSpPr>
+        <p:spPr>
+          <a:xfrm>
+            <a:off x="6400800" y="1993392"/>
+            <a:ext cx="566928" cy="530352"/>
+          </a:xfrm>
+          <a:prstGeom prst="rect">
+            <a:avLst/>
+          </a:prstGeom>
+          <a:noFill/>
+          <a:ln/>
+        </p:spPr>
+        <p:txBody>
+          <a:bodyPr wrap="square" lIns="0" tIns="0" rIns="0" bIns="0" rtlCol="0" anchor="ctr"/>
+          <a:lstStyle/>
+          <a:p>
+            <a:pPr algn="ctr" indent="0" marL="0">
+              <a:buNone/>
+            </a:pPr>
+            <a:r>
+              <a:rPr lang="en-US" sz="1800" b="1" dirty="0">
+                <a:solidFill>
+                  <a:srgbClr val="FFFFFF"/>
+                </a:solidFill>
+                <a:latin typeface="Cambria" pitchFamily="34" charset="0"/>
+                <a:ea typeface="Cambria" pitchFamily="34" charset="-122"/>
+                <a:cs typeface="Cambria" pitchFamily="34" charset="-120"/>
+              </a:rPr>
+              <a:t>1</a:t>
+            </a:r>
+            <a:endParaRPr lang="en-US" sz="1800" dirty="0"/>
+          </a:p>
+        </p:txBody>
+      </p:sp>
+      <p:sp>
+        <p:nvSpPr>
+          <p:cNvPr id="12" name="Text 10"/>
+          <p:cNvSpPr/>
+          <p:nvPr/>
+        </p:nvSpPr>
+        <p:spPr>
+          <a:xfrm>
+            <a:off x="7132320" y="1920240"/>
+            <a:ext cx="4206240" cy="365760"/>
+          </a:xfrm>
+          <a:prstGeom prst="rect">
+            <a:avLst/>
+          </a:prstGeom>
+          <a:noFill/>
+          <a:ln/>
+        </p:spPr>
+        <p:txBody>
+          <a:bodyPr wrap="square" rtlCol="0" anchor="ctr"/>
+          <a:lstStyle/>
+          <a:p>
+            <a:pPr indent="0" marL="0">
+              <a:buNone/>
+            </a:pPr>
+            <a:r>
+              <a:rPr lang="en-US" sz="1500" b="1" dirty="0">
+                <a:solidFill>
+                  <a:srgbClr val="211D17"/>
+                </a:solidFill>
+                <a:latin typeface="Cambria" pitchFamily="34" charset="0"/>
+                <a:ea typeface="Cambria" pitchFamily="34" charset="-122"/>
+                <a:cs typeface="Cambria" pitchFamily="34" charset="-120"/>
+              </a:rPr>
+              <a:t>Storage seam</a:t>
+            </a:r>
+            <a:endParaRPr lang="en-US" sz="1500" dirty="0"/>
+          </a:p>
+        </p:txBody>
+      </p:sp>
+      <p:sp>
+        <p:nvSpPr>
+          <p:cNvPr id="13" name="Text 11"/>
+          <p:cNvSpPr/>
+          <p:nvPr/>
+        </p:nvSpPr>
+        <p:spPr>
+          <a:xfrm>
+            <a:off x="7132320" y="2267712"/>
+            <a:ext cx="4251960" cy="457200"/>
+          </a:xfrm>
+          <a:prstGeom prst="rect">
+            <a:avLst/>
+          </a:prstGeom>
+          <a:noFill/>
+          <a:ln/>
+        </p:spPr>
+        <p:txBody>
+          <a:bodyPr wrap="square" rtlCol="0" anchor="ctr"/>
+          <a:lstStyle/>
+          <a:p>
+            <a:pPr indent="0" marL="0">
+              <a:buNone/>
+            </a:pPr>
+            <a:r>
+              <a:rPr lang="en-US" sz="1150" dirty="0">
+                <a:solidFill>
+                  <a:srgbClr val="6A6153"/>
+                </a:solidFill>
+                <a:latin typeface="Calibri" pitchFamily="34" charset="0"/>
+                <a:ea typeface="Calibri" pitchFamily="34" charset="-122"/>
+                <a:cs typeface="Calibri" pitchFamily="34" charset="-120"/>
+              </a:rPr>
+              <a:t>The Store adapter: sync vs device-local split, schema versioning</a:t>
+            </a:r>
+            <a:endParaRPr lang="en-US" sz="1150" dirty="0"/>
+          </a:p>
+        </p:txBody>
+      </p:sp>
+      <p:sp>
+        <p:nvSpPr>
+          <p:cNvPr id="14" name="Shape 12"/>
+          <p:cNvSpPr/>
+          <p:nvPr/>
+        </p:nvSpPr>
+        <p:spPr>
+          <a:xfrm>
+            <a:off x="640080" y="2880360"/>
+            <a:ext cx="5303520" cy="1005840"/>
+          </a:xfrm>
+          <a:prstGeom prst="roundRect">
+            <a:avLst>
+              <a:gd name="adj" fmla="val 8182"/>
+            </a:avLst>
+          </a:prstGeom>
+          <a:solidFill>
+            <a:srgbClr val="FFFFFF"/>
+          </a:solidFill>
+          <a:ln/>
+          <a:effectLst>
+            <a:outerShdw sx="100000" sy="100000" kx="0" ky="0" algn="bl" rotWithShape="0" blurRad="114300" dist="38100" dir="5400000">
+              <a:srgbClr val="D8CFBE">
+                <a:alpha val="50000"/>
+              </a:srgbClr>
+            </a:outerShdw>
+          </a:effectLst>
+        </p:spPr>
+      </p:sp>
+      <p:sp>
+        <p:nvSpPr>
+          <p:cNvPr id="15" name="Shape 13"/>
+          <p:cNvSpPr/>
+          <p:nvPr/>
+        </p:nvSpPr>
+        <p:spPr>
+          <a:xfrm>
+            <a:off x="868680" y="3136392"/>
+            <a:ext cx="566928" cy="530352"/>
+          </a:xfrm>
+          <a:prstGeom prst="hexagon">
+            <a:avLst/>
+          </a:prstGeom>
+          <a:solidFill>
+            <a:srgbClr val="E8A400"/>
+          </a:solidFill>
+          <a:ln/>
+        </p:spPr>
+      </p:sp>
+      <p:sp>
+        <p:nvSpPr>
+          <p:cNvPr id="16" name="Text 14"/>
+          <p:cNvSpPr/>
+          <p:nvPr/>
+        </p:nvSpPr>
+        <p:spPr>
+          <a:xfrm>
+            <a:off x="868680" y="3136392"/>
+            <a:ext cx="566928" cy="530352"/>
+          </a:xfrm>
+          <a:prstGeom prst="rect">
+            <a:avLst/>
+          </a:prstGeom>
+          <a:noFill/>
+          <a:ln/>
+        </p:spPr>
+        <p:txBody>
+          <a:bodyPr wrap="square" lIns="0" tIns="0" rIns="0" bIns="0" rtlCol="0" anchor="ctr"/>
+          <a:lstStyle/>
+          <a:p>
+            <a:pPr algn="ctr" indent="0" marL="0">
+              <a:buNone/>
+            </a:pPr>
+            <a:r>
+              <a:rPr lang="en-US" sz="1800" b="1" dirty="0">
+                <a:solidFill>
+                  <a:srgbClr val="FFFFFF"/>
+                </a:solidFill>
+                <a:latin typeface="Cambria" pitchFamily="34" charset="0"/>
+                <a:ea typeface="Cambria" pitchFamily="34" charset="-122"/>
+                <a:cs typeface="Cambria" pitchFamily="34" charset="-120"/>
+              </a:rPr>
+              <a:t>2</a:t>
+            </a:r>
+            <a:endParaRPr lang="en-US" sz="1800" dirty="0"/>
+          </a:p>
+        </p:txBody>
+      </p:sp>
+      <p:sp>
+        <p:nvSpPr>
+          <p:cNvPr id="17" name="Text 15"/>
+          <p:cNvSpPr/>
+          <p:nvPr/>
+        </p:nvSpPr>
+        <p:spPr>
+          <a:xfrm>
+            <a:off x="1600200" y="3063240"/>
+            <a:ext cx="4206240" cy="365760"/>
+          </a:xfrm>
+          <a:prstGeom prst="rect">
+            <a:avLst/>
+          </a:prstGeom>
+          <a:noFill/>
+          <a:ln/>
+        </p:spPr>
+        <p:txBody>
+          <a:bodyPr wrap="square" rtlCol="0" anchor="ctr"/>
+          <a:lstStyle/>
+          <a:p>
+            <a:pPr indent="0" marL="0">
+              <a:buNone/>
+            </a:pPr>
+            <a:r>
+              <a:rPr lang="en-US" sz="1500" b="1" dirty="0">
+                <a:solidFill>
+                  <a:srgbClr val="211D17"/>
+                </a:solidFill>
+                <a:latin typeface="Cambria" pitchFamily="34" charset="0"/>
+                <a:ea typeface="Cambria" pitchFamily="34" charset="-122"/>
+                <a:cs typeface="Cambria" pitchFamily="34" charset="-120"/>
+              </a:rPr>
+              <a:t>Parent auth</a:t>
+            </a:r>
+            <a:endParaRPr lang="en-US" sz="1500" dirty="0"/>
+          </a:p>
+        </p:txBody>
+      </p:sp>
+      <p:sp>
+        <p:nvSpPr>
+          <p:cNvPr id="18" name="Text 16"/>
+          <p:cNvSpPr/>
+          <p:nvPr/>
+        </p:nvSpPr>
+        <p:spPr>
+          <a:xfrm>
+            <a:off x="1600200" y="3410712"/>
+            <a:ext cx="4251960" cy="457200"/>
+          </a:xfrm>
+          <a:prstGeom prst="rect">
+            <a:avLst/>
+          </a:prstGeom>
+          <a:noFill/>
+          <a:ln/>
+        </p:spPr>
+        <p:txBody>
+          <a:bodyPr wrap="square" rtlCol="0" anchor="ctr"/>
+          <a:lstStyle/>
+          <a:p>
+            <a:pPr indent="0" marL="0">
+              <a:buNone/>
+            </a:pPr>
+            <a:r>
+              <a:rPr lang="en-US" sz="1150" dirty="0">
+                <a:solidFill>
+                  <a:srgbClr val="6A6153"/>
+                </a:solidFill>
+                <a:latin typeface="Calibri" pitchFamily="34" charset="0"/>
+                <a:ea typeface="Calibri" pitchFamily="34" charset="-122"/>
+                <a:cs typeface="Calibri" pitchFamily="34" charset="-120"/>
+              </a:rPr>
+              <a:t>Supabase auth; migrate existing local users on first login</a:t>
+            </a:r>
+            <a:endParaRPr lang="en-US" sz="1150" dirty="0"/>
+          </a:p>
+        </p:txBody>
+      </p:sp>
+      <p:sp>
+        <p:nvSpPr>
+          <p:cNvPr id="19" name="Shape 17"/>
+          <p:cNvSpPr/>
+          <p:nvPr/>
+        </p:nvSpPr>
+        <p:spPr>
+          <a:xfrm>
+            <a:off x="6172200" y="2880360"/>
+            <a:ext cx="5303520" cy="1005840"/>
+          </a:xfrm>
+          <a:prstGeom prst="roundRect">
+            <a:avLst>
+              <a:gd name="adj" fmla="val 8182"/>
+            </a:avLst>
+          </a:prstGeom>
+          <a:solidFill>
+            <a:srgbClr val="FFFFFF"/>
+          </a:solidFill>
+          <a:ln/>
+          <a:effectLst>
+            <a:outerShdw sx="100000" sy="100000" kx="0" ky="0" algn="bl" rotWithShape="0" blurRad="114300" dist="38100" dir="5400000">
+              <a:srgbClr val="D8CFBE">
+                <a:alpha val="50000"/>
+              </a:srgbClr>
+            </a:outerShdw>
+          </a:effectLst>
+        </p:spPr>
+      </p:sp>
+      <p:sp>
+        <p:nvSpPr>
+          <p:cNvPr id="20" name="Shape 18"/>
+          <p:cNvSpPr/>
+          <p:nvPr/>
+        </p:nvSpPr>
+        <p:spPr>
+          <a:xfrm>
+            <a:off x="6400800" y="3136392"/>
+            <a:ext cx="566928" cy="530352"/>
+          </a:xfrm>
+          <a:prstGeom prst="hexagon">
+            <a:avLst/>
+          </a:prstGeom>
+          <a:solidFill>
+            <a:srgbClr val="E8A400"/>
+          </a:solidFill>
+          <a:ln/>
+        </p:spPr>
+      </p:sp>
+      <p:sp>
+        <p:nvSpPr>
+          <p:cNvPr id="21" name="Text 19"/>
+          <p:cNvSpPr/>
+          <p:nvPr/>
+        </p:nvSpPr>
+        <p:spPr>
+          <a:xfrm>
+            <a:off x="6400800" y="3136392"/>
+            <a:ext cx="566928" cy="530352"/>
+          </a:xfrm>
+          <a:prstGeom prst="rect">
+            <a:avLst/>
+          </a:prstGeom>
+          <a:noFill/>
+          <a:ln/>
+        </p:spPr>
+        <p:txBody>
+          <a:bodyPr wrap="square" lIns="0" tIns="0" rIns="0" bIns="0" rtlCol="0" anchor="ctr"/>
+          <a:lstStyle/>
+          <a:p>
+            <a:pPr algn="ctr" indent="0" marL="0">
+              <a:buNone/>
+            </a:pPr>
+            <a:r>
+              <a:rPr lang="en-US" sz="1800" b="1" dirty="0">
+                <a:solidFill>
+                  <a:srgbClr val="FFFFFF"/>
+                </a:solidFill>
+                <a:latin typeface="Cambria" pitchFamily="34" charset="0"/>
+                <a:ea typeface="Cambria" pitchFamily="34" charset="-122"/>
+                <a:cs typeface="Cambria" pitchFamily="34" charset="-120"/>
+              </a:rPr>
+              <a:t>3</a:t>
+            </a:r>
+            <a:endParaRPr lang="en-US" sz="1800" dirty="0"/>
+          </a:p>
+        </p:txBody>
+      </p:sp>
+      <p:sp>
+        <p:nvSpPr>
+          <p:cNvPr id="22" name="Text 20"/>
+          <p:cNvSpPr/>
+          <p:nvPr/>
+        </p:nvSpPr>
+        <p:spPr>
+          <a:xfrm>
+            <a:off x="7132320" y="3063240"/>
+            <a:ext cx="4206240" cy="365760"/>
+          </a:xfrm>
+          <a:prstGeom prst="rect">
+            <a:avLst/>
+          </a:prstGeom>
+          <a:noFill/>
+          <a:ln/>
+        </p:spPr>
+        <p:txBody>
+          <a:bodyPr wrap="square" rtlCol="0" anchor="ctr"/>
+          <a:lstStyle/>
+          <a:p>
+            <a:pPr indent="0" marL="0">
+              <a:buNone/>
+            </a:pPr>
+            <a:r>
+              <a:rPr lang="en-US" sz="1500" b="1" dirty="0">
+                <a:solidFill>
+                  <a:srgbClr val="211D17"/>
+                </a:solidFill>
+                <a:latin typeface="Cambria" pitchFamily="34" charset="0"/>
+                <a:ea typeface="Cambria" pitchFamily="34" charset="-122"/>
+                <a:cs typeface="Cambria" pitchFamily="34" charset="-120"/>
+              </a:rPr>
+              <a:t>Cloud sync</a:t>
+            </a:r>
+            <a:endParaRPr lang="en-US" sz="1500" dirty="0"/>
+          </a:p>
+        </p:txBody>
+      </p:sp>
+      <p:sp>
+        <p:nvSpPr>
+          <p:cNvPr id="23" name="Text 21"/>
+          <p:cNvSpPr/>
+          <p:nvPr/>
+        </p:nvSpPr>
+        <p:spPr>
+          <a:xfrm>
+            <a:off x="7132320" y="3410712"/>
+            <a:ext cx="4251960" cy="457200"/>
+          </a:xfrm>
+          <a:prstGeom prst="rect">
+            <a:avLst/>
+          </a:prstGeom>
+          <a:noFill/>
+          <a:ln/>
+        </p:spPr>
+        <p:txBody>
+          <a:bodyPr wrap="square" rtlCol="0" anchor="ctr"/>
+          <a:lstStyle/>
+          <a:p>
+            <a:pPr indent="0" marL="0">
+              <a:buNone/>
+            </a:pPr>
+            <a:r>
+              <a:rPr lang="en-US" sz="1150" dirty="0">
+                <a:solidFill>
+                  <a:srgbClr val="6A6153"/>
+                </a:solidFill>
+                <a:latin typeface="Calibri" pitchFamily="34" charset="0"/>
+                <a:ea typeface="Calibri" pitchFamily="34" charset="-122"/>
+                <a:cs typeface="Calibri" pitchFamily="34" charset="-120"/>
+              </a:rPr>
+              <a:t>RLS per family; activity log feeding the weekly aggregation</a:t>
+            </a:r>
+            <a:endParaRPr lang="en-US" sz="1150" dirty="0"/>
+          </a:p>
+        </p:txBody>
+      </p:sp>
+      <p:sp>
+        <p:nvSpPr>
+          <p:cNvPr id="24" name="Shape 22"/>
+          <p:cNvSpPr/>
+          <p:nvPr/>
+        </p:nvSpPr>
+        <p:spPr>
+          <a:xfrm>
+            <a:off x="640080" y="4023360"/>
+            <a:ext cx="5303520" cy="1005840"/>
+          </a:xfrm>
+          <a:prstGeom prst="roundRect">
+            <a:avLst>
+              <a:gd name="adj" fmla="val 8182"/>
+            </a:avLst>
+          </a:prstGeom>
+          <a:solidFill>
+            <a:srgbClr val="FFFFFF"/>
+          </a:solidFill>
+          <a:ln/>
+          <a:effectLst>
+            <a:outerShdw sx="100000" sy="100000" kx="0" ky="0" algn="bl" rotWithShape="0" blurRad="114300" dist="38100" dir="5400000">
+              <a:srgbClr val="D8CFBE">
+                <a:alpha val="50000"/>
+              </a:srgbClr>
+            </a:outerShdw>
+          </a:effectLst>
+        </p:spPr>
+      </p:sp>
+      <p:sp>
+        <p:nvSpPr>
+          <p:cNvPr id="25" name="Shape 23"/>
+          <p:cNvSpPr/>
+          <p:nvPr/>
+        </p:nvSpPr>
+        <p:spPr>
+          <a:xfrm>
+            <a:off x="868680" y="4279392"/>
+            <a:ext cx="566928" cy="530352"/>
+          </a:xfrm>
+          <a:prstGeom prst="hexagon">
+            <a:avLst/>
+          </a:prstGeom>
+          <a:solidFill>
+            <a:srgbClr val="E8A400"/>
+          </a:solidFill>
+          <a:ln/>
+        </p:spPr>
+      </p:sp>
+      <p:sp>
+        <p:nvSpPr>
+          <p:cNvPr id="26" name="Text 24"/>
+          <p:cNvSpPr/>
+          <p:nvPr/>
+        </p:nvSpPr>
+        <p:spPr>
+          <a:xfrm>
+            <a:off x="868680" y="4279392"/>
+            <a:ext cx="566928" cy="530352"/>
+          </a:xfrm>
+          <a:prstGeom prst="rect">
+            <a:avLst/>
+          </a:prstGeom>
+          <a:noFill/>
+          <a:ln/>
+        </p:spPr>
+        <p:txBody>
+          <a:bodyPr wrap="square" lIns="0" tIns="0" rIns="0" bIns="0" rtlCol="0" anchor="ctr"/>
+          <a:lstStyle/>
+          <a:p>
+            <a:pPr algn="ctr" indent="0" marL="0">
+              <a:buNone/>
+            </a:pPr>
+            <a:r>
+              <a:rPr lang="en-US" sz="1800" b="1" dirty="0">
+                <a:solidFill>
+                  <a:srgbClr val="FFFFFF"/>
+                </a:solidFill>
+                <a:latin typeface="Cambria" pitchFamily="34" charset="0"/>
+                <a:ea typeface="Cambria" pitchFamily="34" charset="-122"/>
+                <a:cs typeface="Cambria" pitchFamily="34" charset="-120"/>
+              </a:rPr>
+              <a:t>4</a:t>
+            </a:r>
+            <a:endParaRPr lang="en-US" sz="1800" dirty="0"/>
+          </a:p>
+        </p:txBody>
+      </p:sp>
+      <p:sp>
+        <p:nvSpPr>
+          <p:cNvPr id="27" name="Text 25"/>
+          <p:cNvSpPr/>
+          <p:nvPr/>
+        </p:nvSpPr>
+        <p:spPr>
+          <a:xfrm>
+            <a:off x="1600200" y="4206240"/>
+            <a:ext cx="4206240" cy="365760"/>
+          </a:xfrm>
+          <a:prstGeom prst="rect">
+            <a:avLst/>
+          </a:prstGeom>
+          <a:noFill/>
+          <a:ln/>
+        </p:spPr>
+        <p:txBody>
+          <a:bodyPr wrap="square" rtlCol="0" anchor="ctr"/>
+          <a:lstStyle/>
+          <a:p>
+            <a:pPr indent="0" marL="0">
+              <a:buNone/>
+            </a:pPr>
+            <a:r>
+              <a:rPr lang="en-US" sz="1500" b="1" dirty="0">
+                <a:solidFill>
+                  <a:srgbClr val="211D17"/>
+                </a:solidFill>
+                <a:latin typeface="Cambria" pitchFamily="34" charset="0"/>
+                <a:ea typeface="Cambria" pitchFamily="34" charset="-122"/>
+                <a:cs typeface="Cambria" pitchFamily="34" charset="-120"/>
+              </a:rPr>
+              <a:t>Payments</a:t>
+            </a:r>
+            <a:endParaRPr lang="en-US" sz="1500" dirty="0"/>
+          </a:p>
+        </p:txBody>
+      </p:sp>
+      <p:sp>
+        <p:nvSpPr>
+          <p:cNvPr id="28" name="Text 26"/>
+          <p:cNvSpPr/>
+          <p:nvPr/>
+        </p:nvSpPr>
+        <p:spPr>
+          <a:xfrm>
+            <a:off x="1600200" y="4553712"/>
+            <a:ext cx="4251960" cy="457200"/>
+          </a:xfrm>
+          <a:prstGeom prst="rect">
+            <a:avLst/>
+          </a:prstGeom>
+          <a:noFill/>
+          <a:ln/>
+        </p:spPr>
+        <p:txBody>
+          <a:bodyPr wrap="square" rtlCol="0" anchor="ctr"/>
+          <a:lstStyle/>
+          <a:p>
+            <a:pPr indent="0" marL="0">
+              <a:buNone/>
+            </a:pPr>
+            <a:r>
+              <a:rPr lang="en-US" sz="1150" dirty="0">
+                <a:solidFill>
+                  <a:srgbClr val="6A6153"/>
+                </a:solidFill>
+                <a:latin typeface="Calibri" pitchFamily="34" charset="0"/>
+                <a:ea typeface="Calibri" pitchFamily="34" charset="-122"/>
+                <a:cs typeface="Calibri" pitchFamily="34" charset="-120"/>
+              </a:rPr>
+              <a:t>Stripe + Razorpay entitlements, server-authoritative gate</a:t>
+            </a:r>
+            <a:endParaRPr lang="en-US" sz="1150" dirty="0"/>
+          </a:p>
+        </p:txBody>
+      </p:sp>
+      <p:sp>
+        <p:nvSpPr>
+          <p:cNvPr id="29" name="Shape 27"/>
+          <p:cNvSpPr/>
+          <p:nvPr/>
+        </p:nvSpPr>
+        <p:spPr>
+          <a:xfrm>
+            <a:off x="6172200" y="4023360"/>
+            <a:ext cx="5303520" cy="1005840"/>
+          </a:xfrm>
+          <a:prstGeom prst="roundRect">
+            <a:avLst>
+              <a:gd name="adj" fmla="val 8182"/>
+            </a:avLst>
+          </a:prstGeom>
+          <a:solidFill>
+            <a:srgbClr val="FFFFFF"/>
+          </a:solidFill>
+          <a:ln/>
+          <a:effectLst>
+            <a:outerShdw sx="100000" sy="100000" kx="0" ky="0" algn="bl" rotWithShape="0" blurRad="114300" dist="38100" dir="5400000">
+              <a:srgbClr val="D8CFBE">
+                <a:alpha val="50000"/>
+              </a:srgbClr>
+            </a:outerShdw>
+          </a:effectLst>
+        </p:spPr>
+      </p:sp>
+      <p:sp>
+        <p:nvSpPr>
+          <p:cNvPr id="30" name="Shape 28"/>
+          <p:cNvSpPr/>
+          <p:nvPr/>
+        </p:nvSpPr>
+        <p:spPr>
+          <a:xfrm>
+            <a:off x="6400800" y="4279392"/>
+            <a:ext cx="566928" cy="530352"/>
+          </a:xfrm>
+          <a:prstGeom prst="hexagon">
+            <a:avLst/>
+          </a:prstGeom>
+          <a:solidFill>
+            <a:srgbClr val="E8A400"/>
+          </a:solidFill>
+          <a:ln/>
+        </p:spPr>
+      </p:sp>
+      <p:sp>
+        <p:nvSpPr>
+          <p:cNvPr id="31" name="Text 29"/>
+          <p:cNvSpPr/>
+          <p:nvPr/>
+        </p:nvSpPr>
+        <p:spPr>
+          <a:xfrm>
+            <a:off x="6400800" y="4279392"/>
+            <a:ext cx="566928" cy="530352"/>
+          </a:xfrm>
+          <a:prstGeom prst="rect">
+            <a:avLst/>
+          </a:prstGeom>
+          <a:noFill/>
+          <a:ln/>
+        </p:spPr>
+        <p:txBody>
+          <a:bodyPr wrap="square" lIns="0" tIns="0" rIns="0" bIns="0" rtlCol="0" anchor="ctr"/>
+          <a:lstStyle/>
+          <a:p>
+            <a:pPr algn="ctr" indent="0" marL="0">
+              <a:buNone/>
+            </a:pPr>
+            <a:r>
+              <a:rPr lang="en-US" sz="1800" b="1" dirty="0">
+                <a:solidFill>
+                  <a:srgbClr val="FFFFFF"/>
+                </a:solidFill>
+                <a:latin typeface="Cambria" pitchFamily="34" charset="0"/>
+                <a:ea typeface="Cambria" pitchFamily="34" charset="-122"/>
+                <a:cs typeface="Cambria" pitchFamily="34" charset="-120"/>
+              </a:rPr>
+              <a:t>5</a:t>
+            </a:r>
+            <a:endParaRPr lang="en-US" sz="1800" dirty="0"/>
+          </a:p>
+        </p:txBody>
+      </p:sp>
+      <p:sp>
+        <p:nvSpPr>
+          <p:cNvPr id="32" name="Text 30"/>
+          <p:cNvSpPr/>
+          <p:nvPr/>
+        </p:nvSpPr>
+        <p:spPr>
+          <a:xfrm>
+            <a:off x="7132320" y="4206240"/>
+            <a:ext cx="4206240" cy="365760"/>
+          </a:xfrm>
+          <a:prstGeom prst="rect">
+            <a:avLst/>
+          </a:prstGeom>
+          <a:noFill/>
+          <a:ln/>
+        </p:spPr>
+        <p:txBody>
+          <a:bodyPr wrap="square" rtlCol="0" anchor="ctr"/>
+          <a:lstStyle/>
+          <a:p>
+            <a:pPr indent="0" marL="0">
+              <a:buNone/>
+            </a:pPr>
+            <a:r>
+              <a:rPr lang="en-US" sz="1500" b="1" dirty="0">
+                <a:solidFill>
+                  <a:srgbClr val="211D17"/>
+                </a:solidFill>
+                <a:latin typeface="Cambria" pitchFamily="34" charset="0"/>
+                <a:ea typeface="Cambria" pitchFamily="34" charset="-122"/>
+                <a:cs typeface="Cambria" pitchFamily="34" charset="-120"/>
+              </a:rPr>
+              <a:t>CRM loop</a:t>
+            </a:r>
+            <a:endParaRPr lang="en-US" sz="1500" dirty="0"/>
+          </a:p>
+        </p:txBody>
+      </p:sp>
+      <p:sp>
+        <p:nvSpPr>
+          <p:cNvPr id="33" name="Text 31"/>
+          <p:cNvSpPr/>
+          <p:nvPr/>
+        </p:nvSpPr>
+        <p:spPr>
+          <a:xfrm>
+            <a:off x="7132320" y="4553712"/>
+            <a:ext cx="4251960" cy="457200"/>
+          </a:xfrm>
+          <a:prstGeom prst="rect">
+            <a:avLst/>
+          </a:prstGeom>
+          <a:noFill/>
+          <a:ln/>
+        </p:spPr>
+        <p:txBody>
+          <a:bodyPr wrap="square" rtlCol="0" anchor="ctr"/>
+          <a:lstStyle/>
+          <a:p>
+            <a:pPr indent="0" marL="0">
+              <a:buNone/>
+            </a:pPr>
+            <a:r>
+              <a:rPr lang="en-US" sz="1150" dirty="0">
+                <a:solidFill>
+                  <a:srgbClr val="6A6153"/>
+                </a:solidFill>
+                <a:latin typeface="Calibri" pitchFamily="34" charset="0"/>
+                <a:ea typeface="Calibri" pitchFamily="34" charset="-122"/>
+                <a:cs typeface="Calibri" pitchFamily="34" charset="-120"/>
+              </a:rPr>
+              <a:t>Resend progress email + Loops onboarding journey</a:t>
+            </a:r>
+            <a:endParaRPr lang="en-US" sz="1150" dirty="0"/>
+          </a:p>
+        </p:txBody>
+      </p:sp>
+      <p:sp>
+        <p:nvSpPr>
+          <p:cNvPr id="34" name="Shape 32"/>
+          <p:cNvSpPr/>
+          <p:nvPr/>
+        </p:nvSpPr>
+        <p:spPr>
+          <a:xfrm>
+            <a:off x="640080" y="5166360"/>
+            <a:ext cx="5303520" cy="1005840"/>
+          </a:xfrm>
+          <a:prstGeom prst="roundRect">
+            <a:avLst>
+              <a:gd name="adj" fmla="val 8182"/>
+            </a:avLst>
+          </a:prstGeom>
+          <a:solidFill>
+            <a:srgbClr val="FFFFFF"/>
+          </a:solidFill>
+          <a:ln/>
+          <a:effectLst>
+            <a:outerShdw sx="100000" sy="100000" kx="0" ky="0" algn="bl" rotWithShape="0" blurRad="114300" dist="38100" dir="5400000">
+              <a:srgbClr val="D8CFBE">
+                <a:alpha val="50000"/>
+              </a:srgbClr>
+            </a:outerShdw>
+          </a:effectLst>
+        </p:spPr>
+      </p:sp>
+      <p:sp>
+        <p:nvSpPr>
+          <p:cNvPr id="35" name="Shape 33"/>
+          <p:cNvSpPr/>
+          <p:nvPr/>
+        </p:nvSpPr>
+        <p:spPr>
+          <a:xfrm>
+            <a:off x="868680" y="5422392"/>
+            <a:ext cx="566928" cy="530352"/>
+          </a:xfrm>
+          <a:prstGeom prst="hexagon">
+            <a:avLst/>
+          </a:prstGeom>
+          <a:solidFill>
+            <a:srgbClr val="E8A400"/>
+          </a:solidFill>
+          <a:ln/>
+        </p:spPr>
+      </p:sp>
+      <p:sp>
+        <p:nvSpPr>
+          <p:cNvPr id="36" name="Text 34"/>
+          <p:cNvSpPr/>
+          <p:nvPr/>
+        </p:nvSpPr>
+        <p:spPr>
+          <a:xfrm>
+            <a:off x="868680" y="5422392"/>
+            <a:ext cx="566928" cy="530352"/>
+          </a:xfrm>
+          <a:prstGeom prst="rect">
+            <a:avLst/>
+          </a:prstGeom>
+          <a:noFill/>
+          <a:ln/>
+        </p:spPr>
+        <p:txBody>
+          <a:bodyPr wrap="square" lIns="0" tIns="0" rIns="0" bIns="0" rtlCol="0" anchor="ctr"/>
+          <a:lstStyle/>
+          <a:p>
+            <a:pPr algn="ctr" indent="0" marL="0">
+              <a:buNone/>
+            </a:pPr>
+            <a:r>
+              <a:rPr lang="en-US" sz="1800" b="1" dirty="0">
+                <a:solidFill>
+                  <a:srgbClr val="FFFFFF"/>
+                </a:solidFill>
+                <a:latin typeface="Cambria" pitchFamily="34" charset="0"/>
+                <a:ea typeface="Cambria" pitchFamily="34" charset="-122"/>
+                <a:cs typeface="Cambria" pitchFamily="34" charset="-120"/>
+              </a:rPr>
+              <a:t>6</a:t>
+            </a:r>
+            <a:endParaRPr lang="en-US" sz="1800" dirty="0"/>
+          </a:p>
+        </p:txBody>
+      </p:sp>
+      <p:sp>
+        <p:nvSpPr>
+          <p:cNvPr id="37" name="Text 35"/>
+          <p:cNvSpPr/>
+          <p:nvPr/>
+        </p:nvSpPr>
+        <p:spPr>
+          <a:xfrm>
+            <a:off x="1600200" y="5349240"/>
+            <a:ext cx="4206240" cy="365760"/>
+          </a:xfrm>
+          <a:prstGeom prst="rect">
+            <a:avLst/>
+          </a:prstGeom>
+          <a:noFill/>
+          <a:ln/>
+        </p:spPr>
+        <p:txBody>
+          <a:bodyPr wrap="square" rtlCol="0" anchor="ctr"/>
+          <a:lstStyle/>
+          <a:p>
+            <a:pPr indent="0" marL="0">
+              <a:buNone/>
+            </a:pPr>
+            <a:r>
+              <a:rPr lang="en-US" sz="1500" b="1" dirty="0">
+                <a:solidFill>
+                  <a:srgbClr val="211D17"/>
+                </a:solidFill>
+                <a:latin typeface="Cambria" pitchFamily="34" charset="0"/>
+                <a:ea typeface="Cambria" pitchFamily="34" charset="-122"/>
+                <a:cs typeface="Cambria" pitchFamily="34" charset="-120"/>
+              </a:rPr>
+              <a:t>Invite alpha</a:t>
+            </a:r>
+            <a:endParaRPr lang="en-US" sz="1500" dirty="0"/>
+          </a:p>
+        </p:txBody>
+      </p:sp>
+      <p:sp>
+        <p:nvSpPr>
+          <p:cNvPr id="38" name="Text 36"/>
+          <p:cNvSpPr/>
+          <p:nvPr/>
+        </p:nvSpPr>
+        <p:spPr>
+          <a:xfrm>
+            <a:off x="1600200" y="5696712"/>
+            <a:ext cx="4251960" cy="457200"/>
+          </a:xfrm>
+          <a:prstGeom prst="rect">
+            <a:avLst/>
+          </a:prstGeom>
+          <a:noFill/>
+          <a:ln/>
+        </p:spPr>
+        <p:txBody>
+          <a:bodyPr wrap="square" rtlCol="0" anchor="ctr"/>
+          <a:lstStyle/>
+          <a:p>
+            <a:pPr indent="0" marL="0">
+              <a:buNone/>
+            </a:pPr>
+            <a:r>
+              <a:rPr lang="en-US" sz="1150" dirty="0">
+                <a:solidFill>
+                  <a:srgbClr val="6A6153"/>
+                </a:solidFill>
+                <a:latin typeface="Calibri" pitchFamily="34" charset="0"/>
+                <a:ea typeface="Calibri" pitchFamily="34" charset="-122"/>
+                <a:cs typeface="Calibri" pitchFamily="34" charset="-120"/>
+              </a:rPr>
+              <a:t>100–300 families via 3–5 coaches — measure retention, iterate</a:t>
+            </a:r>
+            <a:endParaRPr lang="en-US" sz="1150" dirty="0"/>
+          </a:p>
+        </p:txBody>
+      </p:sp>
+      <p:sp>
+        <p:nvSpPr>
+          <p:cNvPr id="39" name="Text 37"/>
+          <p:cNvSpPr/>
+          <p:nvPr/>
+        </p:nvSpPr>
+        <p:spPr>
+          <a:xfrm>
+            <a:off x="640080" y="6309360"/>
+            <a:ext cx="10911535" cy="365760"/>
+          </a:xfrm>
+          <a:prstGeom prst="rect">
+            <a:avLst/>
+          </a:prstGeom>
+          <a:noFill/>
+          <a:ln/>
+        </p:spPr>
+        <p:txBody>
+          <a:bodyPr wrap="square" rtlCol="0" anchor="ctr"/>
+          <a:lstStyle/>
+          <a:p>
+            <a:pPr indent="0" marL="0">
+              <a:buNone/>
+            </a:pPr>
+            <a:r>
+              <a:rPr lang="en-US" sz="1200" i="1" dirty="0">
+                <a:solidFill>
+                  <a:srgbClr val="B67B00"/>
+                </a:solidFill>
+                <a:latin typeface="Calibri" pitchFamily="34" charset="0"/>
+                <a:ea typeface="Calibri" pitchFamily="34" charset="-122"/>
+                <a:cs typeface="Calibri" pitchFamily="34" charset="-120"/>
+              </a:rPr>
+              <a:t>Alpha exit: RLS proven · weekly-email open rate ≥ 40% · a clean payment per region rail · healthy W4 kid retention · ≥ 10 testimonials.</a:t>
+            </a:r>
+            <a:endParaRPr lang="en-US" sz="1200" dirty="0"/>
+          </a:p>
+        </p:txBody>
+      </p:sp>
+    </p:spTree>
+  </p:cSld>
+  <p:clrMapOvr>
+    <a:masterClrMapping/>
+  </p:clrMapOvr>
+</p:sld>
+</file>
+
+<file path=ppt/slides/slide17.xml><?xml version="1.0" encoding="utf-8"?>
+<p:sld xmlns:a="http://schemas.openxmlformats.org/drawingml/2006/main" xmlns:r="http://schemas.openxmlformats.org/officeDocument/2006/relationships" xmlns:p="http://schemas.openxmlformats.org/presentationml/2006/main">
+  <p:cSld name="Slide 17">
     <p:bg>
       <p:bgPr>
         <a:solidFill>
